--- a/slides/SentinelAPI_Pitch.pptx
+++ b/slides/SentinelAPI_Pitch.pptx
@@ -3112,11 +3112,11 @@
             <a:avLst/>
           </a:prstGeom>
           <a:solidFill>
-            <a:srgbClr val="06080F"/>
+            <a:srgbClr val="070913"/>
           </a:solidFill>
           <a:ln>
             <a:solidFill>
-              <a:srgbClr val="06080F"/>
+              <a:srgbClr val="070913"/>
             </a:solidFill>
           </a:ln>
         </p:spPr>
@@ -3144,22 +3144,22 @@
       </p:sp>
       <p:sp>
         <p:nvSpPr>
-          <p:cNvPr id="3" name="Rectangle 2"/>
+          <p:cNvPr id="3" name="Rounded Rectangle 2"/>
           <p:cNvSpPr/>
           <p:nvPr/>
         </p:nvSpPr>
         <p:spPr>
           <a:xfrm>
             <a:off x="731520" y="548640"/>
-            <a:ext cx="1645920" cy="50800"/>
-          </a:xfrm>
-          <a:prstGeom prst="rect">
+            <a:ext cx="5120640" cy="457200"/>
+          </a:xfrm>
+          <a:prstGeom prst="roundRect">
             <a:avLst/>
           </a:prstGeom>
           <a:solidFill>
-            <a:srgbClr val="38BDF8"/>
+            <a:srgbClr val="131A36"/>
           </a:solidFill>
-          <a:ln>
+          <a:ln w="25400">
             <a:solidFill>
               <a:srgbClr val="38BDF8"/>
             </a:solidFill>
@@ -3183,7 +3183,17 @@
           <a:bodyPr rtlCol="0" anchor="ctr"/>
           <a:lstStyle/>
           <a:p>
-            <a:pPr algn="ctr"/>
+            <a:pPr algn="ctr">
+              <a:defRPr sz="1100" b="1">
+                <a:solidFill>
+                  <a:srgbClr val="38BDF8"/>
+                </a:solidFill>
+                <a:latin typeface="Trebuchet MS"/>
+              </a:defRPr>
+            </a:pPr>
+            <a:r>
+              <a:t>★ AMIHACKS 2026 · TRACK C: CYBERSECURITY &amp; API SECURITY</a:t>
+            </a:r>
           </a:p>
         </p:txBody>
       </p:sp>
@@ -3195,8 +3205,8 @@
         </p:nvSpPr>
         <p:spPr>
           <a:xfrm>
-            <a:off x="731520" y="1005840"/>
-            <a:ext cx="10698480" cy="2926080"/>
+            <a:off x="731520" y="1188720"/>
+            <a:ext cx="10728655" cy="2743200"/>
           </a:xfrm>
           <a:prstGeom prst="rect">
             <a:avLst/>
@@ -3211,62 +3221,46 @@
           <a:p>
             <a:pPr>
               <a:spcAft>
-                <a:spcPts val="800"/>
+                <a:spcPts val="400"/>
               </a:spcAft>
-              <a:defRPr sz="1200" b="1">
-                <a:solidFill>
-                  <a:srgbClr val="38BDF8"/>
-                </a:solidFill>
-                <a:latin typeface="Inter"/>
-              </a:defRPr>
-            </a:pPr>
-            <a:r>
-              <a:t>TRACK C — CYBERSECURITY &amp; API SECURITY</a:t>
+              <a:defRPr sz="5600" b="1">
+                <a:solidFill>
+                  <a:srgbClr val="FFFFFF"/>
+                </a:solidFill>
+                <a:latin typeface="Trebuchet MS"/>
+              </a:defRPr>
+            </a:pPr>
+            <a:r>
+              <a:t>SentinelAPI</a:t>
             </a:r>
           </a:p>
           <a:p>
             <a:pPr>
               <a:spcAft>
-                <a:spcPts val="800"/>
+                <a:spcPts val="1600"/>
               </a:spcAft>
-              <a:defRPr sz="4600" b="1">
+              <a:defRPr sz="2400" b="1">
+                <a:solidFill>
+                  <a:srgbClr val="818CF8"/>
+                </a:solidFill>
+                <a:latin typeface="Trebuchet MS"/>
+              </a:defRPr>
+            </a:pPr>
+            <a:r>
+              <a:t>Autonomous Differential API Security Testing</a:t>
+            </a:r>
+          </a:p>
+          <a:p>
+            <a:pPr>
+              <a:defRPr sz="1600" b="1">
                 <a:solidFill>
                   <a:srgbClr val="F8FAFC"/>
                 </a:solidFill>
-                <a:latin typeface="Inter"/>
-              </a:defRPr>
-            </a:pPr>
-            <a:r>
-              <a:t>SentinelAPI</a:t>
-            </a:r>
-          </a:p>
-          <a:p>
-            <a:pPr>
-              <a:spcAft>
-                <a:spcPts val="1400"/>
-              </a:spcAft>
-              <a:defRPr sz="2200" b="1">
-                <a:solidFill>
-                  <a:srgbClr val="6366F1"/>
-                </a:solidFill>
-                <a:latin typeface="Inter"/>
-              </a:defRPr>
-            </a:pPr>
-            <a:r>
-              <a:t>Autonomous Differential API Security Testing</a:t>
-            </a:r>
-          </a:p>
-          <a:p>
-            <a:pPr>
-              <a:defRPr sz="1300">
-                <a:solidFill>
-                  <a:srgbClr val="94A3B8"/>
-                </a:solidFill>
-                <a:latin typeface="Inter"/>
-              </a:defRPr>
-            </a:pPr>
-            <a:r>
-              <a:t>Ingesting OpenAPI 3.x specifications, dynamically authenticating multiple test personas, learning ground-truth resource ownership without brute-forcing, and executing differential response analysis to eliminate authorization blindspots before production.</a:t>
+                <a:latin typeface="Calibri"/>
+              </a:defRPr>
+            </a:pPr>
+            <a:r>
+              <a:t>While 200 teams build generic AI wrappers or test basic SQLi/XSS, SentinelAPI solves the #1 blindspot in modern cloud software: Broken Object Level Authorization (BOLA/IDOR).</a:t>
             </a:r>
           </a:p>
         </p:txBody>
@@ -3280,17 +3274,17 @@
         <p:spPr>
           <a:xfrm>
             <a:off x="731520" y="4114800"/>
-            <a:ext cx="3413455" cy="1188720"/>
+            <a:ext cx="3413455" cy="1280160"/>
           </a:xfrm>
           <a:prstGeom prst="roundRect">
             <a:avLst/>
           </a:prstGeom>
           <a:solidFill>
-            <a:srgbClr val="0D111C"/>
+            <a:srgbClr val="0E1326"/>
           </a:solidFill>
-          <a:ln w="12700">
+          <a:ln w="19050">
             <a:solidFill>
-              <a:srgbClr val="232D42"/>
+              <a:srgbClr val="38BDF8"/>
             </a:solidFill>
           </a:ln>
         </p:spPr>
@@ -3324,8 +3318,8 @@
         </p:nvSpPr>
         <p:spPr>
           <a:xfrm>
-            <a:off x="914400" y="4251960"/>
-            <a:ext cx="3047695" cy="914400"/>
+            <a:off x="914400" y="4224528"/>
+            <a:ext cx="3047695" cy="1051560"/>
           </a:xfrm>
           <a:prstGeom prst="rect">
             <a:avLst/>
@@ -3346,24 +3340,24 @@
                 <a:solidFill>
                   <a:srgbClr val="38BDF8"/>
                 </a:solidFill>
-                <a:latin typeface="Inter"/>
-              </a:defRPr>
-            </a:pPr>
-            <a:r>
-              <a:t>OWASP API TOP 10</a:t>
-            </a:r>
-          </a:p>
-          <a:p>
-            <a:pPr>
-              <a:defRPr sz="1000">
+                <a:latin typeface="Trebuchet MS"/>
+              </a:defRPr>
+            </a:pPr>
+            <a:r>
+              <a:t>WHAT TRACK C DEMANDS · OWASP API #1 Focus</a:t>
+            </a:r>
+          </a:p>
+          <a:p>
+            <a:pPr>
+              <a:defRPr sz="1100">
                 <a:solidFill>
                   <a:srgbClr val="94A3B8"/>
                 </a:solidFill>
-                <a:latin typeface="Inter"/>
-              </a:defRPr>
-            </a:pPr>
-            <a:r>
-              <a:t>Automated detection of BOLA/IDOR, BFLA, and excessive data exposure.</a:t>
+                <a:latin typeface="Calibri"/>
+              </a:defRPr>
+            </a:pPr>
+            <a:r>
+              <a:t>Automated detection of authorization logic flaws across multi-tenant boundaries that traditional scanners miss completely.</a:t>
             </a:r>
           </a:p>
         </p:txBody>
@@ -3377,17 +3371,17 @@
         <p:spPr>
           <a:xfrm>
             <a:off x="4389120" y="4114800"/>
-            <a:ext cx="3413455" cy="1188720"/>
+            <a:ext cx="3413455" cy="1280160"/>
           </a:xfrm>
           <a:prstGeom prst="roundRect">
             <a:avLst/>
           </a:prstGeom>
           <a:solidFill>
-            <a:srgbClr val="0D111C"/>
+            <a:srgbClr val="0E1326"/>
           </a:solidFill>
-          <a:ln w="12700">
+          <a:ln w="19050">
             <a:solidFill>
-              <a:srgbClr val="232D42"/>
+              <a:srgbClr val="34D399"/>
             </a:solidFill>
           </a:ln>
         </p:spPr>
@@ -3421,8 +3415,8 @@
         </p:nvSpPr>
         <p:spPr>
           <a:xfrm>
-            <a:off x="4572000" y="4251960"/>
-            <a:ext cx="3047695" cy="914400"/>
+            <a:off x="4572000" y="4224528"/>
+            <a:ext cx="3047695" cy="1051560"/>
           </a:xfrm>
           <a:prstGeom prst="rect">
             <a:avLst/>
@@ -3441,26 +3435,26 @@
               </a:spcAft>
               <a:defRPr sz="1100" b="1">
                 <a:solidFill>
-                  <a:srgbClr val="38BDF8"/>
-                </a:solidFill>
-                <a:latin typeface="Inter"/>
-              </a:defRPr>
-            </a:pPr>
-            <a:r>
-              <a:t>EMPIRICAL PROOF</a:t>
-            </a:r>
-          </a:p>
-          <a:p>
-            <a:pPr>
-              <a:defRPr sz="1000">
+                  <a:srgbClr val="34D399"/>
+                </a:solidFill>
+                <a:latin typeface="Trebuchet MS"/>
+              </a:defRPr>
+            </a:pPr>
+            <a:r>
+              <a:t>HOW WE SOLVE IT · Ground-Truth Matrix</a:t>
+            </a:r>
+          </a:p>
+          <a:p>
+            <a:pPr>
+              <a:defRPr sz="1100">
                 <a:solidFill>
                   <a:srgbClr val="94A3B8"/>
                 </a:solidFill>
-                <a:latin typeface="Inter"/>
-              </a:defRPr>
-            </a:pPr>
-            <a:r>
-              <a:t>Zero false positives via live attack reproduction and reproducible cURL PoCs.</a:t>
+                <a:latin typeface="Calibri"/>
+              </a:defRPr>
+            </a:pPr>
+            <a:r>
+              <a:t>Learns real resource ownership without guessing IDs, then compares cross-user responses using weighted Jaccard differential distance.</a:t>
             </a:r>
           </a:p>
         </p:txBody>
@@ -3474,17 +3468,17 @@
         <p:spPr>
           <a:xfrm>
             <a:off x="8046720" y="4114800"/>
-            <a:ext cx="3413455" cy="1188720"/>
+            <a:ext cx="3413455" cy="1280160"/>
           </a:xfrm>
           <a:prstGeom prst="roundRect">
             <a:avLst/>
           </a:prstGeom>
           <a:solidFill>
-            <a:srgbClr val="0D111C"/>
+            <a:srgbClr val="0E1326"/>
           </a:solidFill>
-          <a:ln w="12700">
+          <a:ln w="19050">
             <a:solidFill>
-              <a:srgbClr val="232D42"/>
+              <a:srgbClr val="C084FC"/>
             </a:solidFill>
           </a:ln>
         </p:spPr>
@@ -3518,8 +3512,8 @@
         </p:nvSpPr>
         <p:spPr>
           <a:xfrm>
-            <a:off x="8229600" y="4251960"/>
-            <a:ext cx="3047695" cy="914400"/>
+            <a:off x="8229600" y="4224528"/>
+            <a:ext cx="3047695" cy="1051560"/>
           </a:xfrm>
           <a:prstGeom prst="rect">
             <a:avLst/>
@@ -3538,26 +3532,26 @@
               </a:spcAft>
               <a:defRPr sz="1100" b="1">
                 <a:solidFill>
-                  <a:srgbClr val="38BDF8"/>
-                </a:solidFill>
-                <a:latin typeface="Inter"/>
-              </a:defRPr>
-            </a:pPr>
-            <a:r>
-              <a:t>ENTERPRISE GUARDRAILS</a:t>
-            </a:r>
-          </a:p>
-          <a:p>
-            <a:pPr>
-              <a:defRPr sz="1000">
+                  <a:srgbClr val="C084FC"/>
+                </a:solidFill>
+                <a:latin typeface="Trebuchet MS"/>
+              </a:defRPr>
+            </a:pPr>
+            <a:r>
+              <a:t>WHY WE WIN · Zero False Positives</a:t>
+            </a:r>
+          </a:p>
+          <a:p>
+            <a:pPr>
+              <a:defRPr sz="1100">
                 <a:solidFill>
                   <a:srgbClr val="94A3B8"/>
                 </a:solidFill>
-                <a:latin typeface="Inter"/>
-              </a:defRPr>
-            </a:pPr>
-            <a:r>
-              <a:t>Strict scope guards, 20 RPS rate cap, zero secrets leaked, evidence-only AI.</a:t>
+                <a:latin typeface="Calibri"/>
+              </a:defRPr>
+            </a:pPr>
+            <a:r>
+              <a:t>Empirical live re-probes verify 100% reproducibility, generating shell-safe copy-paste cURL PoCs with zero cleartext token leaks.</a:t>
             </a:r>
           </a:p>
         </p:txBody>
@@ -3570,18 +3564,18 @@
         </p:nvSpPr>
         <p:spPr>
           <a:xfrm>
-            <a:off x="731520" y="5486400"/>
-            <a:ext cx="10728655" cy="685800"/>
+            <a:off x="731520" y="5577840"/>
+            <a:ext cx="10728655" cy="594360"/>
           </a:xfrm>
           <a:prstGeom prst="roundRect">
             <a:avLst/>
           </a:prstGeom>
           <a:solidFill>
-            <a:srgbClr val="151B2B"/>
+            <a:srgbClr val="131A36"/>
           </a:solidFill>
-          <a:ln w="12700">
+          <a:ln w="19050">
             <a:solidFill>
-              <a:srgbClr val="6366F1"/>
+              <a:srgbClr val="38BDF8"/>
             </a:solidFill>
           </a:ln>
         </p:spPr>
@@ -3615,8 +3609,8 @@
         </p:nvSpPr>
         <p:spPr>
           <a:xfrm>
-            <a:off x="914400" y="5577840"/>
-            <a:ext cx="10362895" cy="502920"/>
+            <a:off x="914400" y="5650992"/>
+            <a:ext cx="10362895" cy="411480"/>
           </a:xfrm>
           <a:prstGeom prst="rect">
             <a:avLst/>
@@ -3624,7 +3618,7 @@
           <a:noFill/>
         </p:spPr>
         <p:txBody>
-          <a:bodyPr wrap="square">
+          <a:bodyPr wrap="none">
             <a:spAutoFit/>
           </a:bodyPr>
           <a:lstStyle/>
@@ -3632,13 +3626,13 @@
             <a:pPr>
               <a:defRPr sz="1100" b="1">
                 <a:solidFill>
-                  <a:srgbClr val="F8FAFC"/>
-                </a:solidFill>
-                <a:latin typeface="Inter"/>
-              </a:defRPr>
-            </a:pPr>
-            <a:r>
-              <a:t>Lead Architect: Tanuj  |  Event: AmiHacks 2026  |  GitHub: https://github.com/x03tanuj/sentinel-api</a:t>
+                  <a:srgbClr val="FFFFFF"/>
+                </a:solidFill>
+                <a:latin typeface="Trebuchet MS"/>
+              </a:defRPr>
+            </a:pPr>
+            <a:r>
+              <a:t>Lead Security Architect: Tanuj  |  Full-Stack &amp; Security Engineering  |  GitHub: https://github.com/x03tanuj/sentinel-api</a:t>
             </a:r>
           </a:p>
         </p:txBody>
@@ -3676,11 +3670,11 @@
             <a:avLst/>
           </a:prstGeom>
           <a:solidFill>
-            <a:srgbClr val="06080F"/>
+            <a:srgbClr val="070913"/>
           </a:solidFill>
           <a:ln>
             <a:solidFill>
-              <a:srgbClr val="06080F"/>
+              <a:srgbClr val="070913"/>
             </a:solidFill>
           </a:ln>
         </p:spPr>
@@ -3715,7 +3709,7 @@
         <p:spPr>
           <a:xfrm>
             <a:off x="731520" y="365760"/>
-            <a:ext cx="10698480" cy="822960"/>
+            <a:ext cx="10728655" cy="1005840"/>
           </a:xfrm>
           <a:prstGeom prst="rect">
             <a:avLst/>
@@ -3732,24 +3726,24 @@
               <a:spcAft>
                 <a:spcPts val="200"/>
               </a:spcAft>
-              <a:defRPr sz="1000" b="1">
+              <a:defRPr sz="1100" b="1">
                 <a:solidFill>
                   <a:srgbClr val="38BDF8"/>
                 </a:solidFill>
-                <a:latin typeface="Inter"/>
-              </a:defRPr>
-            </a:pPr>
-            <a:r>
-              <a:t>CONCLUSION &amp; Q&amp;A</a:t>
-            </a:r>
-          </a:p>
-          <a:p>
-            <a:pPr>
-              <a:defRPr sz="2200" b="1">
-                <a:solidFill>
-                  <a:srgbClr val="F8FAFC"/>
-                </a:solidFill>
-                <a:latin typeface="Inter"/>
+                <a:latin typeface="Trebuchet MS"/>
+              </a:defRPr>
+            </a:pPr>
+            <a:r>
+              <a:t>● CONCLUSION &amp; Q&amp;A</a:t>
+            </a:r>
+          </a:p>
+          <a:p>
+            <a:pPr>
+              <a:defRPr sz="2600" b="1">
+                <a:solidFill>
+                  <a:srgbClr val="FFFFFF"/>
+                </a:solidFill>
+                <a:latin typeface="Trebuchet MS"/>
               </a:defRPr>
             </a:pPr>
             <a:r>
@@ -3766,18 +3760,18 @@
         </p:nvSpPr>
         <p:spPr>
           <a:xfrm>
-            <a:off x="731520" y="1234440"/>
-            <a:ext cx="10728655" cy="19050"/>
+            <a:off x="731520" y="1371600"/>
+            <a:ext cx="10728655" cy="25400"/>
           </a:xfrm>
           <a:prstGeom prst="rect">
             <a:avLst/>
           </a:prstGeom>
           <a:solidFill>
-            <a:srgbClr val="232D42"/>
+            <a:srgbClr val="202945"/>
           </a:solidFill>
           <a:ln>
             <a:solidFill>
-              <a:srgbClr val="232D42"/>
+              <a:srgbClr val="202945"/>
             </a:solidFill>
           </a:ln>
         </p:spPr>
@@ -3826,11 +3820,11 @@
           <a:lstStyle/>
           <a:p>
             <a:pPr>
-              <a:defRPr sz="900">
+              <a:defRPr sz="1000" b="1">
                 <a:solidFill>
                   <a:srgbClr val="64748B"/>
                 </a:solidFill>
-                <a:latin typeface="Inter"/>
+                <a:latin typeface="Calibri"/>
               </a:defRPr>
             </a:pPr>
             <a:r>
@@ -3847,18 +3841,18 @@
         </p:nvSpPr>
         <p:spPr>
           <a:xfrm>
-            <a:off x="731520" y="1463040"/>
-            <a:ext cx="5272430" cy="4663440"/>
+            <a:off x="731520" y="1645920"/>
+            <a:ext cx="5272430" cy="4480560"/>
           </a:xfrm>
           <a:prstGeom prst="roundRect">
             <a:avLst/>
           </a:prstGeom>
           <a:solidFill>
-            <a:srgbClr val="0D111C"/>
+            <a:srgbClr val="0E1326"/>
           </a:solidFill>
-          <a:ln w="12700">
+          <a:ln w="25400">
             <a:solidFill>
-              <a:srgbClr val="232D42"/>
+              <a:srgbClr val="38BDF8"/>
             </a:solidFill>
           </a:ln>
         </p:spPr>
@@ -3892,8 +3886,8 @@
         </p:nvSpPr>
         <p:spPr>
           <a:xfrm>
-            <a:off x="1005840" y="1645920"/>
-            <a:ext cx="4723790" cy="4297680"/>
+            <a:off x="1005840" y="1828800"/>
+            <a:ext cx="4723790" cy="4114800"/>
           </a:xfrm>
           <a:prstGeom prst="rect">
             <a:avLst/>
@@ -3908,17 +3902,33 @@
           <a:p>
             <a:pPr>
               <a:spcAft>
-                <a:spcPts val="1000"/>
+                <a:spcPts val="600"/>
+              </a:spcAft>
+              <a:defRPr sz="1400" b="1">
+                <a:solidFill>
+                  <a:srgbClr val="38BDF8"/>
+                </a:solidFill>
+                <a:latin typeface="Trebuchet MS"/>
+              </a:defRPr>
+            </a:pPr>
+            <a:r>
+              <a:t>CORE TEAM &amp; ARCHITECTURAL CONTRIBUTIONS</a:t>
+            </a:r>
+          </a:p>
+          <a:p>
+            <a:pPr>
+              <a:spcAft>
+                <a:spcPts val="1200"/>
               </a:spcAft>
               <a:defRPr sz="1300" b="1">
                 <a:solidFill>
-                  <a:srgbClr val="38BDF8"/>
-                </a:solidFill>
-                <a:latin typeface="Inter"/>
-              </a:defRPr>
-            </a:pPr>
-            <a:r>
-              <a:t>CORE TEAM &amp; CONTRIBUTIONS</a:t>
+                  <a:srgbClr val="FFFFFF"/>
+                </a:solidFill>
+                <a:latin typeface="Trebuchet MS"/>
+              </a:defRPr>
+            </a:pPr>
+            <a:r>
+              <a:t>Tanuj — Lead Security Architect &amp; Full-Stack Engineer</a:t>
             </a:r>
           </a:p>
           <a:p>
@@ -3926,91 +3936,75 @@
               <a:spcAft>
                 <a:spcPts val="600"/>
               </a:spcAft>
-              <a:defRPr sz="1100" b="1">
-                <a:solidFill>
-                  <a:srgbClr val="F8FAFC"/>
-                </a:solidFill>
-                <a:latin typeface="Inter"/>
-              </a:defRPr>
-            </a:pPr>
-            <a:r>
-              <a:t>Tanuj — Lead Security Architect &amp; Full-Stack Engineer</a:t>
+              <a:defRPr sz="1100">
+                <a:solidFill>
+                  <a:srgbClr val="94A3B8"/>
+                </a:solidFill>
+                <a:latin typeface="Calibri"/>
+              </a:defRPr>
+            </a:pPr>
+            <a:r>
+              <a:t>• Core Security Engine: Differential response analyzer, ground-truth authorization matrix compiler, and 6 modular OWASP security checks.</a:t>
             </a:r>
           </a:p>
           <a:p>
             <a:pPr>
               <a:spcAft>
-                <a:spcPts val="400"/>
+                <a:spcPts val="600"/>
               </a:spcAft>
-              <a:defRPr sz="950">
+              <a:defRPr sz="1100">
                 <a:solidFill>
                   <a:srgbClr val="94A3B8"/>
                 </a:solidFill>
-                <a:latin typeface="Inter"/>
-              </a:defRPr>
-            </a:pPr>
-            <a:r>
-              <a:t>• Core Security Engine: Differential response analyzer, ground-truth authorization matrix compiler, and 6 modular OWASP security checks.</a:t>
+                <a:latin typeface="Calibri"/>
+              </a:defRPr>
+            </a:pPr>
+            <a:r>
+              <a:t>• Execution &amp; Safety Infrastructure: Token-bucket HTTP executor, strict immutable scope guard, rate/budget caps, and multi-persona JWT orchestrator.</a:t>
             </a:r>
           </a:p>
           <a:p>
             <a:pPr>
               <a:spcAft>
-                <a:spcPts val="400"/>
+                <a:spcPts val="600"/>
               </a:spcAft>
-              <a:defRPr sz="950">
+              <a:defRPr sz="1100">
                 <a:solidFill>
                   <a:srgbClr val="94A3B8"/>
                 </a:solidFill>
-                <a:latin typeface="Inter"/>
-              </a:defRPr>
-            </a:pPr>
-            <a:r>
-              <a:t>• Execution &amp; Safety Infrastructure: Token-bucket HTTP executor, strict immutable scope guard, rate/budget caps, and multi-persona JWT orchestrator.</a:t>
+                <a:latin typeface="Calibri"/>
+              </a:defRPr>
+            </a:pPr>
+            <a:r>
+              <a:t>• Backend &amp; Storage: FastAPI async orchestrator, real-time SSE telemetry stream, and atomic JSON store with secret leak guards.</a:t>
             </a:r>
           </a:p>
           <a:p>
             <a:pPr>
               <a:spcAft>
-                <a:spcPts val="400"/>
+                <a:spcPts val="600"/>
               </a:spcAft>
-              <a:defRPr sz="950">
+              <a:defRPr sz="1100">
                 <a:solidFill>
                   <a:srgbClr val="94A3B8"/>
                 </a:solidFill>
-                <a:latin typeface="Inter"/>
-              </a:defRPr>
-            </a:pPr>
-            <a:r>
-              <a:t>• Backend &amp; Storage: FastAPI async orchestrator, real-time SSE telemetry stream, and atomic JSON store with secret leak guards.</a:t>
+                <a:latin typeface="Calibri"/>
+              </a:defRPr>
+            </a:pPr>
+            <a:r>
+              <a:t>• Tactical Web UI: React 19/Vite dashboard, Results Triage Workspace, Authorization Heatmap, and Differential Inspector.</a:t>
             </a:r>
           </a:p>
           <a:p>
             <a:pPr>
               <a:spcAft>
-                <a:spcPts val="400"/>
+                <a:spcPts val="600"/>
               </a:spcAft>
-              <a:defRPr sz="950">
+              <a:defRPr sz="1100">
                 <a:solidFill>
                   <a:srgbClr val="94A3B8"/>
                 </a:solidFill>
-                <a:latin typeface="Inter"/>
-              </a:defRPr>
-            </a:pPr>
-            <a:r>
-              <a:t>• Tactical Web UI: React 19/Vite dashboard, Results Triage Workspace, Authorization Heatmap, and Differential Inspector.</a:t>
-            </a:r>
-          </a:p>
-          <a:p>
-            <a:pPr>
-              <a:spcAft>
-                <a:spcPts val="400"/>
-              </a:spcAft>
-              <a:defRPr sz="950">
-                <a:solidFill>
-                  <a:srgbClr val="94A3B8"/>
-                </a:solidFill>
-                <a:latin typeface="Inter"/>
+                <a:latin typeface="Calibri"/>
               </a:defRPr>
             </a:pPr>
             <a:r>
@@ -4027,18 +4021,18 @@
         </p:nvSpPr>
         <p:spPr>
           <a:xfrm>
-            <a:off x="6186830" y="1463040"/>
-            <a:ext cx="5272430" cy="4663440"/>
+            <a:off x="6186830" y="1645920"/>
+            <a:ext cx="5272430" cy="4480560"/>
           </a:xfrm>
           <a:prstGeom prst="roundRect">
             <a:avLst/>
           </a:prstGeom>
           <a:solidFill>
-            <a:srgbClr val="0D111C"/>
+            <a:srgbClr val="0E1326"/>
           </a:solidFill>
-          <a:ln w="12700">
+          <a:ln w="25400">
             <a:solidFill>
-              <a:srgbClr val="6366F1"/>
+              <a:srgbClr val="818CF8"/>
             </a:solidFill>
           </a:ln>
         </p:spPr>
@@ -4072,8 +4066,8 @@
         </p:nvSpPr>
         <p:spPr>
           <a:xfrm>
-            <a:off x="6461150" y="1645920"/>
-            <a:ext cx="4723790" cy="4297680"/>
+            <a:off x="6461150" y="1828800"/>
+            <a:ext cx="4723790" cy="4114800"/>
           </a:xfrm>
           <a:prstGeom prst="rect">
             <a:avLst/>
@@ -4088,29 +4082,29 @@
           <a:p>
             <a:pPr>
               <a:spcAft>
-                <a:spcPts val="1400"/>
+                <a:spcPts val="1000"/>
+              </a:spcAft>
+              <a:defRPr sz="1400" b="1">
+                <a:solidFill>
+                  <a:srgbClr val="818CF8"/>
+                </a:solidFill>
+                <a:latin typeface="Trebuchet MS"/>
+              </a:defRPr>
+            </a:pPr>
+            <a:r>
+              <a:t>PROJECT SUMMARY &amp; LIVE ACCESS</a:t>
+            </a:r>
+          </a:p>
+          <a:p>
+            <a:pPr>
+              <a:spcAft>
+                <a:spcPts val="1600"/>
               </a:spcAft>
               <a:defRPr sz="1300" b="1">
                 <a:solidFill>
-                  <a:srgbClr val="6366F1"/>
-                </a:solidFill>
-                <a:latin typeface="Inter"/>
-              </a:defRPr>
-            </a:pPr>
-            <a:r>
-              <a:t>PROJECT SUMMARY &amp; DEMO ACCESS</a:t>
-            </a:r>
-          </a:p>
-          <a:p>
-            <a:pPr>
-              <a:spcAft>
-                <a:spcPts val="1800"/>
-              </a:spcAft>
-              <a:defRPr sz="1200" b="1">
-                <a:solidFill>
-                  <a:srgbClr val="F8FAFC"/>
-                </a:solidFill>
-                <a:latin typeface="Inter"/>
+                  <a:srgbClr val="FFFFFF"/>
+                </a:solidFill>
+                <a:latin typeface="Trebuchet MS"/>
               </a:defRPr>
             </a:pPr>
             <a:r>
@@ -4122,11 +4116,11 @@
               <a:spcAft>
                 <a:spcPts val="600"/>
               </a:spcAft>
-              <a:defRPr sz="1000" b="1">
+              <a:defRPr sz="1100" b="1">
                 <a:solidFill>
                   <a:srgbClr val="38BDF8"/>
                 </a:solidFill>
-                <a:latin typeface="Inter"/>
+                <a:latin typeface="Trebuchet MS"/>
               </a:defRPr>
             </a:pPr>
             <a:r>
@@ -4135,9 +4129,9 @@
             <a:r>
               <a:rPr b="0">
                 <a:solidFill>
-                  <a:srgbClr val="7DD3FC"/>
-                </a:solidFill>
-                <a:latin typeface="JetBrains Mono"/>
+                  <a:srgbClr val="FFFFFF"/>
+                </a:solidFill>
+                <a:latin typeface="Consolas"/>
               </a:rPr>
               <a:t>https://github.com/x03tanuj/sentinel-api</a:t>
             </a:r>
@@ -4147,22 +4141,22 @@
               <a:spcAft>
                 <a:spcPts val="600"/>
               </a:spcAft>
-              <a:defRPr sz="1000" b="1">
+              <a:defRPr sz="1100" b="1">
                 <a:solidFill>
                   <a:srgbClr val="38BDF8"/>
                 </a:solidFill>
-                <a:latin typeface="Inter"/>
-              </a:defRPr>
-            </a:pPr>
-            <a:r>
-              <a:t>Live Tactical Dashboard: </a:t>
+                <a:latin typeface="Trebuchet MS"/>
+              </a:defRPr>
+            </a:pPr>
+            <a:r>
+              <a:t>Live Web Dashboard: </a:t>
             </a:r>
             <a:r>
               <a:rPr b="0">
                 <a:solidFill>
-                  <a:srgbClr val="7DD3FC"/>
-                </a:solidFill>
-                <a:latin typeface="JetBrains Mono"/>
+                  <a:srgbClr val="FFFFFF"/>
+                </a:solidFill>
+                <a:latin typeface="Consolas"/>
               </a:rPr>
               <a:t>http://localhost:8080</a:t>
             </a:r>
@@ -4172,22 +4166,22 @@
               <a:spcAft>
                 <a:spcPts val="600"/>
               </a:spcAft>
-              <a:defRPr sz="1000" b="1">
+              <a:defRPr sz="1100" b="1">
                 <a:solidFill>
                   <a:srgbClr val="38BDF8"/>
                 </a:solidFill>
-                <a:latin typeface="Inter"/>
-              </a:defRPr>
-            </a:pPr>
-            <a:r>
-              <a:t>Interactive Demo Script: </a:t>
+                <a:latin typeface="Trebuchet MS"/>
+              </a:defRPr>
+            </a:pPr>
+            <a:r>
+              <a:t>Automated Demo Script: </a:t>
             </a:r>
             <a:r>
               <a:rPr b="0">
                 <a:solidFill>
-                  <a:srgbClr val="7DD3FC"/>
-                </a:solidFill>
-                <a:latin typeface="JetBrains Mono"/>
+                  <a:srgbClr val="FFFFFF"/>
+                </a:solidFill>
+                <a:latin typeface="Consolas"/>
               </a:rPr>
               <a:t>bash scripts/demo.sh</a:t>
             </a:r>
@@ -4197,11 +4191,11 @@
               <a:spcAft>
                 <a:spcPts val="600"/>
               </a:spcAft>
-              <a:defRPr sz="1000" b="1">
+              <a:defRPr sz="1100" b="1">
                 <a:solidFill>
                   <a:srgbClr val="38BDF8"/>
                 </a:solidFill>
-                <a:latin typeface="Inter"/>
+                <a:latin typeface="Trebuchet MS"/>
               </a:defRPr>
             </a:pPr>
             <a:r>
@@ -4210,25 +4204,25 @@
             <a:r>
               <a:rPr b="0">
                 <a:solidFill>
-                  <a:srgbClr val="7DD3FC"/>
-                </a:solidFill>
-                <a:latin typeface="JetBrains Mono"/>
+                  <a:srgbClr val="FFFFFF"/>
+                </a:solidFill>
+                <a:latin typeface="Consolas"/>
               </a:rPr>
-              <a:t>docs/architecture.png (2400x1400)</a:t>
+              <a:t>docs/architecture.png (2400×1400)</a:t>
             </a:r>
           </a:p>
           <a:p>
             <a:br/>
             <a:pPr>
-              <a:defRPr sz="1400" b="1">
-                <a:solidFill>
-                  <a:srgbClr val="10B981"/>
-                </a:solidFill>
-                <a:latin typeface="Inter"/>
-              </a:defRPr>
-            </a:pPr>
-            <a:r>
-              <a:t>Thank You! We are now open for Q&amp;A.</a:t>
+              <a:defRPr sz="1500" b="1">
+                <a:solidFill>
+                  <a:srgbClr val="34D399"/>
+                </a:solidFill>
+                <a:latin typeface="Trebuchet MS"/>
+              </a:defRPr>
+            </a:pPr>
+            <a:r>
+              <a:t>Thank You! We are now open for Q&amp;A and Live Demo.</a:t>
             </a:r>
           </a:p>
         </p:txBody>
@@ -4266,11 +4260,11 @@
             <a:avLst/>
           </a:prstGeom>
           <a:solidFill>
-            <a:srgbClr val="06080F"/>
+            <a:srgbClr val="070913"/>
           </a:solidFill>
           <a:ln>
             <a:solidFill>
-              <a:srgbClr val="06080F"/>
+              <a:srgbClr val="070913"/>
             </a:solidFill>
           </a:ln>
         </p:spPr>
@@ -4305,7 +4299,7 @@
         <p:spPr>
           <a:xfrm>
             <a:off x="731520" y="365760"/>
-            <a:ext cx="10698480" cy="822960"/>
+            <a:ext cx="10728655" cy="1005840"/>
           </a:xfrm>
           <a:prstGeom prst="rect">
             <a:avLst/>
@@ -4322,28 +4316,28 @@
               <a:spcAft>
                 <a:spcPts val="200"/>
               </a:spcAft>
-              <a:defRPr sz="1000" b="1">
+              <a:defRPr sz="1100" b="1">
                 <a:solidFill>
                   <a:srgbClr val="38BDF8"/>
                 </a:solidFill>
-                <a:latin typeface="Inter"/>
-              </a:defRPr>
-            </a:pPr>
-            <a:r>
-              <a:t>PROBLEM STATEMENT</a:t>
-            </a:r>
-          </a:p>
-          <a:p>
-            <a:pPr>
-              <a:defRPr sz="2200" b="1">
-                <a:solidFill>
-                  <a:srgbClr val="F8FAFC"/>
-                </a:solidFill>
-                <a:latin typeface="Inter"/>
-              </a:defRPr>
-            </a:pPr>
-            <a:r>
-              <a:t>The API Authorization Blindspot in Modern Software</a:t>
+                <a:latin typeface="Trebuchet MS"/>
+              </a:defRPr>
+            </a:pPr>
+            <a:r>
+              <a:t>● WHAT IT IS SOLVING (PROBLEM STATEMENT)</a:t>
+            </a:r>
+          </a:p>
+          <a:p>
+            <a:pPr>
+              <a:defRPr sz="2600" b="1">
+                <a:solidFill>
+                  <a:srgbClr val="FFFFFF"/>
+                </a:solidFill>
+                <a:latin typeface="Trebuchet MS"/>
+              </a:defRPr>
+            </a:pPr>
+            <a:r>
+              <a:t>The Multi-Billion Dollar API Authorization Blindspot</a:t>
             </a:r>
           </a:p>
         </p:txBody>
@@ -4356,18 +4350,18 @@
         </p:nvSpPr>
         <p:spPr>
           <a:xfrm>
-            <a:off x="731520" y="1234440"/>
-            <a:ext cx="10728655" cy="19050"/>
+            <a:off x="731520" y="1371600"/>
+            <a:ext cx="10728655" cy="25400"/>
           </a:xfrm>
           <a:prstGeom prst="rect">
             <a:avLst/>
           </a:prstGeom>
           <a:solidFill>
-            <a:srgbClr val="232D42"/>
+            <a:srgbClr val="202945"/>
           </a:solidFill>
           <a:ln>
             <a:solidFill>
-              <a:srgbClr val="232D42"/>
+              <a:srgbClr val="202945"/>
             </a:solidFill>
           </a:ln>
         </p:spPr>
@@ -4416,11 +4410,11 @@
           <a:lstStyle/>
           <a:p>
             <a:pPr>
-              <a:defRPr sz="900">
+              <a:defRPr sz="1000" b="1">
                 <a:solidFill>
                   <a:srgbClr val="64748B"/>
                 </a:solidFill>
-                <a:latin typeface="Inter"/>
+                <a:latin typeface="Calibri"/>
               </a:defRPr>
             </a:pPr>
             <a:r>
@@ -4437,18 +4431,18 @@
         </p:nvSpPr>
         <p:spPr>
           <a:xfrm>
-            <a:off x="731520" y="1463040"/>
-            <a:ext cx="10728655" cy="1051560"/>
+            <a:off x="731520" y="1554480"/>
+            <a:ext cx="10728655" cy="822960"/>
           </a:xfrm>
           <a:prstGeom prst="roundRect">
             <a:avLst/>
           </a:prstGeom>
           <a:solidFill>
-            <a:srgbClr val="0D111C"/>
+            <a:srgbClr val="131A36"/>
           </a:solidFill>
-          <a:ln w="12700">
+          <a:ln w="25400">
             <a:solidFill>
-              <a:srgbClr val="232D42"/>
+              <a:srgbClr val="F87171"/>
             </a:solidFill>
           </a:ln>
         </p:spPr>
@@ -4476,24 +4470,60 @@
       </p:sp>
       <p:sp>
         <p:nvSpPr>
-          <p:cNvPr id="7" name="Rounded Rectangle 6"/>
+          <p:cNvPr id="7" name="TextBox 6"/>
+          <p:cNvSpPr txBox="1"/>
+          <p:nvPr/>
+        </p:nvSpPr>
+        <p:spPr>
+          <a:xfrm>
+            <a:off x="914400" y="1627632"/>
+            <a:ext cx="10362895" cy="640080"/>
+          </a:xfrm>
+          <a:prstGeom prst="rect">
+            <a:avLst/>
+          </a:prstGeom>
+          <a:noFill/>
+        </p:spPr>
+        <p:txBody>
+          <a:bodyPr wrap="square">
+            <a:spAutoFit/>
+          </a:bodyPr>
+          <a:lstStyle/>
+          <a:p>
+            <a:pPr>
+              <a:defRPr sz="1300" b="1">
+                <a:solidFill>
+                  <a:srgbClr val="FFFFFF"/>
+                </a:solidFill>
+                <a:latin typeface="Trebuchet MS"/>
+              </a:defRPr>
+            </a:pPr>
+            <a:r>
+              <a:t>⚠️ OWASP API Security #1 Threat (API1:2023): Over 40% of cloud API breaches stem from Broken Object Level Authorization (BOLA/IDOR) — yet 99% of automated security scanners cannot detect it.</a:t>
+            </a:r>
+          </a:p>
+        </p:txBody>
+      </p:sp>
+      <p:sp>
+        <p:nvSpPr>
+          <p:cNvPr id="8" name="Rounded Rectangle 7"/>
           <p:cNvSpPr/>
           <p:nvPr/>
         </p:nvSpPr>
         <p:spPr>
           <a:xfrm>
-            <a:off x="731520" y="1463040"/>
-            <a:ext cx="109728" cy="1051560"/>
+            <a:off x="731520" y="2560320"/>
+            <a:ext cx="3413455" cy="3566160"/>
           </a:xfrm>
           <a:prstGeom prst="roundRect">
             <a:avLst/>
           </a:prstGeom>
           <a:solidFill>
-            <a:srgbClr val="EF4444"/>
+            <a:srgbClr val="0E1326"/>
           </a:solidFill>
-          <a:ln>
+          <a:ln w="25400">
             <a:solidFill>
-              <a:srgbClr val="EF4444"/>
+              <a:srgbClr val="F87171"/>
             </a:solidFill>
           </a:ln>
         </p:spPr>
@@ -4521,14 +4551,14 @@
       </p:sp>
       <p:sp>
         <p:nvSpPr>
-          <p:cNvPr id="8" name="TextBox 7"/>
+          <p:cNvPr id="9" name="TextBox 8"/>
           <p:cNvSpPr txBox="1"/>
           <p:nvPr/>
         </p:nvSpPr>
         <p:spPr>
           <a:xfrm>
-            <a:off x="1005840" y="1572768"/>
-            <a:ext cx="10241280" cy="822960"/>
+            <a:off x="960120" y="2788920"/>
+            <a:ext cx="2956255" cy="3108960"/>
           </a:xfrm>
           <a:prstGeom prst="rect">
             <a:avLst/>
@@ -4543,54 +4573,70 @@
           <a:p>
             <a:pPr>
               <a:spcAft>
-                <a:spcPts val="300"/>
+                <a:spcPts val="400"/>
               </a:spcAft>
-              <a:defRPr sz="1300" b="1">
-                <a:solidFill>
-                  <a:srgbClr val="EF4444"/>
-                </a:solidFill>
-                <a:latin typeface="Inter"/>
-              </a:defRPr>
-            </a:pPr>
-            <a:r>
-              <a:t>OWASP API #1 THREAT  —  Broken Object Level Authorization (BOLA / IDOR)</a:t>
-            </a:r>
-          </a:p>
-          <a:p>
-            <a:pPr>
-              <a:defRPr sz="1050">
+              <a:defRPr sz="1200" b="1">
+                <a:solidFill>
+                  <a:srgbClr val="F87171"/>
+                </a:solidFill>
+                <a:latin typeface="Trebuchet MS"/>
+              </a:defRPr>
+            </a:pPr>
+            <a:r>
+              <a:t>THE CORE FLAW</a:t>
+            </a:r>
+          </a:p>
+          <a:p>
+            <a:pPr>
+              <a:spcAft>
+                <a:spcPts val="1400"/>
+              </a:spcAft>
+              <a:defRPr sz="1800" b="1">
+                <a:solidFill>
+                  <a:srgbClr val="FFFFFF"/>
+                </a:solidFill>
+                <a:latin typeface="Trebuchet MS"/>
+              </a:defRPr>
+            </a:pPr>
+            <a:r>
+              <a:t>Changing id=101 to id=102</a:t>
+            </a:r>
+          </a:p>
+          <a:p>
+            <a:pPr>
+              <a:defRPr sz="1300">
                 <a:solidFill>
                   <a:srgbClr val="94A3B8"/>
                 </a:solidFill>
-                <a:latin typeface="Inter"/>
-              </a:defRPr>
-            </a:pPr>
-            <a:r>
-              <a:t>BOLA remains the undisputed #1 critical vulnerability on the OWASP API Security Top 10. A user simply replaces id=101 with id=102 in an API request and immediately reads or alters another customer's private data, invoices, or medical records without authorization.</a:t>
-            </a:r>
-          </a:p>
-        </p:txBody>
-      </p:sp>
-      <p:sp>
-        <p:nvSpPr>
-          <p:cNvPr id="9" name="Rounded Rectangle 8"/>
+                <a:latin typeface="Calibri"/>
+              </a:defRPr>
+            </a:pPr>
+            <a:r>
+              <a:t>An authenticated user simply changes an ID parameter in an API request and directly reads, modifies, or deletes another customer's private invoices, patient medical charts, or banking records.</a:t>
+            </a:r>
+          </a:p>
+        </p:txBody>
+      </p:sp>
+      <p:sp>
+        <p:nvSpPr>
+          <p:cNvPr id="10" name="Rounded Rectangle 9"/>
           <p:cNvSpPr/>
           <p:nvPr/>
         </p:nvSpPr>
         <p:spPr>
           <a:xfrm>
-            <a:off x="731520" y="2651760"/>
-            <a:ext cx="10728655" cy="1051560"/>
+            <a:off x="4389120" y="2560320"/>
+            <a:ext cx="3413455" cy="3566160"/>
           </a:xfrm>
           <a:prstGeom prst="roundRect">
             <a:avLst/>
           </a:prstGeom>
           <a:solidFill>
-            <a:srgbClr val="0D111C"/>
+            <a:srgbClr val="0E1326"/>
           </a:solidFill>
-          <a:ln w="12700">
+          <a:ln w="25400">
             <a:solidFill>
-              <a:srgbClr val="232D42"/>
+              <a:srgbClr val="FB923C"/>
             </a:solidFill>
           </a:ln>
         </p:spPr>
@@ -4618,24 +4664,92 @@
       </p:sp>
       <p:sp>
         <p:nvSpPr>
-          <p:cNvPr id="10" name="Rounded Rectangle 9"/>
+          <p:cNvPr id="11" name="TextBox 10"/>
+          <p:cNvSpPr txBox="1"/>
+          <p:nvPr/>
+        </p:nvSpPr>
+        <p:spPr>
+          <a:xfrm>
+            <a:off x="4617720" y="2788920"/>
+            <a:ext cx="2956255" cy="3108960"/>
+          </a:xfrm>
+          <a:prstGeom prst="rect">
+            <a:avLst/>
+          </a:prstGeom>
+          <a:noFill/>
+        </p:spPr>
+        <p:txBody>
+          <a:bodyPr wrap="square">
+            <a:spAutoFit/>
+          </a:bodyPr>
+          <a:lstStyle/>
+          <a:p>
+            <a:pPr>
+              <a:spcAft>
+                <a:spcPts val="400"/>
+              </a:spcAft>
+              <a:defRPr sz="1200" b="1">
+                <a:solidFill>
+                  <a:srgbClr val="FB923C"/>
+                </a:solidFill>
+                <a:latin typeface="Trebuchet MS"/>
+              </a:defRPr>
+            </a:pPr>
+            <a:r>
+              <a:t>TRADITIONAL TOOLS FAIL</a:t>
+            </a:r>
+          </a:p>
+          <a:p>
+            <a:pPr>
+              <a:spcAft>
+                <a:spcPts val="1400"/>
+              </a:spcAft>
+              <a:defRPr sz="1800" b="1">
+                <a:solidFill>
+                  <a:srgbClr val="FFFFFF"/>
+                </a:solidFill>
+                <a:latin typeface="Trebuchet MS"/>
+              </a:defRPr>
+            </a:pPr>
+            <a:r>
+              <a:t>DAST &amp; SAST Are Blind to Auth</a:t>
+            </a:r>
+          </a:p>
+          <a:p>
+            <a:pPr>
+              <a:defRPr sz="1300">
+                <a:solidFill>
+                  <a:srgbClr val="94A3B8"/>
+                </a:solidFill>
+                <a:latin typeface="Calibri"/>
+              </a:defRPr>
+            </a:pPr>
+            <a:r>
+              <a:t>Conventional scanners only test for syntax injection like SQLi or XSS. Operating in single-user isolation, they have zero understanding of multi-tenant ownership, role privileges, or cross-account access boundaries.</a:t>
+            </a:r>
+          </a:p>
+        </p:txBody>
+      </p:sp>
+      <p:sp>
+        <p:nvSpPr>
+          <p:cNvPr id="12" name="Rounded Rectangle 11"/>
           <p:cNvSpPr/>
           <p:nvPr/>
         </p:nvSpPr>
         <p:spPr>
           <a:xfrm>
-            <a:off x="731520" y="2651760"/>
-            <a:ext cx="109728" cy="1051560"/>
+            <a:off x="8046720" y="2560320"/>
+            <a:ext cx="3413455" cy="3566160"/>
           </a:xfrm>
           <a:prstGeom prst="roundRect">
             <a:avLst/>
           </a:prstGeom>
           <a:solidFill>
-            <a:srgbClr val="F97316"/>
+            <a:srgbClr val="0E1326"/>
           </a:solidFill>
-          <a:ln>
+          <a:ln w="25400">
             <a:solidFill>
-              <a:srgbClr val="F97316"/>
+              <a:srgbClr val="FBBF24"/>
             </a:solidFill>
           </a:ln>
         </p:spPr>
@@ -4663,14 +4777,14 @@
       </p:sp>
       <p:sp>
         <p:nvSpPr>
-          <p:cNvPr id="11" name="TextBox 10"/>
+          <p:cNvPr id="13" name="TextBox 12"/>
           <p:cNvSpPr txBox="1"/>
           <p:nvPr/>
         </p:nvSpPr>
         <p:spPr>
           <a:xfrm>
-            <a:off x="1005840" y="2761488"/>
-            <a:ext cx="10241280" cy="822960"/>
+            <a:off x="8275320" y="2788920"/>
+            <a:ext cx="2956255" cy="3108960"/>
           </a:xfrm>
           <a:prstGeom prst="rect">
             <a:avLst/>
@@ -4685,314 +4799,46 @@
           <a:p>
             <a:pPr>
               <a:spcAft>
-                <a:spcPts val="300"/>
+                <a:spcPts val="400"/>
               </a:spcAft>
-              <a:defRPr sz="1300" b="1">
-                <a:solidFill>
-                  <a:srgbClr val="F97316"/>
-                </a:solidFill>
-                <a:latin typeface="Inter"/>
-              </a:defRPr>
-            </a:pPr>
-            <a:r>
-              <a:t>TRADITIONAL SCANNERS ARE BLIND  —  DAST &amp; SAST Cannot Understand Multi-User Business Logic</a:t>
-            </a:r>
-          </a:p>
-          <a:p>
-            <a:pPr>
-              <a:defRPr sz="1050">
+              <a:defRPr sz="1200" b="1">
+                <a:solidFill>
+                  <a:srgbClr val="FBBF24"/>
+                </a:solidFill>
+                <a:latin typeface="Trebuchet MS"/>
+              </a:defRPr>
+            </a:pPr>
+            <a:r>
+              <a:t>SILENT EXPLOITATION</a:t>
+            </a:r>
+          </a:p>
+          <a:p>
+            <a:pPr>
+              <a:spcAft>
+                <a:spcPts val="1400"/>
+              </a:spcAft>
+              <a:defRPr sz="1800" b="1">
+                <a:solidFill>
+                  <a:srgbClr val="FFFFFF"/>
+                </a:solidFill>
+                <a:latin typeface="Trebuchet MS"/>
+              </a:defRPr>
+            </a:pPr>
+            <a:r>
+              <a:t>Flaws Evade Firewalls &amp; WAFs</a:t>
+            </a:r>
+          </a:p>
+          <a:p>
+            <a:pPr>
+              <a:defRPr sz="1300">
                 <a:solidFill>
                   <a:srgbClr val="94A3B8"/>
                 </a:solidFill>
-                <a:latin typeface="Inter"/>
-              </a:defRPr>
-            </a:pPr>
-            <a:r>
-              <a:t>Traditional security tools test for syntax injection (SQLi, XSS) and missing headers. They operate in a single-user sandbox and have zero understanding of object ownership, tenant boundaries, or role privileges across multiple user accounts.</a:t>
-            </a:r>
-          </a:p>
-        </p:txBody>
-      </p:sp>
-      <p:sp>
-        <p:nvSpPr>
-          <p:cNvPr id="12" name="Rounded Rectangle 11"/>
-          <p:cNvSpPr/>
-          <p:nvPr/>
-        </p:nvSpPr>
-        <p:spPr>
-          <a:xfrm>
-            <a:off x="731520" y="3840480"/>
-            <a:ext cx="10728655" cy="1051560"/>
-          </a:xfrm>
-          <a:prstGeom prst="roundRect">
-            <a:avLst/>
-          </a:prstGeom>
-          <a:solidFill>
-            <a:srgbClr val="0D111C"/>
-          </a:solidFill>
-          <a:ln w="12700">
-            <a:solidFill>
-              <a:srgbClr val="232D42"/>
-            </a:solidFill>
-          </a:ln>
-        </p:spPr>
-        <p:style>
-          <a:lnRef idx="1">
-            <a:schemeClr val="accent1"/>
-          </a:lnRef>
-          <a:fillRef idx="3">
-            <a:schemeClr val="accent1"/>
-          </a:fillRef>
-          <a:effectRef idx="2">
-            <a:schemeClr val="accent1"/>
-          </a:effectRef>
-          <a:fontRef idx="minor">
-            <a:schemeClr val="lt1"/>
-          </a:fontRef>
-        </p:style>
-        <p:txBody>
-          <a:bodyPr rtlCol="0" anchor="ctr"/>
-          <a:lstStyle/>
-          <a:p>
-            <a:pPr algn="ctr"/>
-          </a:p>
-        </p:txBody>
-      </p:sp>
-      <p:sp>
-        <p:nvSpPr>
-          <p:cNvPr id="13" name="Rounded Rectangle 12"/>
-          <p:cNvSpPr/>
-          <p:nvPr/>
-        </p:nvSpPr>
-        <p:spPr>
-          <a:xfrm>
-            <a:off x="731520" y="3840480"/>
-            <a:ext cx="109728" cy="1051560"/>
-          </a:xfrm>
-          <a:prstGeom prst="roundRect">
-            <a:avLst/>
-          </a:prstGeom>
-          <a:solidFill>
-            <a:srgbClr val="F59E0B"/>
-          </a:solidFill>
-          <a:ln>
-            <a:solidFill>
-              <a:srgbClr val="F59E0B"/>
-            </a:solidFill>
-          </a:ln>
-        </p:spPr>
-        <p:style>
-          <a:lnRef idx="1">
-            <a:schemeClr val="accent1"/>
-          </a:lnRef>
-          <a:fillRef idx="3">
-            <a:schemeClr val="accent1"/>
-          </a:fillRef>
-          <a:effectRef idx="2">
-            <a:schemeClr val="accent1"/>
-          </a:effectRef>
-          <a:fontRef idx="minor">
-            <a:schemeClr val="lt1"/>
-          </a:fontRef>
-        </p:style>
-        <p:txBody>
-          <a:bodyPr rtlCol="0" anchor="ctr"/>
-          <a:lstStyle/>
-          <a:p>
-            <a:pPr algn="ctr"/>
-          </a:p>
-        </p:txBody>
-      </p:sp>
-      <p:sp>
-        <p:nvSpPr>
-          <p:cNvPr id="14" name="TextBox 13"/>
-          <p:cNvSpPr txBox="1"/>
-          <p:nvPr/>
-        </p:nvSpPr>
-        <p:spPr>
-          <a:xfrm>
-            <a:off x="1005840" y="3950208"/>
-            <a:ext cx="10241280" cy="822960"/>
-          </a:xfrm>
-          <a:prstGeom prst="rect">
-            <a:avLst/>
-          </a:prstGeom>
-          <a:noFill/>
-        </p:spPr>
-        <p:txBody>
-          <a:bodyPr wrap="square">
-            <a:spAutoFit/>
-          </a:bodyPr>
-          <a:lstStyle/>
-          <a:p>
-            <a:pPr>
-              <a:spcAft>
-                <a:spcPts val="300"/>
-              </a:spcAft>
-              <a:defRPr sz="1300" b="1">
-                <a:solidFill>
-                  <a:srgbClr val="F59E0B"/>
-                </a:solidFill>
-                <a:latin typeface="Inter"/>
-              </a:defRPr>
-            </a:pPr>
-            <a:r>
-              <a:t>MANUAL AUDITS MISS REGRESSIONS  —  Fast Agile CI/CD Cycles Outpace Manual Penetration Testing</a:t>
-            </a:r>
-          </a:p>
-          <a:p>
-            <a:pPr>
-              <a:defRPr sz="1050">
-                <a:solidFill>
-                  <a:srgbClr val="94A3B8"/>
-                </a:solidFill>
-                <a:latin typeface="Inter"/>
-              </a:defRPr>
-            </a:pPr>
-            <a:r>
-              <a:t>Engineering teams ship dozens of API changes weekly. Manual penetration tests are expensive, infrequent (quarterly/annual), and produce point-in-time reports that miss day-to-day authorization regressions introduced during active development.</a:t>
-            </a:r>
-          </a:p>
-        </p:txBody>
-      </p:sp>
-      <p:sp>
-        <p:nvSpPr>
-          <p:cNvPr id="15" name="Rounded Rectangle 14"/>
-          <p:cNvSpPr/>
-          <p:nvPr/>
-        </p:nvSpPr>
-        <p:spPr>
-          <a:xfrm>
-            <a:off x="731520" y="5029200"/>
-            <a:ext cx="10728655" cy="1051560"/>
-          </a:xfrm>
-          <a:prstGeom prst="roundRect">
-            <a:avLst/>
-          </a:prstGeom>
-          <a:solidFill>
-            <a:srgbClr val="0D111C"/>
-          </a:solidFill>
-          <a:ln w="12700">
-            <a:solidFill>
-              <a:srgbClr val="232D42"/>
-            </a:solidFill>
-          </a:ln>
-        </p:spPr>
-        <p:style>
-          <a:lnRef idx="1">
-            <a:schemeClr val="accent1"/>
-          </a:lnRef>
-          <a:fillRef idx="3">
-            <a:schemeClr val="accent1"/>
-          </a:fillRef>
-          <a:effectRef idx="2">
-            <a:schemeClr val="accent1"/>
-          </a:effectRef>
-          <a:fontRef idx="minor">
-            <a:schemeClr val="lt1"/>
-          </a:fontRef>
-        </p:style>
-        <p:txBody>
-          <a:bodyPr rtlCol="0" anchor="ctr"/>
-          <a:lstStyle/>
-          <a:p>
-            <a:pPr algn="ctr"/>
-          </a:p>
-        </p:txBody>
-      </p:sp>
-      <p:sp>
-        <p:nvSpPr>
-          <p:cNvPr id="16" name="Rounded Rectangle 15"/>
-          <p:cNvSpPr/>
-          <p:nvPr/>
-        </p:nvSpPr>
-        <p:spPr>
-          <a:xfrm>
-            <a:off x="731520" y="5029200"/>
-            <a:ext cx="109728" cy="1051560"/>
-          </a:xfrm>
-          <a:prstGeom prst="roundRect">
-            <a:avLst/>
-          </a:prstGeom>
-          <a:solidFill>
-            <a:srgbClr val="38BDF8"/>
-          </a:solidFill>
-          <a:ln>
-            <a:solidFill>
-              <a:srgbClr val="38BDF8"/>
-            </a:solidFill>
-          </a:ln>
-        </p:spPr>
-        <p:style>
-          <a:lnRef idx="1">
-            <a:schemeClr val="accent1"/>
-          </a:lnRef>
-          <a:fillRef idx="3">
-            <a:schemeClr val="accent1"/>
-          </a:fillRef>
-          <a:effectRef idx="2">
-            <a:schemeClr val="accent1"/>
-          </a:effectRef>
-          <a:fontRef idx="minor">
-            <a:schemeClr val="lt1"/>
-          </a:fontRef>
-        </p:style>
-        <p:txBody>
-          <a:bodyPr rtlCol="0" anchor="ctr"/>
-          <a:lstStyle/>
-          <a:p>
-            <a:pPr algn="ctr"/>
-          </a:p>
-        </p:txBody>
-      </p:sp>
-      <p:sp>
-        <p:nvSpPr>
-          <p:cNvPr id="17" name="TextBox 16"/>
-          <p:cNvSpPr txBox="1"/>
-          <p:nvPr/>
-        </p:nvSpPr>
-        <p:spPr>
-          <a:xfrm>
-            <a:off x="1005840" y="5138928"/>
-            <a:ext cx="10241280" cy="822960"/>
-          </a:xfrm>
-          <a:prstGeom prst="rect">
-            <a:avLst/>
-          </a:prstGeom>
-          <a:noFill/>
-        </p:spPr>
-        <p:txBody>
-          <a:bodyPr wrap="square">
-            <a:spAutoFit/>
-          </a:bodyPr>
-          <a:lstStyle/>
-          <a:p>
-            <a:pPr>
-              <a:spcAft>
-                <a:spcPts val="300"/>
-              </a:spcAft>
-              <a:defRPr sz="1300" b="1">
-                <a:solidFill>
-                  <a:srgbClr val="38BDF8"/>
-                </a:solidFill>
-                <a:latin typeface="Inter"/>
-              </a:defRPr>
-            </a:pPr>
-            <a:r>
-              <a:t>HIGH BLAST RADIUS &amp; DATA LEAKS  —  Silent Exploitation Leads to Severe Regulatory &amp; Financial Fallout</a:t>
-            </a:r>
-          </a:p>
-          <a:p>
-            <a:pPr>
-              <a:defRPr sz="1050">
-                <a:solidFill>
-                  <a:srgbClr val="94A3B8"/>
-                </a:solidFill>
-                <a:latin typeface="Inter"/>
-              </a:defRPr>
-            </a:pPr>
-            <a:r>
-              <a:t>Authorization flaws are completely silent—firewalls and WAFs see valid HTTP 200 OK responses with legitimate JSON formatting. Flaws evade perimeter defenses, causing catastrophic GDPR, HIPAA, and data-breach compliance violations.</a:t>
+                <a:latin typeface="Calibri"/>
+              </a:defRPr>
+            </a:pPr>
+            <a:r>
+              <a:t>Because BOLA requests use valid JWT tokens and legitimate JSON formats, target APIs respond with standard 200 OK payloads. WAFs see completely normal traffic, leaving breaches undetected for months.</a:t>
             </a:r>
           </a:p>
         </p:txBody>
@@ -5030,11 +4876,11 @@
             <a:avLst/>
           </a:prstGeom>
           <a:solidFill>
-            <a:srgbClr val="06080F"/>
+            <a:srgbClr val="070913"/>
           </a:solidFill>
           <a:ln>
             <a:solidFill>
-              <a:srgbClr val="06080F"/>
+              <a:srgbClr val="070913"/>
             </a:solidFill>
           </a:ln>
         </p:spPr>
@@ -5069,7 +4915,7 @@
         <p:spPr>
           <a:xfrm>
             <a:off x="731520" y="365760"/>
-            <a:ext cx="10698480" cy="822960"/>
+            <a:ext cx="10728655" cy="1005840"/>
           </a:xfrm>
           <a:prstGeom prst="rect">
             <a:avLst/>
@@ -5086,28 +4932,28 @@
               <a:spcAft>
                 <a:spcPts val="200"/>
               </a:spcAft>
-              <a:defRPr sz="1000" b="1">
+              <a:defRPr sz="1100" b="1">
                 <a:solidFill>
                   <a:srgbClr val="38BDF8"/>
                 </a:solidFill>
-                <a:latin typeface="Inter"/>
-              </a:defRPr>
-            </a:pPr>
-            <a:r>
-              <a:t>PROPOSED SOLUTION</a:t>
-            </a:r>
-          </a:p>
-          <a:p>
-            <a:pPr>
-              <a:defRPr sz="2200" b="1">
-                <a:solidFill>
-                  <a:srgbClr val="F8FAFC"/>
-                </a:solidFill>
-                <a:latin typeface="Inter"/>
-              </a:defRPr>
-            </a:pPr>
-            <a:r>
-              <a:t>Autonomous Differential API Security Testing</a:t>
+                <a:latin typeface="Trebuchet MS"/>
+              </a:defRPr>
+            </a:pPr>
+            <a:r>
+              <a:t>● HOW IT IS SOLVING IT (PROPOSED SOLUTION)</a:t>
+            </a:r>
+          </a:p>
+          <a:p>
+            <a:pPr>
+              <a:defRPr sz="2600" b="1">
+                <a:solidFill>
+                  <a:srgbClr val="FFFFFF"/>
+                </a:solidFill>
+                <a:latin typeface="Trebuchet MS"/>
+              </a:defRPr>
+            </a:pPr>
+            <a:r>
+              <a:t>The 4-Step Autonomous Differential Security Pipeline</a:t>
             </a:r>
           </a:p>
         </p:txBody>
@@ -5120,18 +4966,18 @@
         </p:nvSpPr>
         <p:spPr>
           <a:xfrm>
-            <a:off x="731520" y="1234440"/>
-            <a:ext cx="10728655" cy="19050"/>
+            <a:off x="731520" y="1371600"/>
+            <a:ext cx="10728655" cy="25400"/>
           </a:xfrm>
           <a:prstGeom prst="rect">
             <a:avLst/>
           </a:prstGeom>
           <a:solidFill>
-            <a:srgbClr val="232D42"/>
+            <a:srgbClr val="202945"/>
           </a:solidFill>
           <a:ln>
             <a:solidFill>
-              <a:srgbClr val="232D42"/>
+              <a:srgbClr val="202945"/>
             </a:solidFill>
           </a:ln>
         </p:spPr>
@@ -5180,11 +5026,11 @@
           <a:lstStyle/>
           <a:p>
             <a:pPr>
-              <a:defRPr sz="900">
+              <a:defRPr sz="1000" b="1">
                 <a:solidFill>
                   <a:srgbClr val="64748B"/>
                 </a:solidFill>
-                <a:latin typeface="Inter"/>
+                <a:latin typeface="Calibri"/>
               </a:defRPr>
             </a:pPr>
             <a:r>
@@ -5201,18 +5047,18 @@
         </p:nvSpPr>
         <p:spPr>
           <a:xfrm>
-            <a:off x="731520" y="1463040"/>
-            <a:ext cx="10728655" cy="822960"/>
+            <a:off x="731520" y="1645920"/>
+            <a:ext cx="2544775" cy="3840480"/>
           </a:xfrm>
           <a:prstGeom prst="roundRect">
             <a:avLst/>
           </a:prstGeom>
           <a:solidFill>
-            <a:srgbClr val="151B2B"/>
+            <a:srgbClr val="0E1326"/>
           </a:solidFill>
-          <a:ln w="12700">
+          <a:ln w="25400">
             <a:solidFill>
-              <a:srgbClr val="6366F1"/>
+              <a:srgbClr val="38BDF8"/>
             </a:solidFill>
           </a:ln>
         </p:spPr>
@@ -5246,8 +5092,8 @@
         </p:nvSpPr>
         <p:spPr>
           <a:xfrm>
-            <a:off x="914400" y="1536192"/>
-            <a:ext cx="10362895" cy="685800"/>
+            <a:off x="914400" y="1828800"/>
+            <a:ext cx="2179015" cy="3474720"/>
           </a:xfrm>
           <a:prstGeom prst="rect">
             <a:avLst/>
@@ -5261,15 +5107,47 @@
           <a:lstStyle/>
           <a:p>
             <a:pPr>
+              <a:spcAft>
+                <a:spcPts val="600"/>
+              </a:spcAft>
               <a:defRPr sz="1200" b="1">
                 <a:solidFill>
-                  <a:srgbClr val="F8FAFC"/>
-                </a:solidFill>
-                <a:latin typeface="Inter"/>
-              </a:defRPr>
-            </a:pPr>
-            <a:r>
-              <a:t>SentinelAPI solves the authorization blindspot by reading OpenAPI contracts, orchestrating multi-persona credentials, discovering legitimate resource ownership, and proving access violations mathematically via differential response comparison.</a:t>
+                  <a:srgbClr val="38BDF8"/>
+                </a:solidFill>
+                <a:latin typeface="Trebuchet MS"/>
+              </a:defRPr>
+            </a:pPr>
+            <a:r>
+              <a:t>STEP 1</a:t>
+            </a:r>
+          </a:p>
+          <a:p>
+            <a:pPr>
+              <a:spcAft>
+                <a:spcPts val="1200"/>
+              </a:spcAft>
+              <a:defRPr sz="1700" b="1">
+                <a:solidFill>
+                  <a:srgbClr val="FFFFFF"/>
+                </a:solidFill>
+                <a:latin typeface="Trebuchet MS"/>
+              </a:defRPr>
+            </a:pPr>
+            <a:r>
+              <a:t>Spec Ingestion &amp; Mapping</a:t>
+            </a:r>
+          </a:p>
+          <a:p>
+            <a:pPr>
+              <a:defRPr sz="1200">
+                <a:solidFill>
+                  <a:srgbClr val="94A3B8"/>
+                </a:solidFill>
+                <a:latin typeface="Calibri"/>
+              </a:defRPr>
+            </a:pPr>
+            <a:r>
+              <a:t>Ingests OpenAPI 3.x contracts from URLs or files. Validates schemas, dereferences circular $ref pointers, and prioritizes endpoints by state-changing methods and authorization requirements.</a:t>
             </a:r>
           </a:p>
         </p:txBody>
@@ -5282,18 +5160,18 @@
         </p:nvSpPr>
         <p:spPr>
           <a:xfrm>
-            <a:off x="731520" y="2468880"/>
-            <a:ext cx="5272430" cy="1737360"/>
+            <a:off x="3459175" y="1645920"/>
+            <a:ext cx="2544775" cy="3840480"/>
           </a:xfrm>
           <a:prstGeom prst="roundRect">
             <a:avLst/>
           </a:prstGeom>
           <a:solidFill>
-            <a:srgbClr val="0D111C"/>
+            <a:srgbClr val="0E1326"/>
           </a:solidFill>
-          <a:ln w="12700">
+          <a:ln w="25400">
             <a:solidFill>
-              <a:srgbClr val="232D42"/>
+              <a:srgbClr val="34D399"/>
             </a:solidFill>
           </a:ln>
         </p:spPr>
@@ -5327,8 +5205,8 @@
         </p:nvSpPr>
         <p:spPr>
           <a:xfrm>
-            <a:off x="960120" y="2633472"/>
-            <a:ext cx="4815230" cy="1408176"/>
+            <a:off x="3642055" y="1828800"/>
+            <a:ext cx="2179015" cy="3474720"/>
           </a:xfrm>
           <a:prstGeom prst="rect">
             <a:avLst/>
@@ -5347,26 +5225,42 @@
               </a:spcAft>
               <a:defRPr sz="1200" b="1">
                 <a:solidFill>
-                  <a:srgbClr val="38BDF8"/>
-                </a:solidFill>
-                <a:latin typeface="Inter"/>
-              </a:defRPr>
-            </a:pPr>
-            <a:r>
-              <a:t>1. SPEC-DRIVEN ATTACK SURFACE MAPPING</a:t>
-            </a:r>
-          </a:p>
-          <a:p>
-            <a:pPr>
-              <a:defRPr sz="1050">
+                  <a:srgbClr val="34D399"/>
+                </a:solidFill>
+                <a:latin typeface="Trebuchet MS"/>
+              </a:defRPr>
+            </a:pPr>
+            <a:r>
+              <a:t>STEP 2</a:t>
+            </a:r>
+          </a:p>
+          <a:p>
+            <a:pPr>
+              <a:spcAft>
+                <a:spcPts val="1200"/>
+              </a:spcAft>
+              <a:defRPr sz="1700" b="1">
+                <a:solidFill>
+                  <a:srgbClr val="FFFFFF"/>
+                </a:solidFill>
+                <a:latin typeface="Trebuchet MS"/>
+              </a:defRPr>
+            </a:pPr>
+            <a:r>
+              <a:t>Ownership Discovery</a:t>
+            </a:r>
+          </a:p>
+          <a:p>
+            <a:pPr>
+              <a:defRPr sz="1200">
                 <a:solidFill>
                   <a:srgbClr val="94A3B8"/>
                 </a:solidFill>
-                <a:latin typeface="Inter"/>
-              </a:defRPr>
-            </a:pPr>
-            <a:r>
-              <a:t>Ingests OpenAPI 3.x contracts from URLs or JSON/YAML. Automatically validates schemas, resolves complex circular $ref pointers, and prioritizes endpoints based on state-changing operations and authentication requirements.</a:t>
+                <a:latin typeface="Calibri"/>
+              </a:defRPr>
+            </a:pPr>
+            <a:r>
+              <a:t>Authenticates multiple distinct personas (userA, userB, admin). Automatically queries legitimate profile &amp; collection endpoints to discover owned resources without guessing IDs.</a:t>
             </a:r>
           </a:p>
         </p:txBody>
@@ -5379,18 +5273,18 @@
         </p:nvSpPr>
         <p:spPr>
           <a:xfrm>
-            <a:off x="6186830" y="2468880"/>
-            <a:ext cx="5272430" cy="1737360"/>
+            <a:off x="6186830" y="1645920"/>
+            <a:ext cx="2544775" cy="3840480"/>
           </a:xfrm>
           <a:prstGeom prst="roundRect">
             <a:avLst/>
           </a:prstGeom>
           <a:solidFill>
-            <a:srgbClr val="0D111C"/>
+            <a:srgbClr val="0E1326"/>
           </a:solidFill>
-          <a:ln w="12700">
+          <a:ln w="25400">
             <a:solidFill>
-              <a:srgbClr val="232D42"/>
+              <a:srgbClr val="818CF8"/>
             </a:solidFill>
           </a:ln>
         </p:spPr>
@@ -5424,8 +5318,8 @@
         </p:nvSpPr>
         <p:spPr>
           <a:xfrm>
-            <a:off x="6415430" y="2633472"/>
-            <a:ext cx="4815230" cy="1408176"/>
+            <a:off x="6369710" y="1828800"/>
+            <a:ext cx="2179015" cy="3474720"/>
           </a:xfrm>
           <a:prstGeom prst="rect">
             <a:avLst/>
@@ -5444,26 +5338,42 @@
               </a:spcAft>
               <a:defRPr sz="1200" b="1">
                 <a:solidFill>
-                  <a:srgbClr val="10B981"/>
-                </a:solidFill>
-                <a:latin typeface="Inter"/>
-              </a:defRPr>
-            </a:pPr>
-            <a:r>
-              <a:t>2. MULTI-PERSONA GROUND-TRUTH MATRIX</a:t>
-            </a:r>
-          </a:p>
-          <a:p>
-            <a:pPr>
-              <a:defRPr sz="1050">
+                  <a:srgbClr val="818CF8"/>
+                </a:solidFill>
+                <a:latin typeface="Trebuchet MS"/>
+              </a:defRPr>
+            </a:pPr>
+            <a:r>
+              <a:t>STEP 3</a:t>
+            </a:r>
+          </a:p>
+          <a:p>
+            <a:pPr>
+              <a:spcAft>
+                <a:spcPts val="1200"/>
+              </a:spcAft>
+              <a:defRPr sz="1700" b="1">
+                <a:solidFill>
+                  <a:srgbClr val="FFFFFF"/>
+                </a:solidFill>
+                <a:latin typeface="Trebuchet MS"/>
+              </a:defRPr>
+            </a:pPr>
+            <a:r>
+              <a:t>Differential Analysis</a:t>
+            </a:r>
+          </a:p>
+          <a:p>
+            <a:pPr>
+              <a:defRPr sz="1200">
                 <a:solidFill>
                   <a:srgbClr val="94A3B8"/>
                 </a:solidFill>
-                <a:latin typeface="Inter"/>
-              </a:defRPr>
-            </a:pPr>
-            <a:r>
-              <a:t>Logs in distinct test personas (userA, userB, admin) via JWT/OAuth2. Without guessing random IDs, it queries legitimate endpoints to learn owned resources and compiles a mathematical Allow/Deny expectation matrix.</a:t>
+                <a:latin typeface="Calibri"/>
+              </a:defRPr>
+            </a:pPr>
+            <a:r>
+              <a:t>Compiles a ground-truth Allow/Deny expectation matrix. Dispatches rate-limited cross-user probes and mathematically measures response divergence using weighted Jaccard distance and schema shifts.</a:t>
             </a:r>
           </a:p>
         </p:txBody>
@@ -5476,18 +5386,18 @@
         </p:nvSpPr>
         <p:spPr>
           <a:xfrm>
-            <a:off x="731520" y="4343400"/>
-            <a:ext cx="5272430" cy="1737360"/>
+            <a:off x="8914485" y="1645920"/>
+            <a:ext cx="2544775" cy="3840480"/>
           </a:xfrm>
           <a:prstGeom prst="roundRect">
             <a:avLst/>
           </a:prstGeom>
           <a:solidFill>
-            <a:srgbClr val="0D111C"/>
+            <a:srgbClr val="0E1326"/>
           </a:solidFill>
-          <a:ln w="12700">
+          <a:ln w="25400">
             <a:solidFill>
-              <a:srgbClr val="232D42"/>
+              <a:srgbClr val="F87171"/>
             </a:solidFill>
           </a:ln>
         </p:spPr>
@@ -5521,8 +5431,8 @@
         </p:nvSpPr>
         <p:spPr>
           <a:xfrm>
-            <a:off x="960120" y="4507992"/>
-            <a:ext cx="4815230" cy="1408176"/>
+            <a:off x="9097365" y="1828800"/>
+            <a:ext cx="2179015" cy="3474720"/>
           </a:xfrm>
           <a:prstGeom prst="rect">
             <a:avLst/>
@@ -5541,26 +5451,42 @@
               </a:spcAft>
               <a:defRPr sz="1200" b="1">
                 <a:solidFill>
-                  <a:srgbClr val="F59E0B"/>
-                </a:solidFill>
-                <a:latin typeface="Inter"/>
-              </a:defRPr>
-            </a:pPr>
-            <a:r>
-              <a:t>3. DIFFERENTIAL RESPONSE ANALYSIS</a:t>
-            </a:r>
-          </a:p>
-          <a:p>
-            <a:pPr>
-              <a:defRPr sz="1050">
+                  <a:srgbClr val="F87171"/>
+                </a:solidFill>
+                <a:latin typeface="Trebuchet MS"/>
+              </a:defRPr>
+            </a:pPr>
+            <a:r>
+              <a:t>STEP 4</a:t>
+            </a:r>
+          </a:p>
+          <a:p>
+            <a:pPr>
+              <a:spcAft>
+                <a:spcPts val="1200"/>
+              </a:spcAft>
+              <a:defRPr sz="1700" b="1">
+                <a:solidFill>
+                  <a:srgbClr val="FFFFFF"/>
+                </a:solidFill>
+                <a:latin typeface="Trebuchet MS"/>
+              </a:defRPr>
+            </a:pPr>
+            <a:r>
+              <a:t>Empirical Proof &amp; cURL</a:t>
+            </a:r>
+          </a:p>
+          <a:p>
+            <a:pPr>
+              <a:defRPr sz="1200">
                 <a:solidFill>
                   <a:srgbClr val="94A3B8"/>
                 </a:solidFill>
-                <a:latin typeface="Inter"/>
-              </a:defRPr>
-            </a:pPr>
-            <a:r>
-              <a:t>Executes rate-limited cross-user attack probes. Analyzes baseline vs attack responses using weighted Jaccard similarity distance, status code shifts, and sensitive field leakage to detect unauthorized access.</a:t>
+                <a:latin typeface="Calibri"/>
+              </a:defRPr>
+            </a:pPr>
+            <a:r>
+              <a:t>Actively re-probes live findings to prove reproducibility (boosting confidence to 100%). Generates copy-paste shell-safe cURL PoCs with masked $TOKEN placeholders for instant remediation.</a:t>
             </a:r>
           </a:p>
         </p:txBody>
@@ -5573,18 +5499,18 @@
         </p:nvSpPr>
         <p:spPr>
           <a:xfrm>
-            <a:off x="6186830" y="4343400"/>
-            <a:ext cx="5272430" cy="1737360"/>
+            <a:off x="731520" y="5669280"/>
+            <a:ext cx="10728655" cy="548640"/>
           </a:xfrm>
           <a:prstGeom prst="roundRect">
             <a:avLst/>
           </a:prstGeom>
           <a:solidFill>
-            <a:srgbClr val="0D111C"/>
+            <a:srgbClr val="131A36"/>
           </a:solidFill>
           <a:ln w="12700">
             <a:solidFill>
-              <a:srgbClr val="232D42"/>
+              <a:srgbClr val="38BDF8"/>
             </a:solidFill>
           </a:ln>
         </p:spPr>
@@ -5618,8 +5544,8 @@
         </p:nvSpPr>
         <p:spPr>
           <a:xfrm>
-            <a:off x="6415430" y="4507992"/>
-            <a:ext cx="4815230" cy="1408176"/>
+            <a:off x="914400" y="5715000"/>
+            <a:ext cx="10362895" cy="457200"/>
           </a:xfrm>
           <a:prstGeom prst="rect">
             <a:avLst/>
@@ -5627,37 +5553,21 @@
           <a:noFill/>
         </p:spPr>
         <p:txBody>
-          <a:bodyPr wrap="square">
+          <a:bodyPr wrap="none">
             <a:spAutoFit/>
           </a:bodyPr>
           <a:lstStyle/>
           <a:p>
             <a:pPr>
-              <a:spcAft>
-                <a:spcPts val="600"/>
-              </a:spcAft>
-              <a:defRPr sz="1200" b="1">
-                <a:solidFill>
-                  <a:srgbClr val="EF4444"/>
-                </a:solidFill>
-                <a:latin typeface="Inter"/>
-              </a:defRPr>
-            </a:pPr>
-            <a:r>
-              <a:t>4. EMPIRICAL PROOF &amp; REPRODUCIBLE POCS</a:t>
-            </a:r>
-          </a:p>
-          <a:p>
-            <a:pPr>
-              <a:defRPr sz="1050">
-                <a:solidFill>
-                  <a:srgbClr val="94A3B8"/>
-                </a:solidFill>
-                <a:latin typeface="Inter"/>
-              </a:defRPr>
-            </a:pPr>
-            <a:r>
-              <a:t>Re-executes top findings against the live API to empirically prove reproducibility and eliminate false positives. Generates copy-pasteable, shell-safe cURL PoCs with masked tokens for immediate developer remediation.</a:t>
+              <a:defRPr sz="1100" b="1">
+                <a:solidFill>
+                  <a:srgbClr val="FFFFFF"/>
+                </a:solidFill>
+                <a:latin typeface="Trebuchet MS"/>
+              </a:defRPr>
+            </a:pPr>
+            <a:r>
+              <a:t>Core Advantage: Entirely autonomous from spec to PoC. No manual test scripting, no synthetic dummy payloads, and zero secrets leaked.</a:t>
             </a:r>
           </a:p>
         </p:txBody>
@@ -5695,11 +5605,11 @@
             <a:avLst/>
           </a:prstGeom>
           <a:solidFill>
-            <a:srgbClr val="06080F"/>
+            <a:srgbClr val="070913"/>
           </a:solidFill>
           <a:ln>
             <a:solidFill>
-              <a:srgbClr val="06080F"/>
+              <a:srgbClr val="070913"/>
             </a:solidFill>
           </a:ln>
         </p:spPr>
@@ -5734,7 +5644,7 @@
         <p:spPr>
           <a:xfrm>
             <a:off x="731520" y="365760"/>
-            <a:ext cx="10698480" cy="822960"/>
+            <a:ext cx="10728655" cy="1005840"/>
           </a:xfrm>
           <a:prstGeom prst="rect">
             <a:avLst/>
@@ -5751,28 +5661,28 @@
               <a:spcAft>
                 <a:spcPts val="200"/>
               </a:spcAft>
-              <a:defRPr sz="1000" b="1">
+              <a:defRPr sz="1100" b="1">
                 <a:solidFill>
                   <a:srgbClr val="38BDF8"/>
                 </a:solidFill>
-                <a:latin typeface="Inter"/>
-              </a:defRPr>
-            </a:pPr>
-            <a:r>
-              <a:t>SYSTEM ARCHITECTURE</a:t>
-            </a:r>
-          </a:p>
-          <a:p>
-            <a:pPr>
-              <a:defRPr sz="2200" b="1">
-                <a:solidFill>
-                  <a:srgbClr val="F8FAFC"/>
-                </a:solidFill>
-                <a:latin typeface="Inter"/>
-              </a:defRPr>
-            </a:pPr>
-            <a:r>
-              <a:t>Decoupled Architecture &amp; Enforced Safety Boundaries</a:t>
+                <a:latin typeface="Trebuchet MS"/>
+              </a:defRPr>
+            </a:pPr>
+            <a:r>
+              <a:t>● WHAT IS UNIQUE ABOUT THIS</a:t>
+            </a:r>
+          </a:p>
+          <a:p>
+            <a:pPr>
+              <a:defRPr sz="2600" b="1">
+                <a:solidFill>
+                  <a:srgbClr val="FFFFFF"/>
+                </a:solidFill>
+                <a:latin typeface="Trebuchet MS"/>
+              </a:defRPr>
+            </a:pPr>
+            <a:r>
+              <a:t>Why SentinelAPI Wins: Standing Out Against 200 Teams</a:t>
             </a:r>
           </a:p>
         </p:txBody>
@@ -5785,18 +5695,18 @@
         </p:nvSpPr>
         <p:spPr>
           <a:xfrm>
-            <a:off x="731520" y="1234440"/>
-            <a:ext cx="10728655" cy="19050"/>
+            <a:off x="731520" y="1371600"/>
+            <a:ext cx="10728655" cy="25400"/>
           </a:xfrm>
           <a:prstGeom prst="rect">
             <a:avLst/>
           </a:prstGeom>
           <a:solidFill>
-            <a:srgbClr val="232D42"/>
+            <a:srgbClr val="202945"/>
           </a:solidFill>
           <a:ln>
             <a:solidFill>
-              <a:srgbClr val="232D42"/>
+              <a:srgbClr val="202945"/>
             </a:solidFill>
           </a:ln>
         </p:spPr>
@@ -5845,11 +5755,11 @@
           <a:lstStyle/>
           <a:p>
             <a:pPr>
-              <a:defRPr sz="900">
+              <a:defRPr sz="1000" b="1">
                 <a:solidFill>
                   <a:srgbClr val="64748B"/>
                 </a:solidFill>
-                <a:latin typeface="Inter"/>
+                <a:latin typeface="Calibri"/>
               </a:defRPr>
             </a:pPr>
             <a:r>
@@ -5866,18 +5776,18 @@
         </p:nvSpPr>
         <p:spPr>
           <a:xfrm>
-            <a:off x="694944" y="1380744"/>
-            <a:ext cx="10801807" cy="4370832"/>
+            <a:off x="731520" y="1554480"/>
+            <a:ext cx="10728655" cy="4572000"/>
           </a:xfrm>
           <a:prstGeom prst="roundRect">
             <a:avLst/>
           </a:prstGeom>
           <a:solidFill>
-            <a:srgbClr val="06080F"/>
+            <a:srgbClr val="0E1326"/>
           </a:solidFill>
-          <a:ln w="12700">
+          <a:ln w="19050">
             <a:solidFill>
-              <a:srgbClr val="334155"/>
+              <a:srgbClr val="202945"/>
             </a:solidFill>
           </a:ln>
         </p:spPr>
@@ -5903,52 +5813,24 @@
           </a:p>
         </p:txBody>
       </p:sp>
-      <p:pic>
-        <p:nvPicPr>
-          <p:cNvPr id="7" name="Picture 6" descr="architecture.png"/>
-          <p:cNvPicPr>
-            <a:picLocks noChangeAspect="1"/>
-          </p:cNvPicPr>
-          <p:nvPr/>
-        </p:nvPicPr>
-        <p:blipFill>
-          <a:blip r:embed="rId2"/>
-          <a:stretch>
-            <a:fillRect/>
-          </a:stretch>
-        </p:blipFill>
-        <p:spPr>
-          <a:xfrm>
-            <a:off x="731520" y="1417320"/>
-            <a:ext cx="10728655" cy="4297680"/>
-          </a:xfrm>
-          <a:prstGeom prst="rect">
-            <a:avLst/>
-          </a:prstGeom>
-        </p:spPr>
-      </p:pic>
-      <p:sp>
-        <p:nvSpPr>
-          <p:cNvPr id="8" name="Rounded Rectangle 7"/>
+      <p:sp>
+        <p:nvSpPr>
+          <p:cNvPr id="7" name="Rectangle 6"/>
           <p:cNvSpPr/>
           <p:nvPr/>
         </p:nvSpPr>
         <p:spPr>
           <a:xfrm>
-            <a:off x="731520" y="5806440"/>
-            <a:ext cx="10728655" cy="502920"/>
-          </a:xfrm>
-          <a:prstGeom prst="roundRect">
+            <a:off x="822960" y="1645920"/>
+            <a:ext cx="10545775" cy="411480"/>
+          </a:xfrm>
+          <a:prstGeom prst="rect">
             <a:avLst/>
           </a:prstGeom>
           <a:solidFill>
-            <a:srgbClr val="0D111C"/>
+            <a:srgbClr val="131A36"/>
           </a:solidFill>
-          <a:ln w="12700">
-            <a:solidFill>
-              <a:srgbClr val="232D42"/>
-            </a:solidFill>
-          </a:ln>
+          <a:ln/>
         </p:spPr>
         <p:style>
           <a:lnRef idx="1">
@@ -5974,14 +5856,50 @@
       </p:sp>
       <p:sp>
         <p:nvSpPr>
+          <p:cNvPr id="8" name="TextBox 7"/>
+          <p:cNvSpPr txBox="1"/>
+          <p:nvPr/>
+        </p:nvSpPr>
+        <p:spPr>
+          <a:xfrm>
+            <a:off x="914400" y="1691640"/>
+            <a:ext cx="2377440" cy="502920"/>
+          </a:xfrm>
+          <a:prstGeom prst="rect">
+            <a:avLst/>
+          </a:prstGeom>
+          <a:noFill/>
+        </p:spPr>
+        <p:txBody>
+          <a:bodyPr wrap="none">
+            <a:spAutoFit/>
+          </a:bodyPr>
+          <a:lstStyle/>
+          <a:p>
+            <a:pPr>
+              <a:defRPr sz="1100" b="1">
+                <a:solidFill>
+                  <a:srgbClr val="38BDF8"/>
+                </a:solidFill>
+                <a:latin typeface="Trebuchet MS"/>
+              </a:defRPr>
+            </a:pPr>
+            <a:r>
+              <a:t>EVALUATION CRITERIA</a:t>
+            </a:r>
+          </a:p>
+        </p:txBody>
+      </p:sp>
+      <p:sp>
+        <p:nvSpPr>
           <p:cNvPr id="9" name="TextBox 8"/>
           <p:cNvSpPr txBox="1"/>
           <p:nvPr/>
         </p:nvSpPr>
         <p:spPr>
           <a:xfrm>
-            <a:off x="868680" y="5879592"/>
-            <a:ext cx="10424160" cy="365760"/>
+            <a:off x="3474720" y="1691640"/>
+            <a:ext cx="3931920" cy="502920"/>
           </a:xfrm>
           <a:prstGeom prst="rect">
             <a:avLst/>
@@ -5989,21 +5907,705 @@
           <a:noFill/>
         </p:spPr>
         <p:txBody>
-          <a:bodyPr wrap="square">
+          <a:bodyPr wrap="none">
             <a:spAutoFit/>
           </a:bodyPr>
           <a:lstStyle/>
           <a:p>
             <a:pPr>
-              <a:defRPr sz="950" b="1">
+              <a:defRPr sz="1100" b="1">
+                <a:solidFill>
+                  <a:srgbClr val="F87171"/>
+                </a:solidFill>
+                <a:latin typeface="Calibri"/>
+              </a:defRPr>
+            </a:pPr>
+            <a:r>
+              <a:t>TYPICAL HACKATHON TEAMS (200 TEAMS)</a:t>
+            </a:r>
+          </a:p>
+        </p:txBody>
+      </p:sp>
+      <p:sp>
+        <p:nvSpPr>
+          <p:cNvPr id="10" name="TextBox 9"/>
+          <p:cNvSpPr txBox="1"/>
+          <p:nvPr/>
+        </p:nvSpPr>
+        <p:spPr>
+          <a:xfrm>
+            <a:off x="7589520" y="1691640"/>
+            <a:ext cx="3749039" cy="502920"/>
+          </a:xfrm>
+          <a:prstGeom prst="rect">
+            <a:avLst/>
+          </a:prstGeom>
+          <a:noFill/>
+        </p:spPr>
+        <p:txBody>
+          <a:bodyPr wrap="none">
+            <a:spAutoFit/>
+          </a:bodyPr>
+          <a:lstStyle/>
+          <a:p>
+            <a:pPr>
+              <a:defRPr sz="1100" b="1">
+                <a:solidFill>
+                  <a:srgbClr val="34D399"/>
+                </a:solidFill>
+                <a:latin typeface="Calibri"/>
+              </a:defRPr>
+            </a:pPr>
+            <a:r>
+              <a:t>SENTINELAPI (OUR SOLUTION)</a:t>
+            </a:r>
+          </a:p>
+        </p:txBody>
+      </p:sp>
+      <p:sp>
+        <p:nvSpPr>
+          <p:cNvPr id="11" name="TextBox 10"/>
+          <p:cNvSpPr txBox="1"/>
+          <p:nvPr/>
+        </p:nvSpPr>
+        <p:spPr>
+          <a:xfrm>
+            <a:off x="914400" y="2286000"/>
+            <a:ext cx="2377440" cy="502920"/>
+          </a:xfrm>
+          <a:prstGeom prst="rect">
+            <a:avLst/>
+          </a:prstGeom>
+          <a:noFill/>
+        </p:spPr>
+        <p:txBody>
+          <a:bodyPr wrap="none">
+            <a:spAutoFit/>
+          </a:bodyPr>
+          <a:lstStyle/>
+          <a:p>
+            <a:pPr>
+              <a:defRPr sz="1100" b="1">
+                <a:solidFill>
+                  <a:srgbClr val="FFFFFF"/>
+                </a:solidFill>
+                <a:latin typeface="Trebuchet MS"/>
+              </a:defRPr>
+            </a:pPr>
+            <a:r>
+              <a:t>Vulnerability Focus</a:t>
+            </a:r>
+          </a:p>
+        </p:txBody>
+      </p:sp>
+      <p:sp>
+        <p:nvSpPr>
+          <p:cNvPr id="12" name="TextBox 11"/>
+          <p:cNvSpPr txBox="1"/>
+          <p:nvPr/>
+        </p:nvSpPr>
+        <p:spPr>
+          <a:xfrm>
+            <a:off x="3474720" y="2286000"/>
+            <a:ext cx="3931920" cy="502920"/>
+          </a:xfrm>
+          <a:prstGeom prst="rect">
+            <a:avLst/>
+          </a:prstGeom>
+          <a:noFill/>
+        </p:spPr>
+        <p:txBody>
+          <a:bodyPr wrap="none">
+            <a:spAutoFit/>
+          </a:bodyPr>
+          <a:lstStyle/>
+          <a:p>
+            <a:pPr>
+              <a:defRPr sz="1100" b="0">
+                <a:solidFill>
+                  <a:srgbClr val="94A3B8"/>
+                </a:solidFill>
+                <a:latin typeface="Calibri"/>
+              </a:defRPr>
+            </a:pPr>
+            <a:r>
+              <a:t>Generic SQLi, XSS, or syntax input fuzzing</a:t>
+            </a:r>
+          </a:p>
+        </p:txBody>
+      </p:sp>
+      <p:sp>
+        <p:nvSpPr>
+          <p:cNvPr id="13" name="TextBox 12"/>
+          <p:cNvSpPr txBox="1"/>
+          <p:nvPr/>
+        </p:nvSpPr>
+        <p:spPr>
+          <a:xfrm>
+            <a:off x="7589520" y="2286000"/>
+            <a:ext cx="3749039" cy="502920"/>
+          </a:xfrm>
+          <a:prstGeom prst="rect">
+            <a:avLst/>
+          </a:prstGeom>
+          <a:noFill/>
+        </p:spPr>
+        <p:txBody>
+          <a:bodyPr wrap="none">
+            <a:spAutoFit/>
+          </a:bodyPr>
+          <a:lstStyle/>
+          <a:p>
+            <a:pPr>
+              <a:defRPr sz="1100" b="1">
                 <a:solidFill>
                   <a:srgbClr val="38BDF8"/>
                 </a:solidFill>
-                <a:latin typeface="Inter"/>
-              </a:defRPr>
-            </a:pPr>
-            <a:r>
-              <a:t>Core Invariant: Deterministic Security Engine is strictly decoupled from presentation and storage. The AI Analyst is an evidence-only side-branch with zero raw data egress.</a:t>
+                <a:latin typeface="Calibri"/>
+              </a:defRPr>
+            </a:pPr>
+            <a:r>
+              <a:t>Complex Multi-User Authorization (BOLA, BFLA, Data Exposure)</a:t>
+            </a:r>
+          </a:p>
+        </p:txBody>
+      </p:sp>
+      <p:sp>
+        <p:nvSpPr>
+          <p:cNvPr id="14" name="TextBox 13"/>
+          <p:cNvSpPr txBox="1"/>
+          <p:nvPr/>
+        </p:nvSpPr>
+        <p:spPr>
+          <a:xfrm>
+            <a:off x="914400" y="2880360"/>
+            <a:ext cx="2377440" cy="502920"/>
+          </a:xfrm>
+          <a:prstGeom prst="rect">
+            <a:avLst/>
+          </a:prstGeom>
+          <a:noFill/>
+        </p:spPr>
+        <p:txBody>
+          <a:bodyPr wrap="none">
+            <a:spAutoFit/>
+          </a:bodyPr>
+          <a:lstStyle/>
+          <a:p>
+            <a:pPr>
+              <a:defRPr sz="1100" b="1">
+                <a:solidFill>
+                  <a:srgbClr val="FFFFFF"/>
+                </a:solidFill>
+                <a:latin typeface="Trebuchet MS"/>
+              </a:defRPr>
+            </a:pPr>
+            <a:r>
+              <a:t>Detection Engine</a:t>
+            </a:r>
+          </a:p>
+        </p:txBody>
+      </p:sp>
+      <p:sp>
+        <p:nvSpPr>
+          <p:cNvPr id="15" name="TextBox 14"/>
+          <p:cNvSpPr txBox="1"/>
+          <p:nvPr/>
+        </p:nvSpPr>
+        <p:spPr>
+          <a:xfrm>
+            <a:off x="3474720" y="2880360"/>
+            <a:ext cx="3931920" cy="502920"/>
+          </a:xfrm>
+          <a:prstGeom prst="rect">
+            <a:avLst/>
+          </a:prstGeom>
+          <a:noFill/>
+        </p:spPr>
+        <p:txBody>
+          <a:bodyPr wrap="none">
+            <a:spAutoFit/>
+          </a:bodyPr>
+          <a:lstStyle/>
+          <a:p>
+            <a:pPr>
+              <a:defRPr sz="1100" b="0">
+                <a:solidFill>
+                  <a:srgbClr val="94A3B8"/>
+                </a:solidFill>
+                <a:latin typeface="Calibri"/>
+              </a:defRPr>
+            </a:pPr>
+            <a:r>
+              <a:t>Asks an LLM 'is this vulnerable?' (Hallucinations &amp; Flaky)</a:t>
+            </a:r>
+          </a:p>
+        </p:txBody>
+      </p:sp>
+      <p:sp>
+        <p:nvSpPr>
+          <p:cNvPr id="16" name="TextBox 15"/>
+          <p:cNvSpPr txBox="1"/>
+          <p:nvPr/>
+        </p:nvSpPr>
+        <p:spPr>
+          <a:xfrm>
+            <a:off x="7589520" y="2880360"/>
+            <a:ext cx="3749039" cy="502920"/>
+          </a:xfrm>
+          <a:prstGeom prst="rect">
+            <a:avLst/>
+          </a:prstGeom>
+          <a:noFill/>
+        </p:spPr>
+        <p:txBody>
+          <a:bodyPr wrap="none">
+            <a:spAutoFit/>
+          </a:bodyPr>
+          <a:lstStyle/>
+          <a:p>
+            <a:pPr>
+              <a:defRPr sz="1100" b="1">
+                <a:solidFill>
+                  <a:srgbClr val="38BDF8"/>
+                </a:solidFill>
+                <a:latin typeface="Calibri"/>
+              </a:defRPr>
+            </a:pPr>
+            <a:r>
+              <a:t>100% Deterministic Differential Engine (Weighted Jaccard Distance)</a:t>
+            </a:r>
+          </a:p>
+        </p:txBody>
+      </p:sp>
+      <p:sp>
+        <p:nvSpPr>
+          <p:cNvPr id="17" name="TextBox 16"/>
+          <p:cNvSpPr txBox="1"/>
+          <p:nvPr/>
+        </p:nvSpPr>
+        <p:spPr>
+          <a:xfrm>
+            <a:off x="914400" y="3474720"/>
+            <a:ext cx="2377440" cy="502920"/>
+          </a:xfrm>
+          <a:prstGeom prst="rect">
+            <a:avLst/>
+          </a:prstGeom>
+          <a:noFill/>
+        </p:spPr>
+        <p:txBody>
+          <a:bodyPr wrap="none">
+            <a:spAutoFit/>
+          </a:bodyPr>
+          <a:lstStyle/>
+          <a:p>
+            <a:pPr>
+              <a:defRPr sz="1100" b="1">
+                <a:solidFill>
+                  <a:srgbClr val="FFFFFF"/>
+                </a:solidFill>
+                <a:latin typeface="Trebuchet MS"/>
+              </a:defRPr>
+            </a:pPr>
+            <a:r>
+              <a:t>Ownership Knowledge</a:t>
+            </a:r>
+          </a:p>
+        </p:txBody>
+      </p:sp>
+      <p:sp>
+        <p:nvSpPr>
+          <p:cNvPr id="18" name="TextBox 17"/>
+          <p:cNvSpPr txBox="1"/>
+          <p:nvPr/>
+        </p:nvSpPr>
+        <p:spPr>
+          <a:xfrm>
+            <a:off x="3474720" y="3474720"/>
+            <a:ext cx="3931920" cy="502920"/>
+          </a:xfrm>
+          <a:prstGeom prst="rect">
+            <a:avLst/>
+          </a:prstGeom>
+          <a:noFill/>
+        </p:spPr>
+        <p:txBody>
+          <a:bodyPr wrap="none">
+            <a:spAutoFit/>
+          </a:bodyPr>
+          <a:lstStyle/>
+          <a:p>
+            <a:pPr>
+              <a:defRPr sz="1100" b="0">
+                <a:solidFill>
+                  <a:srgbClr val="94A3B8"/>
+                </a:solidFill>
+                <a:latin typeface="Calibri"/>
+              </a:defRPr>
+            </a:pPr>
+            <a:r>
+              <a:t>Random ID guessing or hardcoded IDs in test scripts</a:t>
+            </a:r>
+          </a:p>
+        </p:txBody>
+      </p:sp>
+      <p:sp>
+        <p:nvSpPr>
+          <p:cNvPr id="19" name="TextBox 18"/>
+          <p:cNvSpPr txBox="1"/>
+          <p:nvPr/>
+        </p:nvSpPr>
+        <p:spPr>
+          <a:xfrm>
+            <a:off x="7589520" y="3474720"/>
+            <a:ext cx="3749039" cy="502920"/>
+          </a:xfrm>
+          <a:prstGeom prst="rect">
+            <a:avLst/>
+          </a:prstGeom>
+          <a:noFill/>
+        </p:spPr>
+        <p:txBody>
+          <a:bodyPr wrap="none">
+            <a:spAutoFit/>
+          </a:bodyPr>
+          <a:lstStyle/>
+          <a:p>
+            <a:pPr>
+              <a:defRPr sz="1100" b="1">
+                <a:solidFill>
+                  <a:srgbClr val="38BDF8"/>
+                </a:solidFill>
+                <a:latin typeface="Calibri"/>
+              </a:defRPr>
+            </a:pPr>
+            <a:r>
+              <a:t>Autonomous Resource Ownership Discovery from Legitimate APIs</a:t>
+            </a:r>
+          </a:p>
+        </p:txBody>
+      </p:sp>
+      <p:sp>
+        <p:nvSpPr>
+          <p:cNvPr id="20" name="TextBox 19"/>
+          <p:cNvSpPr txBox="1"/>
+          <p:nvPr/>
+        </p:nvSpPr>
+        <p:spPr>
+          <a:xfrm>
+            <a:off x="914400" y="4069080"/>
+            <a:ext cx="2377440" cy="502920"/>
+          </a:xfrm>
+          <a:prstGeom prst="rect">
+            <a:avLst/>
+          </a:prstGeom>
+          <a:noFill/>
+        </p:spPr>
+        <p:txBody>
+          <a:bodyPr wrap="none">
+            <a:spAutoFit/>
+          </a:bodyPr>
+          <a:lstStyle/>
+          <a:p>
+            <a:pPr>
+              <a:defRPr sz="1100" b="1">
+                <a:solidFill>
+                  <a:srgbClr val="FFFFFF"/>
+                </a:solidFill>
+                <a:latin typeface="Trebuchet MS"/>
+              </a:defRPr>
+            </a:pPr>
+            <a:r>
+              <a:t>Accuracy &amp; Evidence</a:t>
+            </a:r>
+          </a:p>
+        </p:txBody>
+      </p:sp>
+      <p:sp>
+        <p:nvSpPr>
+          <p:cNvPr id="21" name="TextBox 20"/>
+          <p:cNvSpPr txBox="1"/>
+          <p:nvPr/>
+        </p:nvSpPr>
+        <p:spPr>
+          <a:xfrm>
+            <a:off x="3474720" y="4069080"/>
+            <a:ext cx="3931920" cy="502920"/>
+          </a:xfrm>
+          <a:prstGeom prst="rect">
+            <a:avLst/>
+          </a:prstGeom>
+          <a:noFill/>
+        </p:spPr>
+        <p:txBody>
+          <a:bodyPr wrap="none">
+            <a:spAutoFit/>
+          </a:bodyPr>
+          <a:lstStyle/>
+          <a:p>
+            <a:pPr>
+              <a:defRPr sz="1100" b="0">
+                <a:solidFill>
+                  <a:srgbClr val="94A3B8"/>
+                </a:solidFill>
+                <a:latin typeface="Calibri"/>
+              </a:defRPr>
+            </a:pPr>
+            <a:r>
+              <a:t>Vague warnings with high false positive rates</a:t>
+            </a:r>
+          </a:p>
+        </p:txBody>
+      </p:sp>
+      <p:sp>
+        <p:nvSpPr>
+          <p:cNvPr id="22" name="TextBox 21"/>
+          <p:cNvSpPr txBox="1"/>
+          <p:nvPr/>
+        </p:nvSpPr>
+        <p:spPr>
+          <a:xfrm>
+            <a:off x="7589520" y="4069080"/>
+            <a:ext cx="3749039" cy="502920"/>
+          </a:xfrm>
+          <a:prstGeom prst="rect">
+            <a:avLst/>
+          </a:prstGeom>
+          <a:noFill/>
+        </p:spPr>
+        <p:txBody>
+          <a:bodyPr wrap="none">
+            <a:spAutoFit/>
+          </a:bodyPr>
+          <a:lstStyle/>
+          <a:p>
+            <a:pPr>
+              <a:defRPr sz="1100" b="1">
+                <a:solidFill>
+                  <a:srgbClr val="38BDF8"/>
+                </a:solidFill>
+                <a:latin typeface="Calibri"/>
+              </a:defRPr>
+            </a:pPr>
+            <a:r>
+              <a:t>Empirically Proven Live Reproduction + Copy-Paste cURL PoCs</a:t>
+            </a:r>
+          </a:p>
+        </p:txBody>
+      </p:sp>
+      <p:sp>
+        <p:nvSpPr>
+          <p:cNvPr id="23" name="TextBox 22"/>
+          <p:cNvSpPr txBox="1"/>
+          <p:nvPr/>
+        </p:nvSpPr>
+        <p:spPr>
+          <a:xfrm>
+            <a:off x="914400" y="4663440"/>
+            <a:ext cx="2377440" cy="502920"/>
+          </a:xfrm>
+          <a:prstGeom prst="rect">
+            <a:avLst/>
+          </a:prstGeom>
+          <a:noFill/>
+        </p:spPr>
+        <p:txBody>
+          <a:bodyPr wrap="none">
+            <a:spAutoFit/>
+          </a:bodyPr>
+          <a:lstStyle/>
+          <a:p>
+            <a:pPr>
+              <a:defRPr sz="1100" b="1">
+                <a:solidFill>
+                  <a:srgbClr val="FFFFFF"/>
+                </a:solidFill>
+                <a:latin typeface="Trebuchet MS"/>
+              </a:defRPr>
+            </a:pPr>
+            <a:r>
+              <a:t>Safety &amp; Egress</a:t>
+            </a:r>
+          </a:p>
+        </p:txBody>
+      </p:sp>
+      <p:sp>
+        <p:nvSpPr>
+          <p:cNvPr id="24" name="TextBox 23"/>
+          <p:cNvSpPr txBox="1"/>
+          <p:nvPr/>
+        </p:nvSpPr>
+        <p:spPr>
+          <a:xfrm>
+            <a:off x="3474720" y="4663440"/>
+            <a:ext cx="3931920" cy="502920"/>
+          </a:xfrm>
+          <a:prstGeom prst="rect">
+            <a:avLst/>
+          </a:prstGeom>
+          <a:noFill/>
+        </p:spPr>
+        <p:txBody>
+          <a:bodyPr wrap="none">
+            <a:spAutoFit/>
+          </a:bodyPr>
+          <a:lstStyle/>
+          <a:p>
+            <a:pPr>
+              <a:defRPr sz="1100" b="0">
+                <a:solidFill>
+                  <a:srgbClr val="94A3B8"/>
+                </a:solidFill>
+                <a:latin typeface="Calibri"/>
+              </a:defRPr>
+            </a:pPr>
+            <a:r>
+              <a:t>Unrestricted flood requests; sends raw tokens to AI</a:t>
+            </a:r>
+          </a:p>
+        </p:txBody>
+      </p:sp>
+      <p:sp>
+        <p:nvSpPr>
+          <p:cNvPr id="25" name="TextBox 24"/>
+          <p:cNvSpPr txBox="1"/>
+          <p:nvPr/>
+        </p:nvSpPr>
+        <p:spPr>
+          <a:xfrm>
+            <a:off x="7589520" y="4663440"/>
+            <a:ext cx="3749039" cy="502920"/>
+          </a:xfrm>
+          <a:prstGeom prst="rect">
+            <a:avLst/>
+          </a:prstGeom>
+          <a:noFill/>
+        </p:spPr>
+        <p:txBody>
+          <a:bodyPr wrap="none">
+            <a:spAutoFit/>
+          </a:bodyPr>
+          <a:lstStyle/>
+          <a:p>
+            <a:pPr>
+              <a:defRPr sz="1100" b="1">
+                <a:solidFill>
+                  <a:srgbClr val="38BDF8"/>
+                </a:solidFill>
+                <a:latin typeface="Calibri"/>
+              </a:defRPr>
+            </a:pPr>
+            <a:r>
+              <a:t>Scope Guard, 20 RPS Rate Cap, Budget Cap, Zero Egress PII Guard</a:t>
+            </a:r>
+          </a:p>
+        </p:txBody>
+      </p:sp>
+      <p:sp>
+        <p:nvSpPr>
+          <p:cNvPr id="26" name="TextBox 25"/>
+          <p:cNvSpPr txBox="1"/>
+          <p:nvPr/>
+        </p:nvSpPr>
+        <p:spPr>
+          <a:xfrm>
+            <a:off x="914400" y="5257800"/>
+            <a:ext cx="2377440" cy="502920"/>
+          </a:xfrm>
+          <a:prstGeom prst="rect">
+            <a:avLst/>
+          </a:prstGeom>
+          <a:noFill/>
+        </p:spPr>
+        <p:txBody>
+          <a:bodyPr wrap="none">
+            <a:spAutoFit/>
+          </a:bodyPr>
+          <a:lstStyle/>
+          <a:p>
+            <a:pPr>
+              <a:defRPr sz="1100" b="1">
+                <a:solidFill>
+                  <a:srgbClr val="FFFFFF"/>
+                </a:solidFill>
+                <a:latin typeface="Trebuchet MS"/>
+              </a:defRPr>
+            </a:pPr>
+            <a:r>
+              <a:t>Production Readiness</a:t>
+            </a:r>
+          </a:p>
+        </p:txBody>
+      </p:sp>
+      <p:sp>
+        <p:nvSpPr>
+          <p:cNvPr id="27" name="TextBox 26"/>
+          <p:cNvSpPr txBox="1"/>
+          <p:nvPr/>
+        </p:nvSpPr>
+        <p:spPr>
+          <a:xfrm>
+            <a:off x="3474720" y="5257800"/>
+            <a:ext cx="3931920" cy="502920"/>
+          </a:xfrm>
+          <a:prstGeom prst="rect">
+            <a:avLst/>
+          </a:prstGeom>
+          <a:noFill/>
+        </p:spPr>
+        <p:txBody>
+          <a:bodyPr wrap="none">
+            <a:spAutoFit/>
+          </a:bodyPr>
+          <a:lstStyle/>
+          <a:p>
+            <a:pPr>
+              <a:defRPr sz="1100" b="0">
+                <a:solidFill>
+                  <a:srgbClr val="94A3B8"/>
+                </a:solidFill>
+                <a:latin typeface="Calibri"/>
+              </a:defRPr>
+            </a:pPr>
+            <a:r>
+              <a:t>Mock scripts or static Figma UI concept</a:t>
+            </a:r>
+          </a:p>
+        </p:txBody>
+      </p:sp>
+      <p:sp>
+        <p:nvSpPr>
+          <p:cNvPr id="28" name="TextBox 27"/>
+          <p:cNvSpPr txBox="1"/>
+          <p:nvPr/>
+        </p:nvSpPr>
+        <p:spPr>
+          <a:xfrm>
+            <a:off x="7589520" y="5257800"/>
+            <a:ext cx="3749039" cy="502920"/>
+          </a:xfrm>
+          <a:prstGeom prst="rect">
+            <a:avLst/>
+          </a:prstGeom>
+          <a:noFill/>
+        </p:spPr>
+        <p:txBody>
+          <a:bodyPr wrap="none">
+            <a:spAutoFit/>
+          </a:bodyPr>
+          <a:lstStyle/>
+          <a:p>
+            <a:pPr>
+              <a:defRPr sz="1100" b="1">
+                <a:solidFill>
+                  <a:srgbClr val="38BDF8"/>
+                </a:solidFill>
+                <a:latin typeface="Calibri"/>
+              </a:defRPr>
+            </a:pPr>
+            <a:r>
+              <a:t>FastAPI Backend + React 19 HUD + Headless CI Gate + Docker Stack</a:t>
             </a:r>
           </a:p>
         </p:txBody>
@@ -6041,11 +6643,11 @@
             <a:avLst/>
           </a:prstGeom>
           <a:solidFill>
-            <a:srgbClr val="06080F"/>
+            <a:srgbClr val="070913"/>
           </a:solidFill>
           <a:ln>
             <a:solidFill>
-              <a:srgbClr val="06080F"/>
+              <a:srgbClr val="070913"/>
             </a:solidFill>
           </a:ln>
         </p:spPr>
@@ -6080,7 +6682,7 @@
         <p:spPr>
           <a:xfrm>
             <a:off x="731520" y="365760"/>
-            <a:ext cx="10698480" cy="822960"/>
+            <a:ext cx="10728655" cy="1005840"/>
           </a:xfrm>
           <a:prstGeom prst="rect">
             <a:avLst/>
@@ -6097,28 +6699,28 @@
               <a:spcAft>
                 <a:spcPts val="200"/>
               </a:spcAft>
-              <a:defRPr sz="1000" b="1">
+              <a:defRPr sz="1100" b="1">
                 <a:solidFill>
                   <a:srgbClr val="38BDF8"/>
                 </a:solidFill>
-                <a:latin typeface="Inter"/>
-              </a:defRPr>
-            </a:pPr>
-            <a:r>
-              <a:t>KEY TECHNOLOGIES</a:t>
-            </a:r>
-          </a:p>
-          <a:p>
-            <a:pPr>
-              <a:defRPr sz="2200" b="1">
-                <a:solidFill>
-                  <a:srgbClr val="F8FAFC"/>
-                </a:solidFill>
-                <a:latin typeface="Inter"/>
-              </a:defRPr>
-            </a:pPr>
-            <a:r>
-              <a:t>Proprietary Judged IP: 6 Core Engineering Engines</a:t>
+                <a:latin typeface="Trebuchet MS"/>
+              </a:defRPr>
+            </a:pPr>
+            <a:r>
+              <a:t>● KEY FEATURES (PROPRIETARY IP)</a:t>
+            </a:r>
+          </a:p>
+          <a:p>
+            <a:pPr>
+              <a:defRPr sz="2600" b="1">
+                <a:solidFill>
+                  <a:srgbClr val="FFFFFF"/>
+                </a:solidFill>
+                <a:latin typeface="Trebuchet MS"/>
+              </a:defRPr>
+            </a:pPr>
+            <a:r>
+              <a:t>The Core Security Engine: 6 Proprietary Deep-Tech Engines</a:t>
             </a:r>
           </a:p>
         </p:txBody>
@@ -6131,18 +6733,18 @@
         </p:nvSpPr>
         <p:spPr>
           <a:xfrm>
-            <a:off x="731520" y="1234440"/>
-            <a:ext cx="10728655" cy="19050"/>
+            <a:off x="731520" y="1371600"/>
+            <a:ext cx="10728655" cy="25400"/>
           </a:xfrm>
           <a:prstGeom prst="rect">
             <a:avLst/>
           </a:prstGeom>
           <a:solidFill>
-            <a:srgbClr val="232D42"/>
+            <a:srgbClr val="202945"/>
           </a:solidFill>
           <a:ln>
             <a:solidFill>
-              <a:srgbClr val="232D42"/>
+              <a:srgbClr val="202945"/>
             </a:solidFill>
           </a:ln>
         </p:spPr>
@@ -6191,11 +6793,11 @@
           <a:lstStyle/>
           <a:p>
             <a:pPr>
-              <a:defRPr sz="900">
+              <a:defRPr sz="1000" b="1">
                 <a:solidFill>
                   <a:srgbClr val="64748B"/>
                 </a:solidFill>
-                <a:latin typeface="Inter"/>
+                <a:latin typeface="Calibri"/>
               </a:defRPr>
             </a:pPr>
             <a:r>
@@ -6212,18 +6814,18 @@
         </p:nvSpPr>
         <p:spPr>
           <a:xfrm>
-            <a:off x="731520" y="1463040"/>
-            <a:ext cx="3413455" cy="2148840"/>
+            <a:off x="731520" y="1645920"/>
+            <a:ext cx="3413455" cy="2057400"/>
           </a:xfrm>
           <a:prstGeom prst="roundRect">
             <a:avLst/>
           </a:prstGeom>
           <a:solidFill>
-            <a:srgbClr val="0D111C"/>
+            <a:srgbClr val="0E1326"/>
           </a:solidFill>
-          <a:ln w="12700">
+          <a:ln w="25400">
             <a:solidFill>
-              <a:srgbClr val="232D42"/>
+              <a:srgbClr val="38BDF8"/>
             </a:solidFill>
           </a:ln>
         </p:spPr>
@@ -6251,24 +6853,76 @@
       </p:sp>
       <p:sp>
         <p:nvSpPr>
-          <p:cNvPr id="7" name="Rectangle 6"/>
+          <p:cNvPr id="7" name="TextBox 6"/>
+          <p:cNvSpPr txBox="1"/>
+          <p:nvPr/>
+        </p:nvSpPr>
+        <p:spPr>
+          <a:xfrm>
+            <a:off x="914400" y="1810512"/>
+            <a:ext cx="3047695" cy="1728216"/>
+          </a:xfrm>
+          <a:prstGeom prst="rect">
+            <a:avLst/>
+          </a:prstGeom>
+          <a:noFill/>
+        </p:spPr>
+        <p:txBody>
+          <a:bodyPr wrap="square">
+            <a:spAutoFit/>
+          </a:bodyPr>
+          <a:lstStyle/>
+          <a:p>
+            <a:pPr>
+              <a:spcAft>
+                <a:spcPts val="800"/>
+              </a:spcAft>
+              <a:defRPr sz="1300" b="1">
+                <a:solidFill>
+                  <a:srgbClr val="38BDF8"/>
+                </a:solidFill>
+                <a:latin typeface="Trebuchet MS"/>
+              </a:defRPr>
+            </a:pPr>
+            <a:r>
+              <a:t>ENGINE 1 · Attack Surface Mapper</a:t>
+            </a:r>
+          </a:p>
+          <a:p>
+            <a:pPr>
+              <a:defRPr sz="1100">
+                <a:solidFill>
+                  <a:srgbClr val="94A3B8"/>
+                </a:solidFill>
+                <a:latin typeface="Calibri"/>
+              </a:defRPr>
+            </a:pPr>
+            <a:r>
+              <a:t>Parses OpenAPI 3.x specifications with circular $ref resolution. Extracts query/path parameters and scores initial endpoint risk based on state-changing methods.</a:t>
+            </a:r>
+          </a:p>
+        </p:txBody>
+      </p:sp>
+      <p:sp>
+        <p:nvSpPr>
+          <p:cNvPr id="8" name="Rounded Rectangle 7"/>
           <p:cNvSpPr/>
           <p:nvPr/>
         </p:nvSpPr>
         <p:spPr>
           <a:xfrm>
-            <a:off x="731520" y="1463040"/>
-            <a:ext cx="3413455" cy="38100"/>
-          </a:xfrm>
-          <a:prstGeom prst="rect">
+            <a:off x="4389120" y="1645920"/>
+            <a:ext cx="3413455" cy="2057400"/>
+          </a:xfrm>
+          <a:prstGeom prst="roundRect">
             <a:avLst/>
           </a:prstGeom>
           <a:solidFill>
-            <a:srgbClr val="38BDF8"/>
+            <a:srgbClr val="0E1326"/>
           </a:solidFill>
-          <a:ln>
+          <a:ln w="25400">
             <a:solidFill>
-              <a:srgbClr val="38BDF8"/>
+              <a:srgbClr val="34D399"/>
             </a:solidFill>
           </a:ln>
         </p:spPr>
@@ -6296,14 +6950,14 @@
       </p:sp>
       <p:sp>
         <p:nvSpPr>
-          <p:cNvPr id="8" name="TextBox 7"/>
+          <p:cNvPr id="9" name="TextBox 8"/>
           <p:cNvSpPr txBox="1"/>
           <p:nvPr/>
         </p:nvSpPr>
         <p:spPr>
           <a:xfrm>
-            <a:off x="914400" y="1627632"/>
-            <a:ext cx="3047695" cy="1874520"/>
+            <a:off x="4572000" y="1810512"/>
+            <a:ext cx="3047695" cy="1728216"/>
           </a:xfrm>
           <a:prstGeom prst="rect">
             <a:avLst/>
@@ -6320,52 +6974,52 @@
               <a:spcAft>
                 <a:spcPts val="800"/>
               </a:spcAft>
-              <a:defRPr sz="1100" b="1">
-                <a:solidFill>
-                  <a:srgbClr val="38BDF8"/>
-                </a:solidFill>
-                <a:latin typeface="Inter"/>
-              </a:defRPr>
-            </a:pPr>
-            <a:r>
-              <a:t>ATTACK SURFACE MAPPER</a:t>
-            </a:r>
-          </a:p>
-          <a:p>
-            <a:pPr>
-              <a:defRPr sz="1000">
+              <a:defRPr sz="1300" b="1">
+                <a:solidFill>
+                  <a:srgbClr val="34D399"/>
+                </a:solidFill>
+                <a:latin typeface="Trebuchet MS"/>
+              </a:defRPr>
+            </a:pPr>
+            <a:r>
+              <a:t>ENGINE 2 · Identity &amp; HTTP Executor</a:t>
+            </a:r>
+          </a:p>
+          <a:p>
+            <a:pPr>
+              <a:defRPr sz="1100">
                 <a:solidFill>
                   <a:srgbClr val="94A3B8"/>
                 </a:solidFill>
-                <a:latin typeface="Inter"/>
-              </a:defRPr>
-            </a:pPr>
-            <a:r>
-              <a:t>Parses and dereferences OpenAPI 3.x contracts with circular $ref isolation. Extracts parameters, routes, auth constraints, and calculates preliminary risk prioritization scores.</a:t>
-            </a:r>
-          </a:p>
-        </p:txBody>
-      </p:sp>
-      <p:sp>
-        <p:nvSpPr>
-          <p:cNvPr id="9" name="Rounded Rectangle 8"/>
+                <a:latin typeface="Calibri"/>
+              </a:defRPr>
+            </a:pPr>
+            <a:r>
+              <a:t>Multi-persona JWT session manager enforcing 20 RPS token-bucket rate limits, 1,000 req budgets, and strict host allowlists (assert_in_scope).</a:t>
+            </a:r>
+          </a:p>
+        </p:txBody>
+      </p:sp>
+      <p:sp>
+        <p:nvSpPr>
+          <p:cNvPr id="10" name="Rounded Rectangle 9"/>
           <p:cNvSpPr/>
           <p:nvPr/>
         </p:nvSpPr>
         <p:spPr>
           <a:xfrm>
-            <a:off x="4389120" y="1463040"/>
-            <a:ext cx="3413455" cy="2148840"/>
+            <a:off x="8046720" y="1645920"/>
+            <a:ext cx="3413455" cy="2057400"/>
           </a:xfrm>
           <a:prstGeom prst="roundRect">
             <a:avLst/>
           </a:prstGeom>
           <a:solidFill>
-            <a:srgbClr val="0D111C"/>
+            <a:srgbClr val="0E1326"/>
           </a:solidFill>
-          <a:ln w="12700">
+          <a:ln w="25400">
             <a:solidFill>
-              <a:srgbClr val="232D42"/>
+              <a:srgbClr val="818CF8"/>
             </a:solidFill>
           </a:ln>
         </p:spPr>
@@ -6393,24 +7047,76 @@
       </p:sp>
       <p:sp>
         <p:nvSpPr>
-          <p:cNvPr id="10" name="Rectangle 9"/>
+          <p:cNvPr id="11" name="TextBox 10"/>
+          <p:cNvSpPr txBox="1"/>
+          <p:nvPr/>
+        </p:nvSpPr>
+        <p:spPr>
+          <a:xfrm>
+            <a:off x="8229600" y="1810512"/>
+            <a:ext cx="3047695" cy="1728216"/>
+          </a:xfrm>
+          <a:prstGeom prst="rect">
+            <a:avLst/>
+          </a:prstGeom>
+          <a:noFill/>
+        </p:spPr>
+        <p:txBody>
+          <a:bodyPr wrap="square">
+            <a:spAutoFit/>
+          </a:bodyPr>
+          <a:lstStyle/>
+          <a:p>
+            <a:pPr>
+              <a:spcAft>
+                <a:spcPts val="800"/>
+              </a:spcAft>
+              <a:defRPr sz="1300" b="1">
+                <a:solidFill>
+                  <a:srgbClr val="818CF8"/>
+                </a:solidFill>
+                <a:latin typeface="Trebuchet MS"/>
+              </a:defRPr>
+            </a:pPr>
+            <a:r>
+              <a:t>ENGINE 3 · Matrix Compiler</a:t>
+            </a:r>
+          </a:p>
+          <a:p>
+            <a:pPr>
+              <a:defRPr sz="1100">
+                <a:solidFill>
+                  <a:srgbClr val="94A3B8"/>
+                </a:solidFill>
+                <a:latin typeface="Calibri"/>
+              </a:defRPr>
+            </a:pPr>
+            <a:r>
+              <a:t>Discovers legitimate resource ownership per user and compiles a mathematical Allow/Deny expectation matrix for every endpoint and object ID.</a:t>
+            </a:r>
+          </a:p>
+        </p:txBody>
+      </p:sp>
+      <p:sp>
+        <p:nvSpPr>
+          <p:cNvPr id="12" name="Rounded Rectangle 11"/>
           <p:cNvSpPr/>
           <p:nvPr/>
         </p:nvSpPr>
         <p:spPr>
           <a:xfrm>
-            <a:off x="4389120" y="1463040"/>
-            <a:ext cx="3413455" cy="38100"/>
-          </a:xfrm>
-          <a:prstGeom prst="rect">
+            <a:off x="731520" y="3931920"/>
+            <a:ext cx="3413455" cy="2057400"/>
+          </a:xfrm>
+          <a:prstGeom prst="roundRect">
             <a:avLst/>
           </a:prstGeom>
           <a:solidFill>
-            <a:srgbClr val="10B981"/>
+            <a:srgbClr val="0E1326"/>
           </a:solidFill>
-          <a:ln>
+          <a:ln w="25400">
             <a:solidFill>
-              <a:srgbClr val="10B981"/>
+              <a:srgbClr val="FBBF24"/>
             </a:solidFill>
           </a:ln>
         </p:spPr>
@@ -6438,14 +7144,14 @@
       </p:sp>
       <p:sp>
         <p:nvSpPr>
-          <p:cNvPr id="11" name="TextBox 10"/>
+          <p:cNvPr id="13" name="TextBox 12"/>
           <p:cNvSpPr txBox="1"/>
           <p:nvPr/>
         </p:nvSpPr>
         <p:spPr>
           <a:xfrm>
-            <a:off x="4572000" y="1627632"/>
-            <a:ext cx="3047695" cy="1874520"/>
+            <a:off x="914400" y="4096512"/>
+            <a:ext cx="3047695" cy="1728216"/>
           </a:xfrm>
           <a:prstGeom prst="rect">
             <a:avLst/>
@@ -6462,52 +7168,52 @@
               <a:spcAft>
                 <a:spcPts val="800"/>
               </a:spcAft>
-              <a:defRPr sz="1100" b="1">
-                <a:solidFill>
-                  <a:srgbClr val="10B981"/>
-                </a:solidFill>
-                <a:latin typeface="Inter"/>
-              </a:defRPr>
-            </a:pPr>
-            <a:r>
-              <a:t>IDENTITY &amp; EXECUTION ENGINE</a:t>
-            </a:r>
-          </a:p>
-          <a:p>
-            <a:pPr>
-              <a:defRPr sz="1000">
+              <a:defRPr sz="1300" b="1">
+                <a:solidFill>
+                  <a:srgbClr val="FBBF24"/>
+                </a:solidFill>
+                <a:latin typeface="Trebuchet MS"/>
+              </a:defRPr>
+            </a:pPr>
+            <a:r>
+              <a:t>ENGINE 4 · Differential Analyzer</a:t>
+            </a:r>
+          </a:p>
+          <a:p>
+            <a:pPr>
+              <a:defRPr sz="1100">
                 <a:solidFill>
                   <a:srgbClr val="94A3B8"/>
                 </a:solidFill>
-                <a:latin typeface="Inter"/>
-              </a:defRPr>
-            </a:pPr>
-            <a:r>
-              <a:t>Orchestrates multi-user persona sessions via JWT/Bearer auth. Dispatches probes through token-bucket rate limiter (20 RPS) and immutable host allowlists (assert_in_scope).</a:t>
-            </a:r>
-          </a:p>
-        </p:txBody>
-      </p:sp>
-      <p:sp>
-        <p:nvSpPr>
-          <p:cNvPr id="12" name="Rounded Rectangle 11"/>
+                <a:latin typeface="Calibri"/>
+              </a:defRPr>
+            </a:pPr>
+            <a:r>
+              <a:t>Computes weighted Jaccard payload similarity, HTTP status divergence, and detects leaked sensitive PII fields outside the documented schema.</a:t>
+            </a:r>
+          </a:p>
+        </p:txBody>
+      </p:sp>
+      <p:sp>
+        <p:nvSpPr>
+          <p:cNvPr id="14" name="Rounded Rectangle 13"/>
           <p:cNvSpPr/>
           <p:nvPr/>
         </p:nvSpPr>
         <p:spPr>
           <a:xfrm>
-            <a:off x="8046720" y="1463040"/>
-            <a:ext cx="3413455" cy="2148840"/>
+            <a:off x="4389120" y="3931920"/>
+            <a:ext cx="3413455" cy="2057400"/>
           </a:xfrm>
           <a:prstGeom prst="roundRect">
             <a:avLst/>
           </a:prstGeom>
           <a:solidFill>
-            <a:srgbClr val="0D111C"/>
+            <a:srgbClr val="0E1326"/>
           </a:solidFill>
-          <a:ln w="12700">
+          <a:ln w="25400">
             <a:solidFill>
-              <a:srgbClr val="232D42"/>
+              <a:srgbClr val="F87171"/>
             </a:solidFill>
           </a:ln>
         </p:spPr>
@@ -6535,24 +7241,76 @@
       </p:sp>
       <p:sp>
         <p:nvSpPr>
-          <p:cNvPr id="13" name="Rectangle 12"/>
+          <p:cNvPr id="15" name="TextBox 14"/>
+          <p:cNvSpPr txBox="1"/>
+          <p:nvPr/>
+        </p:nvSpPr>
+        <p:spPr>
+          <a:xfrm>
+            <a:off x="4572000" y="4096512"/>
+            <a:ext cx="3047695" cy="1728216"/>
+          </a:xfrm>
+          <a:prstGeom prst="rect">
+            <a:avLst/>
+          </a:prstGeom>
+          <a:noFill/>
+        </p:spPr>
+        <p:txBody>
+          <a:bodyPr wrap="square">
+            <a:spAutoFit/>
+          </a:bodyPr>
+          <a:lstStyle/>
+          <a:p>
+            <a:pPr>
+              <a:spcAft>
+                <a:spcPts val="800"/>
+              </a:spcAft>
+              <a:defRPr sz="1300" b="1">
+                <a:solidFill>
+                  <a:srgbClr val="F87171"/>
+                </a:solidFill>
+                <a:latin typeface="Trebuchet MS"/>
+              </a:defRPr>
+            </a:pPr>
+            <a:r>
+              <a:t>ENGINE 5 · 6 Security Checks</a:t>
+            </a:r>
+          </a:p>
+          <a:p>
+            <a:pPr>
+              <a:defRPr sz="1100">
+                <a:solidFill>
+                  <a:srgbClr val="94A3B8"/>
+                </a:solidFill>
+                <a:latin typeface="Calibri"/>
+              </a:defRPr>
+            </a:pPr>
+            <a:r>
+              <a:t>Dedicated detection suites for BOLA/IDOR (API1), Broken Auth (API2), Data Exposure (API3), Rate Limiting (API4), BFLA Privileges (API5), and Input Anomalies (API8).</a:t>
+            </a:r>
+          </a:p>
+        </p:txBody>
+      </p:sp>
+      <p:sp>
+        <p:nvSpPr>
+          <p:cNvPr id="16" name="Rounded Rectangle 15"/>
           <p:cNvSpPr/>
           <p:nvPr/>
         </p:nvSpPr>
         <p:spPr>
           <a:xfrm>
-            <a:off x="8046720" y="1463040"/>
-            <a:ext cx="3413455" cy="38100"/>
-          </a:xfrm>
-          <a:prstGeom prst="rect">
+            <a:off x="8046720" y="3931920"/>
+            <a:ext cx="3413455" cy="2057400"/>
+          </a:xfrm>
+          <a:prstGeom prst="roundRect">
             <a:avLst/>
           </a:prstGeom>
           <a:solidFill>
-            <a:srgbClr val="6366F1"/>
+            <a:srgbClr val="0E1326"/>
           </a:solidFill>
-          <a:ln>
+          <a:ln w="25400">
             <a:solidFill>
-              <a:srgbClr val="6366F1"/>
+              <a:srgbClr val="C084FC"/>
             </a:solidFill>
           </a:ln>
         </p:spPr>
@@ -6580,14 +7338,14 @@
       </p:sp>
       <p:sp>
         <p:nvSpPr>
-          <p:cNvPr id="14" name="TextBox 13"/>
+          <p:cNvPr id="17" name="TextBox 16"/>
           <p:cNvSpPr txBox="1"/>
           <p:nvPr/>
         </p:nvSpPr>
         <p:spPr>
           <a:xfrm>
-            <a:off x="8229600" y="1627632"/>
-            <a:ext cx="3047695" cy="1874520"/>
+            <a:off x="8229600" y="4096512"/>
+            <a:ext cx="3047695" cy="1728216"/>
           </a:xfrm>
           <a:prstGeom prst="rect">
             <a:avLst/>
@@ -6604,454 +7362,28 @@
               <a:spcAft>
                 <a:spcPts val="800"/>
               </a:spcAft>
-              <a:defRPr sz="1100" b="1">
-                <a:solidFill>
-                  <a:srgbClr val="6366F1"/>
-                </a:solidFill>
-                <a:latin typeface="Inter"/>
-              </a:defRPr>
-            </a:pPr>
-            <a:r>
-              <a:t>GROUND-TRUTH MATRIX COMPILER</a:t>
-            </a:r>
-          </a:p>
-          <a:p>
-            <a:pPr>
-              <a:defRPr sz="1000">
+              <a:defRPr sz="1300" b="1">
+                <a:solidFill>
+                  <a:srgbClr val="C084FC"/>
+                </a:solidFill>
+                <a:latin typeface="Trebuchet MS"/>
+              </a:defRPr>
+            </a:pPr>
+            <a:r>
+              <a:t>ENGINE 6 · Explainable Risk Scorer</a:t>
+            </a:r>
+          </a:p>
+          <a:p>
+            <a:pPr>
+              <a:defRPr sz="1100">
                 <a:solidFill>
                   <a:srgbClr val="94A3B8"/>
                 </a:solidFill>
-                <a:latin typeface="Inter"/>
-              </a:defRPr>
-            </a:pPr>
-            <a:r>
-              <a:t>Queries legitimate profile &amp; collection GET endpoints to dynamically discover resources owned by each persona, constructing an explicit mathematical Allow/Deny expectation matrix.</a:t>
-            </a:r>
-          </a:p>
-        </p:txBody>
-      </p:sp>
-      <p:sp>
-        <p:nvSpPr>
-          <p:cNvPr id="15" name="Rounded Rectangle 14"/>
-          <p:cNvSpPr/>
-          <p:nvPr/>
-        </p:nvSpPr>
-        <p:spPr>
-          <a:xfrm>
-            <a:off x="731520" y="3794760"/>
-            <a:ext cx="3413455" cy="2148840"/>
-          </a:xfrm>
-          <a:prstGeom prst="roundRect">
-            <a:avLst/>
-          </a:prstGeom>
-          <a:solidFill>
-            <a:srgbClr val="0D111C"/>
-          </a:solidFill>
-          <a:ln w="12700">
-            <a:solidFill>
-              <a:srgbClr val="232D42"/>
-            </a:solidFill>
-          </a:ln>
-        </p:spPr>
-        <p:style>
-          <a:lnRef idx="1">
-            <a:schemeClr val="accent1"/>
-          </a:lnRef>
-          <a:fillRef idx="3">
-            <a:schemeClr val="accent1"/>
-          </a:fillRef>
-          <a:effectRef idx="2">
-            <a:schemeClr val="accent1"/>
-          </a:effectRef>
-          <a:fontRef idx="minor">
-            <a:schemeClr val="lt1"/>
-          </a:fontRef>
-        </p:style>
-        <p:txBody>
-          <a:bodyPr rtlCol="0" anchor="ctr"/>
-          <a:lstStyle/>
-          <a:p>
-            <a:pPr algn="ctr"/>
-          </a:p>
-        </p:txBody>
-      </p:sp>
-      <p:sp>
-        <p:nvSpPr>
-          <p:cNvPr id="16" name="Rectangle 15"/>
-          <p:cNvSpPr/>
-          <p:nvPr/>
-        </p:nvSpPr>
-        <p:spPr>
-          <a:xfrm>
-            <a:off x="731520" y="3794760"/>
-            <a:ext cx="3413455" cy="38100"/>
-          </a:xfrm>
-          <a:prstGeom prst="rect">
-            <a:avLst/>
-          </a:prstGeom>
-          <a:solidFill>
-            <a:srgbClr val="F59E0B"/>
-          </a:solidFill>
-          <a:ln>
-            <a:solidFill>
-              <a:srgbClr val="F59E0B"/>
-            </a:solidFill>
-          </a:ln>
-        </p:spPr>
-        <p:style>
-          <a:lnRef idx="1">
-            <a:schemeClr val="accent1"/>
-          </a:lnRef>
-          <a:fillRef idx="3">
-            <a:schemeClr val="accent1"/>
-          </a:fillRef>
-          <a:effectRef idx="2">
-            <a:schemeClr val="accent1"/>
-          </a:effectRef>
-          <a:fontRef idx="minor">
-            <a:schemeClr val="lt1"/>
-          </a:fontRef>
-        </p:style>
-        <p:txBody>
-          <a:bodyPr rtlCol="0" anchor="ctr"/>
-          <a:lstStyle/>
-          <a:p>
-            <a:pPr algn="ctr"/>
-          </a:p>
-        </p:txBody>
-      </p:sp>
-      <p:sp>
-        <p:nvSpPr>
-          <p:cNvPr id="17" name="TextBox 16"/>
-          <p:cNvSpPr txBox="1"/>
-          <p:nvPr/>
-        </p:nvSpPr>
-        <p:spPr>
-          <a:xfrm>
-            <a:off x="914400" y="3959352"/>
-            <a:ext cx="3047695" cy="1874520"/>
-          </a:xfrm>
-          <a:prstGeom prst="rect">
-            <a:avLst/>
-          </a:prstGeom>
-          <a:noFill/>
-        </p:spPr>
-        <p:txBody>
-          <a:bodyPr wrap="square">
-            <a:spAutoFit/>
-          </a:bodyPr>
-          <a:lstStyle/>
-          <a:p>
-            <a:pPr>
-              <a:spcAft>
-                <a:spcPts val="800"/>
-              </a:spcAft>
-              <a:defRPr sz="1100" b="1">
-                <a:solidFill>
-                  <a:srgbClr val="F59E0B"/>
-                </a:solidFill>
-                <a:latin typeface="Inter"/>
-              </a:defRPr>
-            </a:pPr>
-            <a:r>
-              <a:t>DIFFERENTIAL ANALYSIS ENGINE</a:t>
-            </a:r>
-          </a:p>
-          <a:p>
-            <a:pPr>
-              <a:defRPr sz="1000">
-                <a:solidFill>
-                  <a:srgbClr val="94A3B8"/>
-                </a:solidFill>
-                <a:latin typeface="Inter"/>
-              </a:defRPr>
-            </a:pPr>
-            <a:r>
-              <a:t>Compares attack vs legitimate baseline responses using weighted Jaccard similarity distance, status-code divergence, and sensitive-field classification.</a:t>
-            </a:r>
-          </a:p>
-        </p:txBody>
-      </p:sp>
-      <p:sp>
-        <p:nvSpPr>
-          <p:cNvPr id="18" name="Rounded Rectangle 17"/>
-          <p:cNvSpPr/>
-          <p:nvPr/>
-        </p:nvSpPr>
-        <p:spPr>
-          <a:xfrm>
-            <a:off x="4389120" y="3794760"/>
-            <a:ext cx="3413455" cy="2148840"/>
-          </a:xfrm>
-          <a:prstGeom prst="roundRect">
-            <a:avLst/>
-          </a:prstGeom>
-          <a:solidFill>
-            <a:srgbClr val="0D111C"/>
-          </a:solidFill>
-          <a:ln w="12700">
-            <a:solidFill>
-              <a:srgbClr val="232D42"/>
-            </a:solidFill>
-          </a:ln>
-        </p:spPr>
-        <p:style>
-          <a:lnRef idx="1">
-            <a:schemeClr val="accent1"/>
-          </a:lnRef>
-          <a:fillRef idx="3">
-            <a:schemeClr val="accent1"/>
-          </a:fillRef>
-          <a:effectRef idx="2">
-            <a:schemeClr val="accent1"/>
-          </a:effectRef>
-          <a:fontRef idx="minor">
-            <a:schemeClr val="lt1"/>
-          </a:fontRef>
-        </p:style>
-        <p:txBody>
-          <a:bodyPr rtlCol="0" anchor="ctr"/>
-          <a:lstStyle/>
-          <a:p>
-            <a:pPr algn="ctr"/>
-          </a:p>
-        </p:txBody>
-      </p:sp>
-      <p:sp>
-        <p:nvSpPr>
-          <p:cNvPr id="19" name="Rectangle 18"/>
-          <p:cNvSpPr/>
-          <p:nvPr/>
-        </p:nvSpPr>
-        <p:spPr>
-          <a:xfrm>
-            <a:off x="4389120" y="3794760"/>
-            <a:ext cx="3413455" cy="38100"/>
-          </a:xfrm>
-          <a:prstGeom prst="rect">
-            <a:avLst/>
-          </a:prstGeom>
-          <a:solidFill>
-            <a:srgbClr val="EF4444"/>
-          </a:solidFill>
-          <a:ln>
-            <a:solidFill>
-              <a:srgbClr val="EF4444"/>
-            </a:solidFill>
-          </a:ln>
-        </p:spPr>
-        <p:style>
-          <a:lnRef idx="1">
-            <a:schemeClr val="accent1"/>
-          </a:lnRef>
-          <a:fillRef idx="3">
-            <a:schemeClr val="accent1"/>
-          </a:fillRef>
-          <a:effectRef idx="2">
-            <a:schemeClr val="accent1"/>
-          </a:effectRef>
-          <a:fontRef idx="minor">
-            <a:schemeClr val="lt1"/>
-          </a:fontRef>
-        </p:style>
-        <p:txBody>
-          <a:bodyPr rtlCol="0" anchor="ctr"/>
-          <a:lstStyle/>
-          <a:p>
-            <a:pPr algn="ctr"/>
-          </a:p>
-        </p:txBody>
-      </p:sp>
-      <p:sp>
-        <p:nvSpPr>
-          <p:cNvPr id="20" name="TextBox 19"/>
-          <p:cNvSpPr txBox="1"/>
-          <p:nvPr/>
-        </p:nvSpPr>
-        <p:spPr>
-          <a:xfrm>
-            <a:off x="4572000" y="3959352"/>
-            <a:ext cx="3047695" cy="1874520"/>
-          </a:xfrm>
-          <a:prstGeom prst="rect">
-            <a:avLst/>
-          </a:prstGeom>
-          <a:noFill/>
-        </p:spPr>
-        <p:txBody>
-          <a:bodyPr wrap="square">
-            <a:spAutoFit/>
-          </a:bodyPr>
-          <a:lstStyle/>
-          <a:p>
-            <a:pPr>
-              <a:spcAft>
-                <a:spcPts val="800"/>
-              </a:spcAft>
-              <a:defRPr sz="1100" b="1">
-                <a:solidFill>
-                  <a:srgbClr val="EF4444"/>
-                </a:solidFill>
-                <a:latin typeface="Inter"/>
-              </a:defRPr>
-            </a:pPr>
-            <a:r>
-              <a:t>6 MODULAR SECURITY CHECKS</a:t>
-            </a:r>
-          </a:p>
-          <a:p>
-            <a:pPr>
-              <a:defRPr sz="1000">
-                <a:solidFill>
-                  <a:srgbClr val="94A3B8"/>
-                </a:solidFill>
-                <a:latin typeface="Inter"/>
-              </a:defRPr>
-            </a:pPr>
-            <a:r>
-              <a:t>Extensible check suite testing BOLA/IDOR (API1), Broken Authentication (API2), Excessive Data Exposure (API3), Rate Limiting (API4), BFLA Privileges (API5), and Input Handling (API8).</a:t>
-            </a:r>
-          </a:p>
-        </p:txBody>
-      </p:sp>
-      <p:sp>
-        <p:nvSpPr>
-          <p:cNvPr id="21" name="Rounded Rectangle 20"/>
-          <p:cNvSpPr/>
-          <p:nvPr/>
-        </p:nvSpPr>
-        <p:spPr>
-          <a:xfrm>
-            <a:off x="8046720" y="3794760"/>
-            <a:ext cx="3413455" cy="2148840"/>
-          </a:xfrm>
-          <a:prstGeom prst="roundRect">
-            <a:avLst/>
-          </a:prstGeom>
-          <a:solidFill>
-            <a:srgbClr val="0D111C"/>
-          </a:solidFill>
-          <a:ln w="12700">
-            <a:solidFill>
-              <a:srgbClr val="232D42"/>
-            </a:solidFill>
-          </a:ln>
-        </p:spPr>
-        <p:style>
-          <a:lnRef idx="1">
-            <a:schemeClr val="accent1"/>
-          </a:lnRef>
-          <a:fillRef idx="3">
-            <a:schemeClr val="accent1"/>
-          </a:fillRef>
-          <a:effectRef idx="2">
-            <a:schemeClr val="accent1"/>
-          </a:effectRef>
-          <a:fontRef idx="minor">
-            <a:schemeClr val="lt1"/>
-          </a:fontRef>
-        </p:style>
-        <p:txBody>
-          <a:bodyPr rtlCol="0" anchor="ctr"/>
-          <a:lstStyle/>
-          <a:p>
-            <a:pPr algn="ctr"/>
-          </a:p>
-        </p:txBody>
-      </p:sp>
-      <p:sp>
-        <p:nvSpPr>
-          <p:cNvPr id="22" name="Rectangle 21"/>
-          <p:cNvSpPr/>
-          <p:nvPr/>
-        </p:nvSpPr>
-        <p:spPr>
-          <a:xfrm>
-            <a:off x="8046720" y="3794760"/>
-            <a:ext cx="3413455" cy="38100"/>
-          </a:xfrm>
-          <a:prstGeom prst="rect">
-            <a:avLst/>
-          </a:prstGeom>
-          <a:solidFill>
-            <a:srgbClr val="A855F7"/>
-          </a:solidFill>
-          <a:ln>
-            <a:solidFill>
-              <a:srgbClr val="A855F7"/>
-            </a:solidFill>
-          </a:ln>
-        </p:spPr>
-        <p:style>
-          <a:lnRef idx="1">
-            <a:schemeClr val="accent1"/>
-          </a:lnRef>
-          <a:fillRef idx="3">
-            <a:schemeClr val="accent1"/>
-          </a:fillRef>
-          <a:effectRef idx="2">
-            <a:schemeClr val="accent1"/>
-          </a:effectRef>
-          <a:fontRef idx="minor">
-            <a:schemeClr val="lt1"/>
-          </a:fontRef>
-        </p:style>
-        <p:txBody>
-          <a:bodyPr rtlCol="0" anchor="ctr"/>
-          <a:lstStyle/>
-          <a:p>
-            <a:pPr algn="ctr"/>
-          </a:p>
-        </p:txBody>
-      </p:sp>
-      <p:sp>
-        <p:nvSpPr>
-          <p:cNvPr id="23" name="TextBox 22"/>
-          <p:cNvSpPr txBox="1"/>
-          <p:nvPr/>
-        </p:nvSpPr>
-        <p:spPr>
-          <a:xfrm>
-            <a:off x="8229600" y="3959352"/>
-            <a:ext cx="3047695" cy="1874520"/>
-          </a:xfrm>
-          <a:prstGeom prst="rect">
-            <a:avLst/>
-          </a:prstGeom>
-          <a:noFill/>
-        </p:spPr>
-        <p:txBody>
-          <a:bodyPr wrap="square">
-            <a:spAutoFit/>
-          </a:bodyPr>
-          <a:lstStyle/>
-          <a:p>
-            <a:pPr>
-              <a:spcAft>
-                <a:spcPts val="800"/>
-              </a:spcAft>
-              <a:defRPr sz="1100" b="1">
-                <a:solidFill>
-                  <a:srgbClr val="A855F7"/>
-                </a:solidFill>
-                <a:latin typeface="Inter"/>
-              </a:defRPr>
-            </a:pPr>
-            <a:r>
-              <a:t>EXPLAINABLE RISK &amp; CONFIDENCE</a:t>
-            </a:r>
-          </a:p>
-          <a:p>
-            <a:pPr>
-              <a:defRPr sz="1000">
-                <a:solidFill>
-                  <a:srgbClr val="94A3B8"/>
-                </a:solidFill>
-                <a:latin typeface="Inter"/>
-              </a:defRPr>
-            </a:pPr>
-            <a:r>
-              <a:t>Replaces arbitrary CVSS guesswork with a transparent 4-part score: Impact (0-40) + Exploitability (0-25) + Sensitivity (0-30) + Evidence Strength (0-15) plus empirical reproduction.</a:t>
+                <a:latin typeface="Calibri"/>
+              </a:defRPr>
+            </a:pPr>
+            <a:r>
+              <a:t>Replaces CVSS guesswork with a 4-part score: Impact (40) + Exploitability (25) + Sensitivity (30) + Evidence (15) with live empirical reproduction.</a:t>
             </a:r>
           </a:p>
         </p:txBody>
@@ -7089,11 +7421,11 @@
             <a:avLst/>
           </a:prstGeom>
           <a:solidFill>
-            <a:srgbClr val="06080F"/>
+            <a:srgbClr val="070913"/>
           </a:solidFill>
           <a:ln>
             <a:solidFill>
-              <a:srgbClr val="06080F"/>
+              <a:srgbClr val="070913"/>
             </a:solidFill>
           </a:ln>
         </p:spPr>
@@ -7128,7 +7460,7 @@
         <p:spPr>
           <a:xfrm>
             <a:off x="731520" y="365760"/>
-            <a:ext cx="10698480" cy="822960"/>
+            <a:ext cx="10728655" cy="1005840"/>
           </a:xfrm>
           <a:prstGeom prst="rect">
             <a:avLst/>
@@ -7145,28 +7477,28 @@
               <a:spcAft>
                 <a:spcPts val="200"/>
               </a:spcAft>
-              <a:defRPr sz="1000" b="1">
+              <a:defRPr sz="1100" b="1">
                 <a:solidFill>
                   <a:srgbClr val="38BDF8"/>
                 </a:solidFill>
-                <a:latin typeface="Inter"/>
-              </a:defRPr>
-            </a:pPr>
-            <a:r>
-              <a:t>TECHNICAL HIGHLIGHTS</a:t>
-            </a:r>
-          </a:p>
-          <a:p>
-            <a:pPr>
-              <a:defRPr sz="2200" b="1">
-                <a:solidFill>
-                  <a:srgbClr val="F8FAFC"/>
-                </a:solidFill>
-                <a:latin typeface="Inter"/>
-              </a:defRPr>
-            </a:pPr>
-            <a:r>
-              <a:t>Production Safety Guardrails &amp; Zero-Trust Design</a:t>
+                <a:latin typeface="Trebuchet MS"/>
+              </a:defRPr>
+            </a:pPr>
+            <a:r>
+              <a:t>● SYSTEM ARCHITECTURE</a:t>
+            </a:r>
+          </a:p>
+          <a:p>
+            <a:pPr>
+              <a:defRPr sz="2600" b="1">
+                <a:solidFill>
+                  <a:srgbClr val="FFFFFF"/>
+                </a:solidFill>
+                <a:latin typeface="Trebuchet MS"/>
+              </a:defRPr>
+            </a:pPr>
+            <a:r>
+              <a:t>Decoupled Architecture &amp; Enforced Safety Boundaries</a:t>
             </a:r>
           </a:p>
         </p:txBody>
@@ -7179,18 +7511,18 @@
         </p:nvSpPr>
         <p:spPr>
           <a:xfrm>
-            <a:off x="731520" y="1234440"/>
-            <a:ext cx="10728655" cy="19050"/>
+            <a:off x="731520" y="1371600"/>
+            <a:ext cx="10728655" cy="25400"/>
           </a:xfrm>
           <a:prstGeom prst="rect">
             <a:avLst/>
           </a:prstGeom>
           <a:solidFill>
-            <a:srgbClr val="232D42"/>
+            <a:srgbClr val="202945"/>
           </a:solidFill>
           <a:ln>
             <a:solidFill>
-              <a:srgbClr val="232D42"/>
+              <a:srgbClr val="202945"/>
             </a:solidFill>
           </a:ln>
         </p:spPr>
@@ -7239,11 +7571,11 @@
           <a:lstStyle/>
           <a:p>
             <a:pPr>
-              <a:defRPr sz="900">
+              <a:defRPr sz="1000" b="1">
                 <a:solidFill>
                   <a:srgbClr val="64748B"/>
                 </a:solidFill>
-                <a:latin typeface="Inter"/>
+                <a:latin typeface="Calibri"/>
               </a:defRPr>
             </a:pPr>
             <a:r>
@@ -7260,18 +7592,18 @@
         </p:nvSpPr>
         <p:spPr>
           <a:xfrm>
-            <a:off x="731520" y="1463040"/>
-            <a:ext cx="5272430" cy="4663440"/>
+            <a:off x="704088" y="1481328"/>
+            <a:ext cx="10783519" cy="4123944"/>
           </a:xfrm>
           <a:prstGeom prst="roundRect">
             <a:avLst/>
           </a:prstGeom>
           <a:solidFill>
-            <a:srgbClr val="0D111C"/>
+            <a:srgbClr val="070913"/>
           </a:solidFill>
           <a:ln w="12700">
             <a:solidFill>
-              <a:srgbClr val="232D42"/>
+              <a:srgbClr val="202945"/>
             </a:solidFill>
           </a:ln>
         </p:spPr>
@@ -7297,170 +7629,30 @@
           </a:p>
         </p:txBody>
       </p:sp>
-      <p:sp>
-        <p:nvSpPr>
-          <p:cNvPr id="7" name="TextBox 6"/>
-          <p:cNvSpPr txBox="1"/>
-          <p:nvPr/>
-        </p:nvSpPr>
-        <p:spPr>
-          <a:xfrm>
-            <a:off x="1005840" y="1645920"/>
-            <a:ext cx="4723790" cy="4297680"/>
-          </a:xfrm>
-          <a:prstGeom prst="rect">
-            <a:avLst/>
-          </a:prstGeom>
-          <a:noFill/>
-        </p:spPr>
-        <p:txBody>
-          <a:bodyPr wrap="square">
-            <a:spAutoFit/>
-          </a:bodyPr>
-          <a:lstStyle/>
-          <a:p>
-            <a:pPr>
-              <a:spcAft>
-                <a:spcPts val="1000"/>
-              </a:spcAft>
-              <a:defRPr sz="1300" b="1">
-                <a:solidFill>
-                  <a:srgbClr val="38BDF8"/>
-                </a:solidFill>
-                <a:latin typeface="Inter"/>
-              </a:defRPr>
-            </a:pPr>
-            <a:r>
-              <a:t>ENFORCED SAFETY &amp; AUDIT BOUNDARIES</a:t>
-            </a:r>
-          </a:p>
-          <a:p>
-            <a:pPr>
-              <a:spcAft>
-                <a:spcPts val="600"/>
-              </a:spcAft>
-              <a:defRPr sz="1000" b="1">
-                <a:solidFill>
-                  <a:srgbClr val="F8FAFC"/>
-                </a:solidFill>
-                <a:latin typeface="Inter"/>
-              </a:defRPr>
-            </a:pPr>
-            <a:r>
-              <a:t>• Scope Guard (assert_in_scope): </a:t>
-            </a:r>
-            <a:r>
-              <a:rPr b="0">
-                <a:solidFill>
-                  <a:srgbClr val="94A3B8"/>
-                </a:solidFill>
-                <a:latin typeface="Inter"/>
-              </a:rPr>
-              <a:t>Hardcoded validation against explicit ALLOWED_HOSTS. Any probe dispatch to third-party domains or unauthorized IPs raises ScopeViolationError immediately.</a:t>
-            </a:r>
-          </a:p>
-          <a:p>
-            <a:pPr>
-              <a:spcAft>
-                <a:spcPts val="600"/>
-              </a:spcAft>
-              <a:defRPr sz="1000" b="1">
-                <a:solidFill>
-                  <a:srgbClr val="F8FAFC"/>
-                </a:solidFill>
-                <a:latin typeface="Inter"/>
-              </a:defRPr>
-            </a:pPr>
-            <a:r>
-              <a:t>• Token-Bucket Rate Limiter: </a:t>
-            </a:r>
-            <a:r>
-              <a:rPr b="0">
-                <a:solidFill>
-                  <a:srgbClr val="94A3B8"/>
-                </a:solidFill>
-                <a:latin typeface="Inter"/>
-              </a:rPr>
-              <a:t>Restricts scanning speed to 20 RPS to prevent denial-of-service, API degradation, or accidental infrastructure lockout on target services.</a:t>
-            </a:r>
-          </a:p>
-          <a:p>
-            <a:pPr>
-              <a:spcAft>
-                <a:spcPts val="600"/>
-              </a:spcAft>
-              <a:defRPr sz="1000" b="1">
-                <a:solidFill>
-                  <a:srgbClr val="F8FAFC"/>
-                </a:solidFill>
-                <a:latin typeface="Inter"/>
-              </a:defRPr>
-            </a:pPr>
-            <a:r>
-              <a:t>• Strict Request Budget Cap: </a:t>
-            </a:r>
-            <a:r>
-              <a:rPr b="0">
-                <a:solidFill>
-                  <a:srgbClr val="94A3B8"/>
-                </a:solidFill>
-                <a:latin typeface="Inter"/>
-              </a:rPr>
-              <a:t>Hard maximum of 1,000 requests per scan prevents infinite loops, recursive endpoint traps, and runaway probe generation.</a:t>
-            </a:r>
-          </a:p>
-          <a:p>
-            <a:pPr>
-              <a:spcAft>
-                <a:spcPts val="600"/>
-              </a:spcAft>
-              <a:defRPr sz="1000" b="1">
-                <a:solidFill>
-                  <a:srgbClr val="F8FAFC"/>
-                </a:solidFill>
-                <a:latin typeface="Inter"/>
-              </a:defRPr>
-            </a:pPr>
-            <a:r>
-              <a:t>• Defense-in-Depth Redaction: </a:t>
-            </a:r>
-            <a:r>
-              <a:rPr b="0">
-                <a:solidFill>
-                  <a:srgbClr val="94A3B8"/>
-                </a:solidFill>
-                <a:latin typeface="Inter"/>
-              </a:rPr>
-              <a:t>Tokens, Authorization headers, and passwords are permanently scrubbed before disk storage, API responses, or UI rendering. PoCs use $TOKEN.</a:t>
-            </a:r>
-          </a:p>
-          <a:p>
-            <a:pPr>
-              <a:spcAft>
-                <a:spcPts val="600"/>
-              </a:spcAft>
-              <a:defRPr sz="1000" b="1">
-                <a:solidFill>
-                  <a:srgbClr val="F8FAFC"/>
-                </a:solidFill>
-                <a:latin typeface="Inter"/>
-              </a:defRPr>
-            </a:pPr>
-            <a:r>
-              <a:t>• Shielded State Cleanup: </a:t>
-            </a:r>
-            <a:r>
-              <a:rPr b="0">
-                <a:solidFill>
-                  <a:srgbClr val="94A3B8"/>
-                </a:solidFill>
-                <a:latin typeface="Inter"/>
-              </a:rPr>
-              <a:t>Objects created during tests are deleted in shielded finally blocks, ensuring zero residual artifacts remain on target APIs.</a:t>
-            </a:r>
-          </a:p>
-        </p:txBody>
-      </p:sp>
+      <p:pic>
+        <p:nvPicPr>
+          <p:cNvPr id="7" name="Picture 6" descr="architecture.png"/>
+          <p:cNvPicPr>
+            <a:picLocks noChangeAspect="1"/>
+          </p:cNvPicPr>
+          <p:nvPr/>
+        </p:nvPicPr>
+        <p:blipFill>
+          <a:blip r:embed="rId2"/>
+          <a:stretch>
+            <a:fillRect/>
+          </a:stretch>
+        </p:blipFill>
+        <p:spPr>
+          <a:xfrm>
+            <a:off x="731520" y="1508760"/>
+            <a:ext cx="10728655" cy="4069080"/>
+          </a:xfrm>
+          <a:prstGeom prst="rect">
+            <a:avLst/>
+          </a:prstGeom>
+        </p:spPr>
+      </p:pic>
       <p:sp>
         <p:nvSpPr>
           <p:cNvPr id="8" name="Rounded Rectangle 7"/>
@@ -7469,18 +7661,18 @@
         </p:nvSpPr>
         <p:spPr>
           <a:xfrm>
-            <a:off x="6186830" y="1463040"/>
-            <a:ext cx="5272430" cy="4663440"/>
+            <a:off x="731520" y="5715000"/>
+            <a:ext cx="10728655" cy="502920"/>
           </a:xfrm>
           <a:prstGeom prst="roundRect">
             <a:avLst/>
           </a:prstGeom>
           <a:solidFill>
-            <a:srgbClr val="0D111C"/>
+            <a:srgbClr val="131A36"/>
           </a:solidFill>
-          <a:ln w="12700">
+          <a:ln w="19050">
             <a:solidFill>
-              <a:srgbClr val="232D42"/>
+              <a:srgbClr val="38BDF8"/>
             </a:solidFill>
           </a:ln>
         </p:spPr>
@@ -7514,8 +7706,8 @@
         </p:nvSpPr>
         <p:spPr>
           <a:xfrm>
-            <a:off x="6461150" y="1645920"/>
-            <a:ext cx="4723790" cy="4297680"/>
+            <a:off x="914400" y="5760720"/>
+            <a:ext cx="10362895" cy="411480"/>
           </a:xfrm>
           <a:prstGeom prst="rect">
             <a:avLst/>
@@ -7523,149 +7715,21 @@
           <a:noFill/>
         </p:spPr>
         <p:txBody>
-          <a:bodyPr wrap="square">
+          <a:bodyPr wrap="none">
             <a:spAutoFit/>
           </a:bodyPr>
           <a:lstStyle/>
           <a:p>
             <a:pPr>
-              <a:spcAft>
-                <a:spcPts val="1000"/>
-              </a:spcAft>
-              <a:defRPr sz="1300" b="1">
-                <a:solidFill>
-                  <a:srgbClr val="6366F1"/>
-                </a:solidFill>
-                <a:latin typeface="Inter"/>
-              </a:defRPr>
-            </a:pPr>
-            <a:r>
-              <a:t>ZERO-LEAK AI ANALYST &amp; MODERN TECH STACK</a:t>
-            </a:r>
-          </a:p>
-          <a:p>
-            <a:pPr>
-              <a:spcAft>
-                <a:spcPts val="600"/>
-              </a:spcAft>
               <a:defRPr sz="1000" b="1">
                 <a:solidFill>
-                  <a:srgbClr val="F8FAFC"/>
-                </a:solidFill>
-                <a:latin typeface="Inter"/>
-              </a:defRPr>
-            </a:pPr>
-            <a:r>
-              <a:t>• Evidence-Only AI Analyst: </a:t>
-            </a:r>
-            <a:r>
-              <a:rPr b="0">
-                <a:solidFill>
-                  <a:srgbClr val="94A3B8"/>
-                </a:solidFill>
-                <a:latin typeface="Inter"/>
-              </a:rPr>
-              <a:t>Optional side-branch (Groq, OpenRouter, Gemini). The LLM NEVER detects vulnerabilities, modifies severity, or influences scan outcomes.</a:t>
-            </a:r>
-          </a:p>
-          <a:p>
-            <a:pPr>
-              <a:spcAft>
-                <a:spcPts val="600"/>
-              </a:spcAft>
-              <a:defRPr sz="1000" b="1">
-                <a:solidFill>
-                  <a:srgbClr val="F8FAFC"/>
-                </a:solidFill>
-                <a:latin typeface="Inter"/>
-              </a:defRPr>
-            </a:pPr>
-            <a:r>
-              <a:t>• Pre-Flight Egress Assertion: </a:t>
-            </a:r>
-            <a:r>
-              <a:rPr b="0">
-                <a:solidFill>
-                  <a:srgbClr val="94A3B8"/>
-                </a:solidFill>
-                <a:latin typeface="Inter"/>
-              </a:rPr>
-              <a:t>assert_payload_safe() runs regex scans on outgoing payloads. Egress is terminated if tokens, SSNs, credit cards, or internal IPs are detected.</a:t>
-            </a:r>
-          </a:p>
-          <a:p>
-            <a:pPr>
-              <a:spcAft>
-                <a:spcPts val="600"/>
-              </a:spcAft>
-              <a:defRPr sz="1000" b="1">
-                <a:solidFill>
-                  <a:srgbClr val="F8FAFC"/>
-                </a:solidFill>
-                <a:latin typeface="Inter"/>
-              </a:defRPr>
-            </a:pPr>
-            <a:r>
-              <a:t>• Deterministic Fallback: </a:t>
-            </a:r>
-            <a:r>
-              <a:rPr b="0">
-                <a:solidFill>
-                  <a:srgbClr val="94A3B8"/>
-                </a:solidFill>
-                <a:latin typeface="Inter"/>
-              </a:rPr>
-              <a:t>If the LLM provider times out, returns malformed JSON, or exceeds rate limits, pre-compiled deterministic remediation templates activate seamlessly.</a:t>
-            </a:r>
-          </a:p>
-          <a:p>
-            <a:pPr>
-              <a:spcAft>
-                <a:spcPts val="600"/>
-              </a:spcAft>
-              <a:defRPr sz="1000" b="1">
-                <a:solidFill>
-                  <a:srgbClr val="F8FAFC"/>
-                </a:solidFill>
-                <a:latin typeface="Inter"/>
-              </a:defRPr>
-            </a:pPr>
-            <a:r>
-              <a:t>• High-Performance Backend: </a:t>
-            </a:r>
-            <a:r>
-              <a:rPr b="0">
-                <a:solidFill>
-                  <a:srgbClr val="94A3B8"/>
-                </a:solidFill>
-                <a:latin typeface="Inter"/>
-              </a:rPr>
-              <a:t>Python 3.11/3.14 with FastAPI async orchestrator, Pydantic v2 schemas, in-memory atomic JSON store (scans.json), and real-time SSE telemetry.</a:t>
-            </a:r>
-          </a:p>
-          <a:p>
-            <a:pPr>
-              <a:spcAft>
-                <a:spcPts val="600"/>
-              </a:spcAft>
-              <a:defRPr sz="1000" b="1">
-                <a:solidFill>
-                  <a:srgbClr val="F8FAFC"/>
-                </a:solidFill>
-                <a:latin typeface="Inter"/>
-              </a:defRPr>
-            </a:pPr>
-            <a:r>
-              <a:t>• Tactical Developer UI: </a:t>
-            </a:r>
-            <a:r>
-              <a:rPr b="0">
-                <a:solidFill>
-                  <a:srgbClr val="94A3B8"/>
-                </a:solidFill>
-                <a:latin typeface="Inter"/>
-              </a:rPr>
-              <a:t>React 19, Vite, Tailwind CSS with tactical design system tokens, WCAG AA contrast standards, and responsive desktop dashboards.</a:t>
+                  <a:srgbClr val="FFFFFF"/>
+                </a:solidFill>
+                <a:latin typeface="Trebuchet MS"/>
+              </a:defRPr>
+            </a:pPr>
+            <a:r>
+              <a:t>Core Safety Invariant: The deterministic security engine runs 100% offline. Zero credentials or tokens are ever persisted or exposed. The AI Analyst is strictly an evidence-only side-branch with zero raw data egress.</a:t>
             </a:r>
           </a:p>
         </p:txBody>
@@ -7703,11 +7767,11 @@
             <a:avLst/>
           </a:prstGeom>
           <a:solidFill>
-            <a:srgbClr val="06080F"/>
+            <a:srgbClr val="070913"/>
           </a:solidFill>
           <a:ln>
             <a:solidFill>
-              <a:srgbClr val="06080F"/>
+              <a:srgbClr val="070913"/>
             </a:solidFill>
           </a:ln>
         </p:spPr>
@@ -7742,7 +7806,7 @@
         <p:spPr>
           <a:xfrm>
             <a:off x="731520" y="365760"/>
-            <a:ext cx="10698480" cy="822960"/>
+            <a:ext cx="10728655" cy="1005840"/>
           </a:xfrm>
           <a:prstGeom prst="rect">
             <a:avLst/>
@@ -7759,28 +7823,28 @@
               <a:spcAft>
                 <a:spcPts val="200"/>
               </a:spcAft>
-              <a:defRPr sz="1000" b="1">
+              <a:defRPr sz="1100" b="1">
                 <a:solidFill>
                   <a:srgbClr val="38BDF8"/>
                 </a:solidFill>
-                <a:latin typeface="Inter"/>
-              </a:defRPr>
-            </a:pPr>
-            <a:r>
-              <a:t>LIVE PRODUCT DEMO</a:t>
-            </a:r>
-          </a:p>
-          <a:p>
-            <a:pPr>
-              <a:defRPr sz="2200" b="1">
-                <a:solidFill>
-                  <a:srgbClr val="F8FAFC"/>
-                </a:solidFill>
-                <a:latin typeface="Inter"/>
-              </a:defRPr>
-            </a:pPr>
-            <a:r>
-              <a:t>Developer-First Tactical Triage &amp; Differential Inspector</a:t>
+                <a:latin typeface="Trebuchet MS"/>
+              </a:defRPr>
+            </a:pPr>
+            <a:r>
+              <a:t>● KEY FEATURES (DEVSECOPS INTEGRATION)</a:t>
+            </a:r>
+          </a:p>
+          <a:p>
+            <a:pPr>
+              <a:defRPr sz="2600" b="1">
+                <a:solidFill>
+                  <a:srgbClr val="FFFFFF"/>
+                </a:solidFill>
+                <a:latin typeface="Trebuchet MS"/>
+              </a:defRPr>
+            </a:pPr>
+            <a:r>
+              <a:t>Shift-Left Automated Security Quality Gate for CI/CD</a:t>
             </a:r>
           </a:p>
         </p:txBody>
@@ -7793,18 +7857,18 @@
         </p:nvSpPr>
         <p:spPr>
           <a:xfrm>
-            <a:off x="731520" y="1234440"/>
-            <a:ext cx="10728655" cy="19050"/>
+            <a:off x="731520" y="1371600"/>
+            <a:ext cx="10728655" cy="25400"/>
           </a:xfrm>
           <a:prstGeom prst="rect">
             <a:avLst/>
           </a:prstGeom>
           <a:solidFill>
-            <a:srgbClr val="232D42"/>
+            <a:srgbClr val="202945"/>
           </a:solidFill>
           <a:ln>
             <a:solidFill>
-              <a:srgbClr val="232D42"/>
+              <a:srgbClr val="202945"/>
             </a:solidFill>
           </a:ln>
         </p:spPr>
@@ -7853,11 +7917,11 @@
           <a:lstStyle/>
           <a:p>
             <a:pPr>
-              <a:defRPr sz="900">
+              <a:defRPr sz="1000" b="1">
                 <a:solidFill>
                   <a:srgbClr val="64748B"/>
                 </a:solidFill>
-                <a:latin typeface="Inter"/>
+                <a:latin typeface="Calibri"/>
               </a:defRPr>
             </a:pPr>
             <a:r>
@@ -7874,18 +7938,18 @@
         </p:nvSpPr>
         <p:spPr>
           <a:xfrm>
-            <a:off x="731520" y="1463040"/>
-            <a:ext cx="5272430" cy="3931920"/>
+            <a:off x="731520" y="1645920"/>
+            <a:ext cx="3413455" cy="2377440"/>
           </a:xfrm>
           <a:prstGeom prst="roundRect">
             <a:avLst/>
           </a:prstGeom>
           <a:solidFill>
-            <a:srgbClr val="0D111C"/>
+            <a:srgbClr val="0E1326"/>
           </a:solidFill>
-          <a:ln w="12700">
+          <a:ln w="25400">
             <a:solidFill>
-              <a:srgbClr val="232D42"/>
+              <a:srgbClr val="38BDF8"/>
             </a:solidFill>
           </a:ln>
         </p:spPr>
@@ -7911,40 +7975,16 @@
           </a:p>
         </p:txBody>
       </p:sp>
-      <p:pic>
-        <p:nvPicPr>
-          <p:cNvPr id="7" name="Picture 6" descr="triage-workspace.png"/>
-          <p:cNvPicPr>
-            <a:picLocks noChangeAspect="1"/>
-          </p:cNvPicPr>
-          <p:nvPr/>
-        </p:nvPicPr>
-        <p:blipFill>
-          <a:blip r:embed="rId2"/>
-          <a:stretch>
-            <a:fillRect/>
-          </a:stretch>
-        </p:blipFill>
-        <p:spPr>
-          <a:xfrm>
-            <a:off x="822960" y="1554480"/>
-            <a:ext cx="5089550" cy="2926080"/>
-          </a:xfrm>
-          <a:prstGeom prst="rect">
-            <a:avLst/>
-          </a:prstGeom>
-        </p:spPr>
-      </p:pic>
-      <p:sp>
-        <p:nvSpPr>
-          <p:cNvPr id="8" name="TextBox 7"/>
+      <p:sp>
+        <p:nvSpPr>
+          <p:cNvPr id="7" name="TextBox 6"/>
           <p:cNvSpPr txBox="1"/>
           <p:nvPr/>
         </p:nvSpPr>
         <p:spPr>
           <a:xfrm>
-            <a:off x="822960" y="4572000"/>
-            <a:ext cx="5089550" cy="731520"/>
+            <a:off x="914400" y="1810512"/>
+            <a:ext cx="3047695" cy="2048256"/>
           </a:xfrm>
           <a:prstGeom prst="rect">
             <a:avLst/>
@@ -7958,52 +7998,71 @@
           <a:lstStyle/>
           <a:p>
             <a:pPr>
+              <a:spcAft>
+                <a:spcPts val="400"/>
+              </a:spcAft>
               <a:defRPr sz="1100" b="1">
                 <a:solidFill>
                   <a:srgbClr val="38BDF8"/>
                 </a:solidFill>
-                <a:latin typeface="Inter"/>
-              </a:defRPr>
-            </a:pPr>
-            <a:r>
-              <a:t>Results Triage Workspace: Real-Time Findings Stream</a:t>
-            </a:r>
-          </a:p>
-          <a:p>
-            <a:pPr>
-              <a:defRPr sz="950">
+                <a:latin typeface="Trebuchet MS"/>
+              </a:defRPr>
+            </a:pPr>
+            <a:r>
+              <a:t>HEADLESS CI GATE CLI</a:t>
+            </a:r>
+          </a:p>
+          <a:p>
+            <a:pPr>
+              <a:spcAft>
+                <a:spcPts val="1000"/>
+              </a:spcAft>
+              <a:defRPr sz="1700" b="1">
+                <a:solidFill>
+                  <a:srgbClr val="FFFFFF"/>
+                </a:solidFill>
+                <a:latin typeface="Trebuchet MS"/>
+              </a:defRPr>
+            </a:pPr>
+            <a:r>
+              <a:t>Fails Builds on Violations</a:t>
+            </a:r>
+          </a:p>
+          <a:p>
+            <a:pPr>
+              <a:defRPr sz="1100">
                 <a:solidFill>
                   <a:srgbClr val="94A3B8"/>
                 </a:solidFill>
-                <a:latin typeface="Inter"/>
-              </a:defRPr>
-            </a:pPr>
-            <a:r>
-              <a:t>Live telemetry HUD with verified control counts, severity badges, and one-click filtering by OWASP category, status, and path.</a:t>
-            </a:r>
-          </a:p>
-        </p:txBody>
-      </p:sp>
-      <p:sp>
-        <p:nvSpPr>
-          <p:cNvPr id="9" name="Rounded Rectangle 8"/>
+                <a:latin typeface="Calibri"/>
+              </a:defRPr>
+            </a:pPr>
+            <a:r>
+              <a:t>Integrates directly into GitHub Actions or GitLab CI. Breaks pull request builds with exit code 1 when CRITICAL or HIGH authorization vulnerabilities are detected.</a:t>
+            </a:r>
+          </a:p>
+        </p:txBody>
+      </p:sp>
+      <p:sp>
+        <p:nvSpPr>
+          <p:cNvPr id="8" name="Rounded Rectangle 7"/>
           <p:cNvSpPr/>
           <p:nvPr/>
         </p:nvSpPr>
         <p:spPr>
           <a:xfrm>
-            <a:off x="6186830" y="1463040"/>
-            <a:ext cx="5272430" cy="3931920"/>
+            <a:off x="4389120" y="1645920"/>
+            <a:ext cx="3413455" cy="2377440"/>
           </a:xfrm>
           <a:prstGeom prst="roundRect">
             <a:avLst/>
           </a:prstGeom>
           <a:solidFill>
-            <a:srgbClr val="0D111C"/>
+            <a:srgbClr val="0E1326"/>
           </a:solidFill>
-          <a:ln w="12700">
+          <a:ln w="25400">
             <a:solidFill>
-              <a:srgbClr val="232D42"/>
+              <a:srgbClr val="34D399"/>
             </a:solidFill>
           </a:ln>
         </p:spPr>
@@ -8029,40 +8088,16 @@
           </a:p>
         </p:txBody>
       </p:sp>
-      <p:pic>
-        <p:nvPicPr>
-          <p:cNvPr id="10" name="Picture 9" descr="finding-inspector.png"/>
-          <p:cNvPicPr>
-            <a:picLocks noChangeAspect="1"/>
-          </p:cNvPicPr>
-          <p:nvPr/>
-        </p:nvPicPr>
-        <p:blipFill>
-          <a:blip r:embed="rId3"/>
-          <a:stretch>
-            <a:fillRect/>
-          </a:stretch>
-        </p:blipFill>
-        <p:spPr>
-          <a:xfrm>
-            <a:off x="6278270" y="1554480"/>
-            <a:ext cx="5089550" cy="2926080"/>
-          </a:xfrm>
-          <a:prstGeom prst="rect">
-            <a:avLst/>
-          </a:prstGeom>
-        </p:spPr>
-      </p:pic>
-      <p:sp>
-        <p:nvSpPr>
-          <p:cNvPr id="11" name="TextBox 10"/>
+      <p:sp>
+        <p:nvSpPr>
+          <p:cNvPr id="9" name="TextBox 8"/>
           <p:cNvSpPr txBox="1"/>
           <p:nvPr/>
         </p:nvSpPr>
         <p:spPr>
           <a:xfrm>
-            <a:off x="6278270" y="4572000"/>
-            <a:ext cx="5089550" cy="731520"/>
+            <a:off x="4572000" y="1810512"/>
+            <a:ext cx="3047695" cy="2048256"/>
           </a:xfrm>
           <a:prstGeom prst="rect">
             <a:avLst/>
@@ -8076,52 +8111,71 @@
           <a:lstStyle/>
           <a:p>
             <a:pPr>
+              <a:spcAft>
+                <a:spcPts val="400"/>
+              </a:spcAft>
               <a:defRPr sz="1100" b="1">
                 <a:solidFill>
-                  <a:srgbClr val="EF4444"/>
-                </a:solidFill>
-                <a:latin typeface="Inter"/>
-              </a:defRPr>
-            </a:pPr>
-            <a:r>
-              <a:t>Differential Finding Inspector: Mathematical Evidence</a:t>
-            </a:r>
-          </a:p>
-          <a:p>
-            <a:pPr>
-              <a:defRPr sz="950">
+                  <a:srgbClr val="34D399"/>
+                </a:solidFill>
+                <a:latin typeface="Trebuchet MS"/>
+              </a:defRPr>
+            </a:pPr>
+            <a:r>
+              <a:t>SARIF CODE SCANNING</a:t>
+            </a:r>
+          </a:p>
+          <a:p>
+            <a:pPr>
+              <a:spcAft>
+                <a:spcPts val="1000"/>
+              </a:spcAft>
+              <a:defRPr sz="1700" b="1">
+                <a:solidFill>
+                  <a:srgbClr val="FFFFFF"/>
+                </a:solidFill>
+                <a:latin typeface="Trebuchet MS"/>
+              </a:defRPr>
+            </a:pPr>
+            <a:r>
+              <a:t>Native GitHub Security Alerts</a:t>
+            </a:r>
+          </a:p>
+          <a:p>
+            <a:pPr>
+              <a:defRPr sz="1100">
                 <a:solidFill>
                   <a:srgbClr val="94A3B8"/>
                 </a:solidFill>
-                <a:latin typeface="Inter"/>
-              </a:defRPr>
-            </a:pPr>
-            <a:r>
-              <a:t>Side-by-side baseline vs attack diff showing BOLA breach (200 OK vs 403), leaked PII fields, 4-factor risk breakdown, and copy-paste cURL PoC.</a:t>
-            </a:r>
-          </a:p>
-        </p:txBody>
-      </p:sp>
-      <p:sp>
-        <p:nvSpPr>
-          <p:cNvPr id="12" name="Rounded Rectangle 11"/>
+                <a:latin typeface="Calibri"/>
+              </a:defRPr>
+            </a:pPr>
+            <a:r>
+              <a:t>Exports deterministic SARIF, Markdown, and JSON audit reports. Findings appear directly inside GitHub PR code review diffs with line-level remediation hints.</a:t>
+            </a:r>
+          </a:p>
+        </p:txBody>
+      </p:sp>
+      <p:sp>
+        <p:nvSpPr>
+          <p:cNvPr id="10" name="Rounded Rectangle 9"/>
           <p:cNvSpPr/>
           <p:nvPr/>
         </p:nvSpPr>
         <p:spPr>
           <a:xfrm>
-            <a:off x="731520" y="5577840"/>
-            <a:ext cx="10728655" cy="594360"/>
+            <a:off x="8046720" y="1645920"/>
+            <a:ext cx="3413455" cy="2377440"/>
           </a:xfrm>
           <a:prstGeom prst="roundRect">
             <a:avLst/>
           </a:prstGeom>
           <a:solidFill>
-            <a:srgbClr val="151B2B"/>
+            <a:srgbClr val="0E1326"/>
           </a:solidFill>
-          <a:ln w="12700">
+          <a:ln w="25400">
             <a:solidFill>
-              <a:srgbClr val="10B981"/>
+              <a:srgbClr val="818CF8"/>
             </a:solidFill>
           </a:ln>
         </p:spPr>
@@ -8149,14 +8203,14 @@
       </p:sp>
       <p:sp>
         <p:nvSpPr>
-          <p:cNvPr id="13" name="TextBox 12"/>
+          <p:cNvPr id="11" name="TextBox 10"/>
           <p:cNvSpPr txBox="1"/>
           <p:nvPr/>
         </p:nvSpPr>
         <p:spPr>
           <a:xfrm>
-            <a:off x="914400" y="5650992"/>
-            <a:ext cx="10362895" cy="457200"/>
+            <a:off x="8229600" y="1810512"/>
+            <a:ext cx="3047695" cy="2048256"/>
           </a:xfrm>
           <a:prstGeom prst="rect">
             <a:avLst/>
@@ -8170,15 +8224,157 @@
           <a:lstStyle/>
           <a:p>
             <a:pPr>
-              <a:defRPr sz="1000" b="1">
-                <a:solidFill>
-                  <a:srgbClr val="F8FAFC"/>
-                </a:solidFill>
-                <a:latin typeface="Inter"/>
-              </a:defRPr>
-            </a:pPr>
-            <a:r>
-              <a:t>Zero Guesswork: Every finding includes empirical reproduction status (100% verified), exact response diffs, and reproducible curl PoCs.</a:t>
+              <a:spcAft>
+                <a:spcPts val="400"/>
+              </a:spcAft>
+              <a:defRPr sz="1100" b="1">
+                <a:solidFill>
+                  <a:srgbClr val="818CF8"/>
+                </a:solidFill>
+                <a:latin typeface="Trebuchet MS"/>
+              </a:defRPr>
+            </a:pPr>
+            <a:r>
+              <a:t>HERMETIC TEST SANDBOX</a:t>
+            </a:r>
+          </a:p>
+          <a:p>
+            <a:pPr>
+              <a:spcAft>
+                <a:spcPts val="1000"/>
+              </a:spcAft>
+              <a:defRPr sz="1700" b="1">
+                <a:solidFill>
+                  <a:srgbClr val="FFFFFF"/>
+                </a:solidFill>
+                <a:latin typeface="Trebuchet MS"/>
+              </a:defRPr>
+            </a:pPr>
+            <a:r>
+              <a:t>Verified Zero-Trust Baseline</a:t>
+            </a:r>
+          </a:p>
+          <a:p>
+            <a:pPr>
+              <a:defRPr sz="1100">
+                <a:solidFill>
+                  <a:srgbClr val="94A3B8"/>
+                </a:solidFill>
+                <a:latin typeface="Calibri"/>
+              </a:defRPr>
+            </a:pPr>
+            <a:r>
+              <a:t>Ships with realistic vulnerable sandboxes (Retail Store, Healthcare, FinTech). When SECURE_MODE=true is enabled, SentinelAPI verifies 100% controls pass.</a:t>
+            </a:r>
+          </a:p>
+        </p:txBody>
+      </p:sp>
+      <p:sp>
+        <p:nvSpPr>
+          <p:cNvPr id="12" name="Rounded Rectangle 11"/>
+          <p:cNvSpPr/>
+          <p:nvPr/>
+        </p:nvSpPr>
+        <p:spPr>
+          <a:xfrm>
+            <a:off x="731520" y="4297680"/>
+            <a:ext cx="10728655" cy="1828800"/>
+          </a:xfrm>
+          <a:prstGeom prst="roundRect">
+            <a:avLst/>
+          </a:prstGeom>
+          <a:solidFill>
+            <a:srgbClr val="131A36"/>
+          </a:solidFill>
+          <a:ln w="19050">
+            <a:solidFill>
+              <a:srgbClr val="38BDF8"/>
+            </a:solidFill>
+          </a:ln>
+        </p:spPr>
+        <p:style>
+          <a:lnRef idx="1">
+            <a:schemeClr val="accent1"/>
+          </a:lnRef>
+          <a:fillRef idx="3">
+            <a:schemeClr val="accent1"/>
+          </a:fillRef>
+          <a:effectRef idx="2">
+            <a:schemeClr val="accent1"/>
+          </a:effectRef>
+          <a:fontRef idx="minor">
+            <a:schemeClr val="lt1"/>
+          </a:fontRef>
+        </p:style>
+        <p:txBody>
+          <a:bodyPr rtlCol="0" anchor="ctr"/>
+          <a:lstStyle/>
+          <a:p>
+            <a:pPr algn="ctr"/>
+          </a:p>
+        </p:txBody>
+      </p:sp>
+      <p:sp>
+        <p:nvSpPr>
+          <p:cNvPr id="13" name="TextBox 12"/>
+          <p:cNvSpPr txBox="1"/>
+          <p:nvPr/>
+        </p:nvSpPr>
+        <p:spPr>
+          <a:xfrm>
+            <a:off x="1005840" y="4434840"/>
+            <a:ext cx="10180015" cy="1554480"/>
+          </a:xfrm>
+          <a:prstGeom prst="rect">
+            <a:avLst/>
+          </a:prstGeom>
+          <a:noFill/>
+        </p:spPr>
+        <p:txBody>
+          <a:bodyPr wrap="square">
+            <a:spAutoFit/>
+          </a:bodyPr>
+          <a:lstStyle/>
+          <a:p>
+            <a:pPr>
+              <a:spcAft>
+                <a:spcPts val="600"/>
+              </a:spcAft>
+              <a:defRPr sz="1100" b="1">
+                <a:solidFill>
+                  <a:srgbClr val="38BDF8"/>
+                </a:solidFill>
+                <a:latin typeface="Trebuchet MS"/>
+              </a:defRPr>
+            </a:pPr>
+            <a:r>
+              <a:t>GITHUB ACTIONS WORKFLOW INTEGRATION (.github/workflows/ci.yml):</a:t>
+            </a:r>
+          </a:p>
+          <a:p>
+            <a:pPr>
+              <a:defRPr sz="1100">
+                <a:solidFill>
+                  <a:srgbClr val="FFFFFF"/>
+                </a:solidFill>
+                <a:latin typeface="Consolas"/>
+              </a:defRPr>
+            </a:pPr>
+            <a:r>
+              <a:t># 1. Trigger automated security scan against PR environment</a:t>
+            </a:r>
+            <a:br/>
+            <a:r>
+              <a:t>python -m app.cli scan --spec http://api:8000/openapi.json --base-url http://api:8000 --json-out findings.json</a:t>
+            </a:r>
+            <a:br/>
+            <a:br/>
+            <a:r>
+              <a:t># 2. Enforce quality gate (fails build on CRITICAL / HIGH findings with confidence &gt;= 0.70)</a:t>
+            </a:r>
+            <a:br/>
+            <a:r>
+              <a:t>python scripts/ci_gate.py --findings findings.json --fail-on CRITICAL,HIGH --min-confidence 0.70</a:t>
             </a:r>
           </a:p>
         </p:txBody>
@@ -8216,11 +8412,11 @@
             <a:avLst/>
           </a:prstGeom>
           <a:solidFill>
-            <a:srgbClr val="06080F"/>
+            <a:srgbClr val="070913"/>
           </a:solidFill>
           <a:ln>
             <a:solidFill>
-              <a:srgbClr val="06080F"/>
+              <a:srgbClr val="070913"/>
             </a:solidFill>
           </a:ln>
         </p:spPr>
@@ -8255,7 +8451,7 @@
         <p:spPr>
           <a:xfrm>
             <a:off x="731520" y="365760"/>
-            <a:ext cx="10698480" cy="822960"/>
+            <a:ext cx="10728655" cy="1005840"/>
           </a:xfrm>
           <a:prstGeom prst="rect">
             <a:avLst/>
@@ -8272,28 +8468,28 @@
               <a:spcAft>
                 <a:spcPts val="200"/>
               </a:spcAft>
-              <a:defRPr sz="1000" b="1">
+              <a:defRPr sz="1100" b="1">
                 <a:solidFill>
                   <a:srgbClr val="38BDF8"/>
                 </a:solidFill>
-                <a:latin typeface="Inter"/>
-              </a:defRPr>
-            </a:pPr>
-            <a:r>
-              <a:t>CI/CD &amp; INTEGRATION</a:t>
-            </a:r>
-          </a:p>
-          <a:p>
-            <a:pPr>
-              <a:defRPr sz="2200" b="1">
-                <a:solidFill>
-                  <a:srgbClr val="F8FAFC"/>
-                </a:solidFill>
-                <a:latin typeface="Inter"/>
-              </a:defRPr>
-            </a:pPr>
-            <a:r>
-              <a:t>Shift-Left Automated Security Quality Gate for CI/CD</a:t>
+                <a:latin typeface="Trebuchet MS"/>
+              </a:defRPr>
+            </a:pPr>
+            <a:r>
+              <a:t>● DEMO SCREENSHOTS (WORKING PROTOTYPE)</a:t>
+            </a:r>
+          </a:p>
+          <a:p>
+            <a:pPr>
+              <a:defRPr sz="2600" b="1">
+                <a:solidFill>
+                  <a:srgbClr val="FFFFFF"/>
+                </a:solidFill>
+                <a:latin typeface="Trebuchet MS"/>
+              </a:defRPr>
+            </a:pPr>
+            <a:r>
+              <a:t>Live Tactical Dashboard &amp; Mathematical Differential Inspector</a:t>
             </a:r>
           </a:p>
         </p:txBody>
@@ -8306,18 +8502,18 @@
         </p:nvSpPr>
         <p:spPr>
           <a:xfrm>
-            <a:off x="731520" y="1234440"/>
-            <a:ext cx="10728655" cy="19050"/>
+            <a:off x="731520" y="1371600"/>
+            <a:ext cx="10728655" cy="25400"/>
           </a:xfrm>
           <a:prstGeom prst="rect">
             <a:avLst/>
           </a:prstGeom>
           <a:solidFill>
-            <a:srgbClr val="232D42"/>
+            <a:srgbClr val="202945"/>
           </a:solidFill>
           <a:ln>
             <a:solidFill>
-              <a:srgbClr val="232D42"/>
+              <a:srgbClr val="202945"/>
             </a:solidFill>
           </a:ln>
         </p:spPr>
@@ -8366,11 +8562,11 @@
           <a:lstStyle/>
           <a:p>
             <a:pPr>
-              <a:defRPr sz="900">
+              <a:defRPr sz="1000" b="1">
                 <a:solidFill>
                   <a:srgbClr val="64748B"/>
                 </a:solidFill>
-                <a:latin typeface="Inter"/>
+                <a:latin typeface="Calibri"/>
               </a:defRPr>
             </a:pPr>
             <a:r>
@@ -8387,18 +8583,18 @@
         </p:nvSpPr>
         <p:spPr>
           <a:xfrm>
-            <a:off x="731520" y="1463040"/>
-            <a:ext cx="3413455" cy="3474720"/>
+            <a:off x="731520" y="1554480"/>
+            <a:ext cx="5272430" cy="4023360"/>
           </a:xfrm>
           <a:prstGeom prst="roundRect">
             <a:avLst/>
           </a:prstGeom>
           <a:solidFill>
-            <a:srgbClr val="0D111C"/>
+            <a:srgbClr val="0E1326"/>
           </a:solidFill>
-          <a:ln w="12700">
+          <a:ln w="19050">
             <a:solidFill>
-              <a:srgbClr val="232D42"/>
+              <a:srgbClr val="202945"/>
             </a:solidFill>
           </a:ln>
         </p:spPr>
@@ -8424,26 +8620,99 @@
           </a:p>
         </p:txBody>
       </p:sp>
-      <p:sp>
-        <p:nvSpPr>
-          <p:cNvPr id="7" name="Rectangle 6"/>
+      <p:pic>
+        <p:nvPicPr>
+          <p:cNvPr id="7" name="Picture 6" descr="triage-workspace.png"/>
+          <p:cNvPicPr>
+            <a:picLocks noChangeAspect="1"/>
+          </p:cNvPicPr>
+          <p:nvPr/>
+        </p:nvPicPr>
+        <p:blipFill>
+          <a:blip r:embed="rId2"/>
+          <a:stretch>
+            <a:fillRect/>
+          </a:stretch>
+        </p:blipFill>
+        <p:spPr>
+          <a:xfrm>
+            <a:off x="822960" y="1645920"/>
+            <a:ext cx="5089550" cy="3017520"/>
+          </a:xfrm>
+          <a:prstGeom prst="rect">
+            <a:avLst/>
+          </a:prstGeom>
+        </p:spPr>
+      </p:pic>
+      <p:sp>
+        <p:nvSpPr>
+          <p:cNvPr id="8" name="TextBox 7"/>
+          <p:cNvSpPr txBox="1"/>
+          <p:nvPr/>
+        </p:nvSpPr>
+        <p:spPr>
+          <a:xfrm>
+            <a:off x="822960" y="4709160"/>
+            <a:ext cx="5089550" cy="777240"/>
+          </a:xfrm>
+          <a:prstGeom prst="rect">
+            <a:avLst/>
+          </a:prstGeom>
+          <a:noFill/>
+        </p:spPr>
+        <p:txBody>
+          <a:bodyPr wrap="square">
+            <a:spAutoFit/>
+          </a:bodyPr>
+          <a:lstStyle/>
+          <a:p>
+            <a:pPr>
+              <a:defRPr sz="1300" b="1">
+                <a:solidFill>
+                  <a:srgbClr val="38BDF8"/>
+                </a:solidFill>
+                <a:latin typeface="Trebuchet MS"/>
+              </a:defRPr>
+            </a:pPr>
+            <a:r>
+              <a:t>Results Triage Workspace: Real-Time Stream</a:t>
+            </a:r>
+          </a:p>
+          <a:p>
+            <a:pPr>
+              <a:defRPr sz="1000">
+                <a:solidFill>
+                  <a:srgbClr val="94A3B8"/>
+                </a:solidFill>
+                <a:latin typeface="Calibri"/>
+              </a:defRPr>
+            </a:pPr>
+            <a:r>
+              <a:t>Live telemetry HUD with verified control counts, severity badges, and one-click filtering across OWASP categories, status codes, and paths.</a:t>
+            </a:r>
+          </a:p>
+        </p:txBody>
+      </p:sp>
+      <p:sp>
+        <p:nvSpPr>
+          <p:cNvPr id="9" name="Rounded Rectangle 8"/>
           <p:cNvSpPr/>
           <p:nvPr/>
         </p:nvSpPr>
         <p:spPr>
           <a:xfrm>
-            <a:off x="731520" y="1463040"/>
-            <a:ext cx="3413455" cy="38100"/>
-          </a:xfrm>
-          <a:prstGeom prst="rect">
+            <a:off x="6186830" y="1554480"/>
+            <a:ext cx="5272430" cy="4023360"/>
+          </a:xfrm>
+          <a:prstGeom prst="roundRect">
             <a:avLst/>
           </a:prstGeom>
           <a:solidFill>
-            <a:srgbClr val="38BDF8"/>
+            <a:srgbClr val="0E1326"/>
           </a:solidFill>
-          <a:ln>
+          <a:ln w="19050">
             <a:solidFill>
-              <a:srgbClr val="38BDF8"/>
+              <a:srgbClr val="202945"/>
             </a:solidFill>
           </a:ln>
         </p:spPr>
@@ -8469,16 +8738,40 @@
           </a:p>
         </p:txBody>
       </p:sp>
-      <p:sp>
-        <p:nvSpPr>
-          <p:cNvPr id="8" name="TextBox 7"/>
+      <p:pic>
+        <p:nvPicPr>
+          <p:cNvPr id="10" name="Picture 9" descr="finding-inspector.png"/>
+          <p:cNvPicPr>
+            <a:picLocks noChangeAspect="1"/>
+          </p:cNvPicPr>
+          <p:nvPr/>
+        </p:nvPicPr>
+        <p:blipFill>
+          <a:blip r:embed="rId3"/>
+          <a:stretch>
+            <a:fillRect/>
+          </a:stretch>
+        </p:blipFill>
+        <p:spPr>
+          <a:xfrm>
+            <a:off x="6278270" y="1645920"/>
+            <a:ext cx="5089550" cy="3017520"/>
+          </a:xfrm>
+          <a:prstGeom prst="rect">
+            <a:avLst/>
+          </a:prstGeom>
+        </p:spPr>
+      </p:pic>
+      <p:sp>
+        <p:nvSpPr>
+          <p:cNvPr id="11" name="TextBox 10"/>
           <p:cNvSpPr txBox="1"/>
           <p:nvPr/>
         </p:nvSpPr>
         <p:spPr>
           <a:xfrm>
-            <a:off x="914400" y="1645920"/>
-            <a:ext cx="3047695" cy="3108960"/>
+            <a:off x="6278270" y="4709160"/>
+            <a:ext cx="5089550" cy="777240"/>
           </a:xfrm>
           <a:prstGeom prst="rect">
             <a:avLst/>
@@ -8492,71 +8785,52 @@
           <a:lstStyle/>
           <a:p>
             <a:pPr>
-              <a:spcAft>
-                <a:spcPts val="200"/>
-              </a:spcAft>
-              <a:defRPr sz="1200" b="1">
-                <a:solidFill>
-                  <a:srgbClr val="38BDF8"/>
-                </a:solidFill>
-                <a:latin typeface="Inter"/>
-              </a:defRPr>
-            </a:pPr>
-            <a:r>
-              <a:t>HEADLESS CI GATE CLI</a:t>
-            </a:r>
-          </a:p>
-          <a:p>
-            <a:pPr>
-              <a:spcAft>
-                <a:spcPts val="1000"/>
-              </a:spcAft>
-              <a:defRPr sz="900">
-                <a:solidFill>
-                  <a:srgbClr val="64748B"/>
-                </a:solidFill>
-                <a:latin typeface="JetBrains Mono"/>
-              </a:defRPr>
-            </a:pPr>
-            <a:r>
-              <a:t>scripts/ci_gate.py</a:t>
-            </a:r>
-          </a:p>
-          <a:p>
-            <a:pPr>
-              <a:defRPr sz="1050">
+              <a:defRPr sz="1300" b="1">
+                <a:solidFill>
+                  <a:srgbClr val="F87171"/>
+                </a:solidFill>
+                <a:latin typeface="Trebuchet MS"/>
+              </a:defRPr>
+            </a:pPr>
+            <a:r>
+              <a:t>Differential Inspector: Side-by-Side Proof</a:t>
+            </a:r>
+          </a:p>
+          <a:p>
+            <a:pPr>
+              <a:defRPr sz="1000">
                 <a:solidFill>
                   <a:srgbClr val="94A3B8"/>
                 </a:solidFill>
-                <a:latin typeface="Inter"/>
-              </a:defRPr>
-            </a:pPr>
-            <a:r>
-              <a:t>Runs headlessly in any CI/CD pipeline (GitHub Actions, GitLab CI, CircleCI). Evaluates exported scan findings against configurable policy thresholds (--fail-on CRITICAL,HIGH --min-confidence 0.70) and breaks builds with exit code 1 on policy breaches.</a:t>
-            </a:r>
-          </a:p>
-        </p:txBody>
-      </p:sp>
-      <p:sp>
-        <p:nvSpPr>
-          <p:cNvPr id="9" name="Rounded Rectangle 8"/>
+                <a:latin typeface="Calibri"/>
+              </a:defRPr>
+            </a:pPr>
+            <a:r>
+              <a:t>Side-by-side baseline vs attack diff showing BOLA breach (200 OK vs 403), leaked PII fields, 4-factor risk breakdown, and copy-paste cURL PoC.</a:t>
+            </a:r>
+          </a:p>
+        </p:txBody>
+      </p:sp>
+      <p:sp>
+        <p:nvSpPr>
+          <p:cNvPr id="12" name="Rounded Rectangle 11"/>
           <p:cNvSpPr/>
           <p:nvPr/>
         </p:nvSpPr>
         <p:spPr>
           <a:xfrm>
-            <a:off x="4389120" y="1463040"/>
-            <a:ext cx="3413455" cy="3474720"/>
+            <a:off x="731520" y="5715000"/>
+            <a:ext cx="10728655" cy="502920"/>
           </a:xfrm>
           <a:prstGeom prst="roundRect">
             <a:avLst/>
           </a:prstGeom>
           <a:solidFill>
-            <a:srgbClr val="0D111C"/>
+            <a:srgbClr val="131A36"/>
           </a:solidFill>
-          <a:ln w="12700">
+          <a:ln w="19050">
             <a:solidFill>
-              <a:srgbClr val="232D42"/>
+              <a:srgbClr val="34D399"/>
             </a:solidFill>
           </a:ln>
         </p:spPr>
@@ -8584,59 +8858,14 @@
       </p:sp>
       <p:sp>
         <p:nvSpPr>
-          <p:cNvPr id="10" name="Rectangle 9"/>
-          <p:cNvSpPr/>
-          <p:nvPr/>
-        </p:nvSpPr>
-        <p:spPr>
-          <a:xfrm>
-            <a:off x="4389120" y="1463040"/>
-            <a:ext cx="3413455" cy="38100"/>
-          </a:xfrm>
-          <a:prstGeom prst="rect">
-            <a:avLst/>
-          </a:prstGeom>
-          <a:solidFill>
-            <a:srgbClr val="10B981"/>
-          </a:solidFill>
-          <a:ln>
-            <a:solidFill>
-              <a:srgbClr val="10B981"/>
-            </a:solidFill>
-          </a:ln>
-        </p:spPr>
-        <p:style>
-          <a:lnRef idx="1">
-            <a:schemeClr val="accent1"/>
-          </a:lnRef>
-          <a:fillRef idx="3">
-            <a:schemeClr val="accent1"/>
-          </a:fillRef>
-          <a:effectRef idx="2">
-            <a:schemeClr val="accent1"/>
-          </a:effectRef>
-          <a:fontRef idx="minor">
-            <a:schemeClr val="lt1"/>
-          </a:fontRef>
-        </p:style>
-        <p:txBody>
-          <a:bodyPr rtlCol="0" anchor="ctr"/>
-          <a:lstStyle/>
-          <a:p>
-            <a:pPr algn="ctr"/>
-          </a:p>
-        </p:txBody>
-      </p:sp>
-      <p:sp>
-        <p:nvSpPr>
-          <p:cNvPr id="11" name="TextBox 10"/>
+          <p:cNvPr id="13" name="TextBox 12"/>
           <p:cNvSpPr txBox="1"/>
           <p:nvPr/>
         </p:nvSpPr>
         <p:spPr>
           <a:xfrm>
-            <a:off x="4572000" y="1645920"/>
-            <a:ext cx="3047695" cy="3108960"/>
+            <a:off x="914400" y="5760720"/>
+            <a:ext cx="10362895" cy="411480"/>
           </a:xfrm>
           <a:prstGeom prst="rect">
             <a:avLst/>
@@ -8644,312 +8873,21 @@
           <a:noFill/>
         </p:spPr>
         <p:txBody>
-          <a:bodyPr wrap="square">
+          <a:bodyPr wrap="none">
             <a:spAutoFit/>
           </a:bodyPr>
           <a:lstStyle/>
           <a:p>
             <a:pPr>
-              <a:spcAft>
-                <a:spcPts val="200"/>
-              </a:spcAft>
-              <a:defRPr sz="1200" b="1">
-                <a:solidFill>
-                  <a:srgbClr val="10B981"/>
-                </a:solidFill>
-                <a:latin typeface="Inter"/>
-              </a:defRPr>
-            </a:pPr>
-            <a:r>
-              <a:t>AUTOMATED SARIF &amp; AUDIT EXPORTS</a:t>
-            </a:r>
-          </a:p>
-          <a:p>
-            <a:pPr>
-              <a:spcAft>
-                <a:spcPts val="1000"/>
-              </a:spcAft>
-              <a:defRPr sz="900">
-                <a:solidFill>
-                  <a:srgbClr val="64748B"/>
-                </a:solidFill>
-                <a:latin typeface="JetBrains Mono"/>
-              </a:defRPr>
-            </a:pPr>
-            <a:r>
-              <a:t>GitHub Security Tab Integration</a:t>
-            </a:r>
-          </a:p>
-          <a:p>
-            <a:pPr>
-              <a:defRPr sz="1050">
-                <a:solidFill>
-                  <a:srgbClr val="94A3B8"/>
-                </a:solidFill>
-                <a:latin typeface="Inter"/>
-              </a:defRPr>
-            </a:pPr>
-            <a:r>
-              <a:t>Automatically renders and exports deterministic SARIF, Markdown, and JSON audit reports. Findings appear natively in GitHub Security code scanning alerts, enabling instant developer triage inside pull requests.</a:t>
-            </a:r>
-          </a:p>
-        </p:txBody>
-      </p:sp>
-      <p:sp>
-        <p:nvSpPr>
-          <p:cNvPr id="12" name="Rounded Rectangle 11"/>
-          <p:cNvSpPr/>
-          <p:nvPr/>
-        </p:nvSpPr>
-        <p:spPr>
-          <a:xfrm>
-            <a:off x="8046720" y="1463040"/>
-            <a:ext cx="3413455" cy="3474720"/>
-          </a:xfrm>
-          <a:prstGeom prst="roundRect">
-            <a:avLst/>
-          </a:prstGeom>
-          <a:solidFill>
-            <a:srgbClr val="0D111C"/>
-          </a:solidFill>
-          <a:ln w="12700">
-            <a:solidFill>
-              <a:srgbClr val="232D42"/>
-            </a:solidFill>
-          </a:ln>
-        </p:spPr>
-        <p:style>
-          <a:lnRef idx="1">
-            <a:schemeClr val="accent1"/>
-          </a:lnRef>
-          <a:fillRef idx="3">
-            <a:schemeClr val="accent1"/>
-          </a:fillRef>
-          <a:effectRef idx="2">
-            <a:schemeClr val="accent1"/>
-          </a:effectRef>
-          <a:fontRef idx="minor">
-            <a:schemeClr val="lt1"/>
-          </a:fontRef>
-        </p:style>
-        <p:txBody>
-          <a:bodyPr rtlCol="0" anchor="ctr"/>
-          <a:lstStyle/>
-          <a:p>
-            <a:pPr algn="ctr"/>
-          </a:p>
-        </p:txBody>
-      </p:sp>
-      <p:sp>
-        <p:nvSpPr>
-          <p:cNvPr id="13" name="Rectangle 12"/>
-          <p:cNvSpPr/>
-          <p:nvPr/>
-        </p:nvSpPr>
-        <p:spPr>
-          <a:xfrm>
-            <a:off x="8046720" y="1463040"/>
-            <a:ext cx="3413455" cy="38100"/>
-          </a:xfrm>
-          <a:prstGeom prst="rect">
-            <a:avLst/>
-          </a:prstGeom>
-          <a:solidFill>
-            <a:srgbClr val="6366F1"/>
-          </a:solidFill>
-          <a:ln>
-            <a:solidFill>
-              <a:srgbClr val="6366F1"/>
-            </a:solidFill>
-          </a:ln>
-        </p:spPr>
-        <p:style>
-          <a:lnRef idx="1">
-            <a:schemeClr val="accent1"/>
-          </a:lnRef>
-          <a:fillRef idx="3">
-            <a:schemeClr val="accent1"/>
-          </a:fillRef>
-          <a:effectRef idx="2">
-            <a:schemeClr val="accent1"/>
-          </a:effectRef>
-          <a:fontRef idx="minor">
-            <a:schemeClr val="lt1"/>
-          </a:fontRef>
-        </p:style>
-        <p:txBody>
-          <a:bodyPr rtlCol="0" anchor="ctr"/>
-          <a:lstStyle/>
-          <a:p>
-            <a:pPr algn="ctr"/>
-          </a:p>
-        </p:txBody>
-      </p:sp>
-      <p:sp>
-        <p:nvSpPr>
-          <p:cNvPr id="14" name="TextBox 13"/>
-          <p:cNvSpPr txBox="1"/>
-          <p:nvPr/>
-        </p:nvSpPr>
-        <p:spPr>
-          <a:xfrm>
-            <a:off x="8229600" y="1645920"/>
-            <a:ext cx="3047695" cy="3108960"/>
-          </a:xfrm>
-          <a:prstGeom prst="rect">
-            <a:avLst/>
-          </a:prstGeom>
-          <a:noFill/>
-        </p:spPr>
-        <p:txBody>
-          <a:bodyPr wrap="square">
-            <a:spAutoFit/>
-          </a:bodyPr>
-          <a:lstStyle/>
-          <a:p>
-            <a:pPr>
-              <a:spcAft>
-                <a:spcPts val="200"/>
-              </a:spcAft>
-              <a:defRPr sz="1200" b="1">
-                <a:solidFill>
-                  <a:srgbClr val="6366F1"/>
-                </a:solidFill>
-                <a:latin typeface="Inter"/>
-              </a:defRPr>
-            </a:pPr>
-            <a:r>
-              <a:t>HERMETIC MULTI-TARGET SANDBOX</a:t>
-            </a:r>
-          </a:p>
-          <a:p>
-            <a:pPr>
-              <a:spcAft>
-                <a:spcPts val="1000"/>
-              </a:spcAft>
-              <a:defRPr sz="900">
-                <a:solidFill>
-                  <a:srgbClr val="64748B"/>
-                </a:solidFill>
-                <a:latin typeface="JetBrains Mono"/>
-              </a:defRPr>
-            </a:pPr>
-            <a:r>
-              <a:t>Turnkey Docker Compose Testbed</a:t>
-            </a:r>
-          </a:p>
-          <a:p>
-            <a:pPr>
-              <a:defRPr sz="1050">
-                <a:solidFill>
-                  <a:srgbClr val="94A3B8"/>
-                </a:solidFill>
-                <a:latin typeface="Inter"/>
-              </a:defRPr>
-            </a:pPr>
-            <a:r>
-              <a:t>Ships with realistic vulnerable sandboxes (Retail Store, MedPulse Healthcare, FinTech API) on ports 9000-9003. When SECURE_MODE=true is toggled, SentinelAPI verifies 100% access controls pass with zero false positives.</a:t>
-            </a:r>
-          </a:p>
-        </p:txBody>
-      </p:sp>
-      <p:sp>
-        <p:nvSpPr>
-          <p:cNvPr id="15" name="Rounded Rectangle 14"/>
-          <p:cNvSpPr/>
-          <p:nvPr/>
-        </p:nvSpPr>
-        <p:spPr>
-          <a:xfrm>
-            <a:off x="731520" y="5120640"/>
-            <a:ext cx="10728655" cy="1097280"/>
-          </a:xfrm>
-          <a:prstGeom prst="roundRect">
-            <a:avLst/>
-          </a:prstGeom>
-          <a:solidFill>
-            <a:srgbClr val="151B2B"/>
-          </a:solidFill>
-          <a:ln w="12700">
-            <a:solidFill>
-              <a:srgbClr val="232D42"/>
-            </a:solidFill>
-          </a:ln>
-        </p:spPr>
-        <p:style>
-          <a:lnRef idx="1">
-            <a:schemeClr val="accent1"/>
-          </a:lnRef>
-          <a:fillRef idx="3">
-            <a:schemeClr val="accent1"/>
-          </a:fillRef>
-          <a:effectRef idx="2">
-            <a:schemeClr val="accent1"/>
-          </a:effectRef>
-          <a:fontRef idx="minor">
-            <a:schemeClr val="lt1"/>
-          </a:fontRef>
-        </p:style>
-        <p:txBody>
-          <a:bodyPr rtlCol="0" anchor="ctr"/>
-          <a:lstStyle/>
-          <a:p>
-            <a:pPr algn="ctr"/>
-          </a:p>
-        </p:txBody>
-      </p:sp>
-      <p:sp>
-        <p:nvSpPr>
-          <p:cNvPr id="16" name="TextBox 15"/>
-          <p:cNvSpPr txBox="1"/>
-          <p:nvPr/>
-        </p:nvSpPr>
-        <p:spPr>
-          <a:xfrm>
-            <a:off x="914400" y="5193792"/>
-            <a:ext cx="10362895" cy="914400"/>
-          </a:xfrm>
-          <a:prstGeom prst="rect">
-            <a:avLst/>
-          </a:prstGeom>
-          <a:noFill/>
-        </p:spPr>
-        <p:txBody>
-          <a:bodyPr wrap="square">
-            <a:spAutoFit/>
-          </a:bodyPr>
-          <a:lstStyle/>
-          <a:p>
-            <a:pPr>
-              <a:spcAft>
-                <a:spcPts val="400"/>
-              </a:spcAft>
-              <a:defRPr sz="1000" b="1">
-                <a:solidFill>
-                  <a:srgbClr val="38BDF8"/>
-                </a:solidFill>
-                <a:latin typeface="Inter"/>
-              </a:defRPr>
-            </a:pPr>
-            <a:r>
-              <a:t>GitHub Actions Workflow Integration (ci.yml):</a:t>
-            </a:r>
-          </a:p>
-          <a:p>
-            <a:pPr>
-              <a:defRPr sz="950">
-                <a:solidFill>
-                  <a:srgbClr val="7DD3FC"/>
-                </a:solidFill>
-                <a:latin typeface="JetBrains Mono"/>
-              </a:defRPr>
-            </a:pPr>
-            <a:r>
-              <a:t>python -m app.cli scan --spec http://api:8000/openapi.json --base-url http://api:8000 --json-out findings.json</a:t>
-            </a:r>
-            <a:br/>
-            <a:r>
-              <a:t>python scripts/ci_gate.py --findings findings.json --fail-on CRITICAL,HIGH --min-confidence 0.70</a:t>
+              <a:defRPr sz="1100" b="1">
+                <a:solidFill>
+                  <a:srgbClr val="FFFFFF"/>
+                </a:solidFill>
+                <a:latin typeface="Trebuchet MS"/>
+              </a:defRPr>
+            </a:pPr>
+            <a:r>
+              <a:t>Empirical Evidence: Zero guesswork. Developers receive exact response diffs, 100% verified reproduction badges, and copy-paste shell commands.</a:t>
             </a:r>
           </a:p>
         </p:txBody>
@@ -8987,11 +8925,11 @@
             <a:avLst/>
           </a:prstGeom>
           <a:solidFill>
-            <a:srgbClr val="06080F"/>
+            <a:srgbClr val="070913"/>
           </a:solidFill>
           <a:ln>
             <a:solidFill>
-              <a:srgbClr val="06080F"/>
+              <a:srgbClr val="070913"/>
             </a:solidFill>
           </a:ln>
         </p:spPr>
@@ -9026,7 +8964,7 @@
         <p:spPr>
           <a:xfrm>
             <a:off x="731520" y="365760"/>
-            <a:ext cx="10698480" cy="822960"/>
+            <a:ext cx="10728655" cy="1005840"/>
           </a:xfrm>
           <a:prstGeom prst="rect">
             <a:avLst/>
@@ -9043,28 +8981,28 @@
               <a:spcAft>
                 <a:spcPts val="200"/>
               </a:spcAft>
-              <a:defRPr sz="1000" b="1">
+              <a:defRPr sz="1100" b="1">
                 <a:solidFill>
                   <a:srgbClr val="38BDF8"/>
                 </a:solidFill>
-                <a:latin typeface="Inter"/>
-              </a:defRPr>
-            </a:pPr>
-            <a:r>
-              <a:t>FUTURE SCOPE &amp; SAAS VISION</a:t>
-            </a:r>
-          </a:p>
-          <a:p>
-            <a:pPr>
-              <a:defRPr sz="2200" b="1">
-                <a:solidFill>
-                  <a:srgbClr val="F8FAFC"/>
-                </a:solidFill>
-                <a:latin typeface="Inter"/>
-              </a:defRPr>
-            </a:pPr>
-            <a:r>
-              <a:t>Commercial Roadmap: Beyond the Hackathon</a:t>
+                <a:latin typeface="Trebuchet MS"/>
+              </a:defRPr>
+            </a:pPr>
+            <a:r>
+              <a:t>● FUTURE SCOPE (COMMERCIAL ROADMAP)</a:t>
+            </a:r>
+          </a:p>
+          <a:p>
+            <a:pPr>
+              <a:defRPr sz="2600" b="1">
+                <a:solidFill>
+                  <a:srgbClr val="FFFFFF"/>
+                </a:solidFill>
+                <a:latin typeface="Trebuchet MS"/>
+              </a:defRPr>
+            </a:pPr>
+            <a:r>
+              <a:t>Beyond the Hackathon: Path to an Enterprise SaaS Platform</a:t>
             </a:r>
           </a:p>
         </p:txBody>
@@ -9077,18 +9015,18 @@
         </p:nvSpPr>
         <p:spPr>
           <a:xfrm>
-            <a:off x="731520" y="1234440"/>
-            <a:ext cx="10728655" cy="19050"/>
+            <a:off x="731520" y="1371600"/>
+            <a:ext cx="10728655" cy="25400"/>
           </a:xfrm>
           <a:prstGeom prst="rect">
             <a:avLst/>
           </a:prstGeom>
           <a:solidFill>
-            <a:srgbClr val="232D42"/>
+            <a:srgbClr val="202945"/>
           </a:solidFill>
           <a:ln>
             <a:solidFill>
-              <a:srgbClr val="232D42"/>
+              <a:srgbClr val="202945"/>
             </a:solidFill>
           </a:ln>
         </p:spPr>
@@ -9137,11 +9075,11 @@
           <a:lstStyle/>
           <a:p>
             <a:pPr>
-              <a:defRPr sz="900">
+              <a:defRPr sz="1000" b="1">
                 <a:solidFill>
                   <a:srgbClr val="64748B"/>
                 </a:solidFill>
-                <a:latin typeface="Inter"/>
+                <a:latin typeface="Calibri"/>
               </a:defRPr>
             </a:pPr>
             <a:r>
@@ -9158,18 +9096,18 @@
         </p:nvSpPr>
         <p:spPr>
           <a:xfrm>
-            <a:off x="731520" y="1463040"/>
+            <a:off x="731520" y="1645920"/>
             <a:ext cx="5272430" cy="2057400"/>
           </a:xfrm>
           <a:prstGeom prst="roundRect">
             <a:avLst/>
           </a:prstGeom>
           <a:solidFill>
-            <a:srgbClr val="0D111C"/>
+            <a:srgbClr val="0E1326"/>
           </a:solidFill>
-          <a:ln w="12700">
+          <a:ln w="25400">
             <a:solidFill>
-              <a:srgbClr val="232D42"/>
+              <a:srgbClr val="38BDF8"/>
             </a:solidFill>
           </a:ln>
         </p:spPr>
@@ -9197,24 +9135,92 @@
       </p:sp>
       <p:sp>
         <p:nvSpPr>
-          <p:cNvPr id="7" name="Rectangle 6"/>
+          <p:cNvPr id="7" name="TextBox 6"/>
+          <p:cNvSpPr txBox="1"/>
+          <p:nvPr/>
+        </p:nvSpPr>
+        <p:spPr>
+          <a:xfrm>
+            <a:off x="960120" y="1828800"/>
+            <a:ext cx="4815230" cy="1691640"/>
+          </a:xfrm>
+          <a:prstGeom prst="rect">
+            <a:avLst/>
+          </a:prstGeom>
+          <a:noFill/>
+        </p:spPr>
+        <p:txBody>
+          <a:bodyPr wrap="square">
+            <a:spAutoFit/>
+          </a:bodyPr>
+          <a:lstStyle/>
+          <a:p>
+            <a:pPr>
+              <a:spcAft>
+                <a:spcPts val="200"/>
+              </a:spcAft>
+              <a:defRPr sz="1100" b="1">
+                <a:solidFill>
+                  <a:srgbClr val="38BDF8"/>
+                </a:solidFill>
+                <a:latin typeface="Trebuchet MS"/>
+              </a:defRPr>
+            </a:pPr>
+            <a:r>
+              <a:t>PHASE A · COMMERCIAL SAAS</a:t>
+            </a:r>
+          </a:p>
+          <a:p>
+            <a:pPr>
+              <a:spcAft>
+                <a:spcPts val="800"/>
+              </a:spcAft>
+              <a:defRPr sz="1600" b="1">
+                <a:solidFill>
+                  <a:srgbClr val="FFFFFF"/>
+                </a:solidFill>
+                <a:latin typeface="Trebuchet MS"/>
+              </a:defRPr>
+            </a:pPr>
+            <a:r>
+              <a:t>Open-Source CLI + Paid Cloud Dashboard</a:t>
+            </a:r>
+          </a:p>
+          <a:p>
+            <a:pPr>
+              <a:defRPr sz="1150">
+                <a:solidFill>
+                  <a:srgbClr val="94A3B8"/>
+                </a:solidFill>
+                <a:latin typeface="Calibri"/>
+              </a:defRPr>
+            </a:pPr>
+            <a:r>
+              <a:t>Maintain open-source CLI runner for individual developers and CI gates. Commercialize a hosted, multi-tenant SaaS dashboard for engineering organizations with centralized RBAC, historical risk trending, team collaboration, and vulnerability triage workflows.</a:t>
+            </a:r>
+          </a:p>
+        </p:txBody>
+      </p:sp>
+      <p:sp>
+        <p:nvSpPr>
+          <p:cNvPr id="8" name="Rounded Rectangle 7"/>
           <p:cNvSpPr/>
           <p:nvPr/>
         </p:nvSpPr>
         <p:spPr>
           <a:xfrm>
-            <a:off x="731520" y="1463040"/>
-            <a:ext cx="5272430" cy="38100"/>
-          </a:xfrm>
-          <a:prstGeom prst="rect">
+            <a:off x="6186830" y="1645920"/>
+            <a:ext cx="5272430" cy="2057400"/>
+          </a:xfrm>
+          <a:prstGeom prst="roundRect">
             <a:avLst/>
           </a:prstGeom>
           <a:solidFill>
-            <a:srgbClr val="38BDF8"/>
+            <a:srgbClr val="0E1326"/>
           </a:solidFill>
-          <a:ln>
+          <a:ln w="25400">
             <a:solidFill>
-              <a:srgbClr val="38BDF8"/>
+              <a:srgbClr val="34D399"/>
             </a:solidFill>
           </a:ln>
         </p:spPr>
@@ -9242,13 +9248,13 @@
       </p:sp>
       <p:sp>
         <p:nvSpPr>
-          <p:cNvPr id="8" name="TextBox 7"/>
+          <p:cNvPr id="9" name="TextBox 8"/>
           <p:cNvSpPr txBox="1"/>
           <p:nvPr/>
         </p:nvSpPr>
         <p:spPr>
           <a:xfrm>
-            <a:off x="960120" y="1645920"/>
+            <a:off x="6415430" y="1828800"/>
             <a:ext cx="4815230" cy="1691640"/>
           </a:xfrm>
           <a:prstGeom prst="rect">
@@ -9266,68 +9272,68 @@
               <a:spcAft>
                 <a:spcPts val="200"/>
               </a:spcAft>
-              <a:defRPr sz="1150" b="1">
-                <a:solidFill>
-                  <a:srgbClr val="38BDF8"/>
-                </a:solidFill>
-                <a:latin typeface="Inter"/>
-              </a:defRPr>
-            </a:pPr>
-            <a:r>
-              <a:t>OPEN-SOURCE CLI + PAID CLOUD SAAS</a:t>
+              <a:defRPr sz="1100" b="1">
+                <a:solidFill>
+                  <a:srgbClr val="34D399"/>
+                </a:solidFill>
+                <a:latin typeface="Trebuchet MS"/>
+              </a:defRPr>
+            </a:pPr>
+            <a:r>
+              <a:t>PHASE B · ENTERPRISE AUTH</a:t>
             </a:r>
           </a:p>
           <a:p>
             <a:pPr>
               <a:spcAft>
-                <a:spcPts val="600"/>
+                <a:spcPts val="800"/>
               </a:spcAft>
-              <a:defRPr sz="950" b="1">
-                <a:solidFill>
-                  <a:srgbClr val="64748B"/>
-                </a:solidFill>
-                <a:latin typeface="Inter"/>
-              </a:defRPr>
-            </a:pPr>
-            <a:r>
-              <a:t>Freemium Enterprise Model</a:t>
-            </a:r>
-          </a:p>
-          <a:p>
-            <a:pPr>
-              <a:defRPr sz="1000">
+              <a:defRPr sz="1600" b="1">
+                <a:solidFill>
+                  <a:srgbClr val="FFFFFF"/>
+                </a:solidFill>
+                <a:latin typeface="Trebuchet MS"/>
+              </a:defRPr>
+            </a:pPr>
+            <a:r>
+              <a:t>Enterprise OAuth2 &amp; SSO Negotiation</a:t>
+            </a:r>
+          </a:p>
+          <a:p>
+            <a:pPr>
+              <a:defRPr sz="1150">
                 <a:solidFill>
                   <a:srgbClr val="94A3B8"/>
                 </a:solidFill>
-                <a:latin typeface="Inter"/>
-              </a:defRPr>
-            </a:pPr>
-            <a:r>
-              <a:t>Maintain open-source CLI for individual developers and local CI gates. Commercialize a hosted, multi-tenant SaaS dashboard for engineering teams with centralized RBAC, historical risk trending, and vulnerability triage workflows.</a:t>
-            </a:r>
-          </a:p>
-        </p:txBody>
-      </p:sp>
-      <p:sp>
-        <p:nvSpPr>
-          <p:cNvPr id="9" name="Rounded Rectangle 8"/>
+                <a:latin typeface="Calibri"/>
+              </a:defRPr>
+            </a:pPr>
+            <a:r>
+              <a:t>Extend beyond static JWTs to automated OAuth2 / OIDC PKCE flow negotiation, SAML handshakes, and mTLS client-certificate authentication for complex enterprise banking, fintech, and healthcare environments.</a:t>
+            </a:r>
+          </a:p>
+        </p:txBody>
+      </p:sp>
+      <p:sp>
+        <p:nvSpPr>
+          <p:cNvPr id="10" name="Rounded Rectangle 9"/>
           <p:cNvSpPr/>
           <p:nvPr/>
         </p:nvSpPr>
         <p:spPr>
           <a:xfrm>
-            <a:off x="6186830" y="1463040"/>
+            <a:off x="731520" y="3886200"/>
             <a:ext cx="5272430" cy="2057400"/>
           </a:xfrm>
           <a:prstGeom prst="roundRect">
             <a:avLst/>
           </a:prstGeom>
           <a:solidFill>
-            <a:srgbClr val="0D111C"/>
+            <a:srgbClr val="0E1326"/>
           </a:solidFill>
-          <a:ln w="12700">
+          <a:ln w="25400">
             <a:solidFill>
-              <a:srgbClr val="232D42"/>
+              <a:srgbClr val="FBBF24"/>
             </a:solidFill>
           </a:ln>
         </p:spPr>
@@ -9355,24 +9361,92 @@
       </p:sp>
       <p:sp>
         <p:nvSpPr>
-          <p:cNvPr id="10" name="Rectangle 9"/>
+          <p:cNvPr id="11" name="TextBox 10"/>
+          <p:cNvSpPr txBox="1"/>
+          <p:nvPr/>
+        </p:nvSpPr>
+        <p:spPr>
+          <a:xfrm>
+            <a:off x="960120" y="4069080"/>
+            <a:ext cx="4815230" cy="1691640"/>
+          </a:xfrm>
+          <a:prstGeom prst="rect">
+            <a:avLst/>
+          </a:prstGeom>
+          <a:noFill/>
+        </p:spPr>
+        <p:txBody>
+          <a:bodyPr wrap="square">
+            <a:spAutoFit/>
+          </a:bodyPr>
+          <a:lstStyle/>
+          <a:p>
+            <a:pPr>
+              <a:spcAft>
+                <a:spcPts val="200"/>
+              </a:spcAft>
+              <a:defRPr sz="1100" b="1">
+                <a:solidFill>
+                  <a:srgbClr val="FBBF24"/>
+                </a:solidFill>
+                <a:latin typeface="Trebuchet MS"/>
+              </a:defRPr>
+            </a:pPr>
+            <a:r>
+              <a:t>PHASE C · COMPLIANCE MAPPINGS</a:t>
+            </a:r>
+          </a:p>
+          <a:p>
+            <a:pPr>
+              <a:spcAft>
+                <a:spcPts val="800"/>
+              </a:spcAft>
+              <a:defRPr sz="1600" b="1">
+                <a:solidFill>
+                  <a:srgbClr val="FFFFFF"/>
+                </a:solidFill>
+                <a:latin typeface="Trebuchet MS"/>
+              </a:defRPr>
+            </a:pPr>
+            <a:r>
+              <a:t>Custom Regulatory Policy Engines</a:t>
+            </a:r>
+          </a:p>
+          <a:p>
+            <a:pPr>
+              <a:defRPr sz="1150">
+                <a:solidFill>
+                  <a:srgbClr val="94A3B8"/>
+                </a:solidFill>
+                <a:latin typeface="Calibri"/>
+              </a:defRPr>
+            </a:pPr>
+            <a:r>
+              <a:t>Provide declarative YAML policy mappings translating authorization findings directly into HIPAA, PCI-DSS, SOC 2, and ISO 27001 audit deliverables with automated executive PDF sign-off reports.</a:t>
+            </a:r>
+          </a:p>
+        </p:txBody>
+      </p:sp>
+      <p:sp>
+        <p:nvSpPr>
+          <p:cNvPr id="12" name="Rounded Rectangle 11"/>
           <p:cNvSpPr/>
           <p:nvPr/>
         </p:nvSpPr>
         <p:spPr>
           <a:xfrm>
-            <a:off x="6186830" y="1463040"/>
-            <a:ext cx="5272430" cy="38100"/>
-          </a:xfrm>
-          <a:prstGeom prst="rect">
+            <a:off x="6186830" y="3886200"/>
+            <a:ext cx="5272430" cy="2057400"/>
+          </a:xfrm>
+          <a:prstGeom prst="roundRect">
             <a:avLst/>
           </a:prstGeom>
           <a:solidFill>
-            <a:srgbClr val="10B981"/>
+            <a:srgbClr val="0E1326"/>
           </a:solidFill>
-          <a:ln>
+          <a:ln w="25400">
             <a:solidFill>
-              <a:srgbClr val="10B981"/>
+              <a:srgbClr val="C084FC"/>
             </a:solidFill>
           </a:ln>
         </p:spPr>
@@ -9400,13 +9474,13 @@
       </p:sp>
       <p:sp>
         <p:nvSpPr>
-          <p:cNvPr id="11" name="TextBox 10"/>
+          <p:cNvPr id="13" name="TextBox 12"/>
           <p:cNvSpPr txBox="1"/>
           <p:nvPr/>
         </p:nvSpPr>
         <p:spPr>
           <a:xfrm>
-            <a:off x="6415430" y="1645920"/>
+            <a:off x="6415430" y="4069080"/>
             <a:ext cx="4815230" cy="1691640"/>
           </a:xfrm>
           <a:prstGeom prst="rect">
@@ -9424,356 +9498,40 @@
               <a:spcAft>
                 <a:spcPts val="200"/>
               </a:spcAft>
-              <a:defRPr sz="1150" b="1">
-                <a:solidFill>
-                  <a:srgbClr val="10B981"/>
-                </a:solidFill>
-                <a:latin typeface="Inter"/>
-              </a:defRPr>
-            </a:pPr>
-            <a:r>
-              <a:t>ENTERPRISE OAUTH2 &amp; SSO NEGOTIATION</a:t>
+              <a:defRPr sz="1100" b="1">
+                <a:solidFill>
+                  <a:srgbClr val="C084FC"/>
+                </a:solidFill>
+                <a:latin typeface="Trebuchet MS"/>
+              </a:defRPr>
+            </a:pPr>
+            <a:r>
+              <a:t>PHASE D · DISTRIBUTED MESH</a:t>
             </a:r>
           </a:p>
           <a:p>
             <a:pPr>
               <a:spcAft>
-                <a:spcPts val="600"/>
+                <a:spcPts val="800"/>
               </a:spcAft>
-              <a:defRPr sz="950" b="1">
-                <a:solidFill>
-                  <a:srgbClr val="64748B"/>
-                </a:solidFill>
-                <a:latin typeface="Inter"/>
-              </a:defRPr>
-            </a:pPr>
-            <a:r>
-              <a:t>Automated Identity Orchestration</a:t>
-            </a:r>
-          </a:p>
-          <a:p>
-            <a:pPr>
-              <a:defRPr sz="1000">
+              <a:defRPr sz="1600" b="1">
+                <a:solidFill>
+                  <a:srgbClr val="FFFFFF"/>
+                </a:solidFill>
+                <a:latin typeface="Trebuchet MS"/>
+              </a:defRPr>
+            </a:pPr>
+            <a:r>
+              <a:t>Distributed Scanner Mesh &amp; Persistence</a:t>
+            </a:r>
+          </a:p>
+          <a:p>
+            <a:pPr>
+              <a:defRPr sz="1150">
                 <a:solidFill>
                   <a:srgbClr val="94A3B8"/>
                 </a:solidFill>
-                <a:latin typeface="Inter"/>
-              </a:defRPr>
-            </a:pPr>
-            <a:r>
-              <a:t>Extend beyond static JWTs to automated OAuth2 / OIDC PKCE flow negotiation, SAML handshakes, and mTLS client-certificate authentication for complex enterprise banking and healthcare environments.</a:t>
-            </a:r>
-          </a:p>
-        </p:txBody>
-      </p:sp>
-      <p:sp>
-        <p:nvSpPr>
-          <p:cNvPr id="12" name="Rounded Rectangle 11"/>
-          <p:cNvSpPr/>
-          <p:nvPr/>
-        </p:nvSpPr>
-        <p:spPr>
-          <a:xfrm>
-            <a:off x="731520" y="3749039"/>
-            <a:ext cx="5272430" cy="2057400"/>
-          </a:xfrm>
-          <a:prstGeom prst="roundRect">
-            <a:avLst/>
-          </a:prstGeom>
-          <a:solidFill>
-            <a:srgbClr val="0D111C"/>
-          </a:solidFill>
-          <a:ln w="12700">
-            <a:solidFill>
-              <a:srgbClr val="232D42"/>
-            </a:solidFill>
-          </a:ln>
-        </p:spPr>
-        <p:style>
-          <a:lnRef idx="1">
-            <a:schemeClr val="accent1"/>
-          </a:lnRef>
-          <a:fillRef idx="3">
-            <a:schemeClr val="accent1"/>
-          </a:fillRef>
-          <a:effectRef idx="2">
-            <a:schemeClr val="accent1"/>
-          </a:effectRef>
-          <a:fontRef idx="minor">
-            <a:schemeClr val="lt1"/>
-          </a:fontRef>
-        </p:style>
-        <p:txBody>
-          <a:bodyPr rtlCol="0" anchor="ctr"/>
-          <a:lstStyle/>
-          <a:p>
-            <a:pPr algn="ctr"/>
-          </a:p>
-        </p:txBody>
-      </p:sp>
-      <p:sp>
-        <p:nvSpPr>
-          <p:cNvPr id="13" name="Rectangle 12"/>
-          <p:cNvSpPr/>
-          <p:nvPr/>
-        </p:nvSpPr>
-        <p:spPr>
-          <a:xfrm>
-            <a:off x="731520" y="3749039"/>
-            <a:ext cx="5272430" cy="38100"/>
-          </a:xfrm>
-          <a:prstGeom prst="rect">
-            <a:avLst/>
-          </a:prstGeom>
-          <a:solidFill>
-            <a:srgbClr val="F59E0B"/>
-          </a:solidFill>
-          <a:ln>
-            <a:solidFill>
-              <a:srgbClr val="F59E0B"/>
-            </a:solidFill>
-          </a:ln>
-        </p:spPr>
-        <p:style>
-          <a:lnRef idx="1">
-            <a:schemeClr val="accent1"/>
-          </a:lnRef>
-          <a:fillRef idx="3">
-            <a:schemeClr val="accent1"/>
-          </a:fillRef>
-          <a:effectRef idx="2">
-            <a:schemeClr val="accent1"/>
-          </a:effectRef>
-          <a:fontRef idx="minor">
-            <a:schemeClr val="lt1"/>
-          </a:fontRef>
-        </p:style>
-        <p:txBody>
-          <a:bodyPr rtlCol="0" anchor="ctr"/>
-          <a:lstStyle/>
-          <a:p>
-            <a:pPr algn="ctr"/>
-          </a:p>
-        </p:txBody>
-      </p:sp>
-      <p:sp>
-        <p:nvSpPr>
-          <p:cNvPr id="14" name="TextBox 13"/>
-          <p:cNvSpPr txBox="1"/>
-          <p:nvPr/>
-        </p:nvSpPr>
-        <p:spPr>
-          <a:xfrm>
-            <a:off x="960120" y="3931919"/>
-            <a:ext cx="4815230" cy="1691640"/>
-          </a:xfrm>
-          <a:prstGeom prst="rect">
-            <a:avLst/>
-          </a:prstGeom>
-          <a:noFill/>
-        </p:spPr>
-        <p:txBody>
-          <a:bodyPr wrap="square">
-            <a:spAutoFit/>
-          </a:bodyPr>
-          <a:lstStyle/>
-          <a:p>
-            <a:pPr>
-              <a:spcAft>
-                <a:spcPts val="200"/>
-              </a:spcAft>
-              <a:defRPr sz="1150" b="1">
-                <a:solidFill>
-                  <a:srgbClr val="F59E0B"/>
-                </a:solidFill>
-                <a:latin typeface="Inter"/>
-              </a:defRPr>
-            </a:pPr>
-            <a:r>
-              <a:t>CUSTOM REGULATORY COMPLIANCE ENGINES</a:t>
-            </a:r>
-          </a:p>
-          <a:p>
-            <a:pPr>
-              <a:spcAft>
-                <a:spcPts val="600"/>
-              </a:spcAft>
-              <a:defRPr sz="950" b="1">
-                <a:solidFill>
-                  <a:srgbClr val="64748B"/>
-                </a:solidFill>
-                <a:latin typeface="Inter"/>
-              </a:defRPr>
-            </a:pPr>
-            <a:r>
-              <a:t>Declarative Compliance Frameworks</a:t>
-            </a:r>
-          </a:p>
-          <a:p>
-            <a:pPr>
-              <a:defRPr sz="1000">
-                <a:solidFill>
-                  <a:srgbClr val="94A3B8"/>
-                </a:solidFill>
-                <a:latin typeface="Inter"/>
-              </a:defRPr>
-            </a:pPr>
-            <a:r>
-              <a:t>Provide declarative YAML policy mappings translating authorization findings directly into HIPAA, PCI-DSS, SOC 2, and ISO 27001 audit deliverables with automated executive PDF sign-off reports.</a:t>
-            </a:r>
-          </a:p>
-        </p:txBody>
-      </p:sp>
-      <p:sp>
-        <p:nvSpPr>
-          <p:cNvPr id="15" name="Rounded Rectangle 14"/>
-          <p:cNvSpPr/>
-          <p:nvPr/>
-        </p:nvSpPr>
-        <p:spPr>
-          <a:xfrm>
-            <a:off x="6186830" y="3749039"/>
-            <a:ext cx="5272430" cy="2057400"/>
-          </a:xfrm>
-          <a:prstGeom prst="roundRect">
-            <a:avLst/>
-          </a:prstGeom>
-          <a:solidFill>
-            <a:srgbClr val="0D111C"/>
-          </a:solidFill>
-          <a:ln w="12700">
-            <a:solidFill>
-              <a:srgbClr val="232D42"/>
-            </a:solidFill>
-          </a:ln>
-        </p:spPr>
-        <p:style>
-          <a:lnRef idx="1">
-            <a:schemeClr val="accent1"/>
-          </a:lnRef>
-          <a:fillRef idx="3">
-            <a:schemeClr val="accent1"/>
-          </a:fillRef>
-          <a:effectRef idx="2">
-            <a:schemeClr val="accent1"/>
-          </a:effectRef>
-          <a:fontRef idx="minor">
-            <a:schemeClr val="lt1"/>
-          </a:fontRef>
-        </p:style>
-        <p:txBody>
-          <a:bodyPr rtlCol="0" anchor="ctr"/>
-          <a:lstStyle/>
-          <a:p>
-            <a:pPr algn="ctr"/>
-          </a:p>
-        </p:txBody>
-      </p:sp>
-      <p:sp>
-        <p:nvSpPr>
-          <p:cNvPr id="16" name="Rectangle 15"/>
-          <p:cNvSpPr/>
-          <p:nvPr/>
-        </p:nvSpPr>
-        <p:spPr>
-          <a:xfrm>
-            <a:off x="6186830" y="3749039"/>
-            <a:ext cx="5272430" cy="38100"/>
-          </a:xfrm>
-          <a:prstGeom prst="rect">
-            <a:avLst/>
-          </a:prstGeom>
-          <a:solidFill>
-            <a:srgbClr val="A855F7"/>
-          </a:solidFill>
-          <a:ln>
-            <a:solidFill>
-              <a:srgbClr val="A855F7"/>
-            </a:solidFill>
-          </a:ln>
-        </p:spPr>
-        <p:style>
-          <a:lnRef idx="1">
-            <a:schemeClr val="accent1"/>
-          </a:lnRef>
-          <a:fillRef idx="3">
-            <a:schemeClr val="accent1"/>
-          </a:fillRef>
-          <a:effectRef idx="2">
-            <a:schemeClr val="accent1"/>
-          </a:effectRef>
-          <a:fontRef idx="minor">
-            <a:schemeClr val="lt1"/>
-          </a:fontRef>
-        </p:style>
-        <p:txBody>
-          <a:bodyPr rtlCol="0" anchor="ctr"/>
-          <a:lstStyle/>
-          <a:p>
-            <a:pPr algn="ctr"/>
-          </a:p>
-        </p:txBody>
-      </p:sp>
-      <p:sp>
-        <p:nvSpPr>
-          <p:cNvPr id="17" name="TextBox 16"/>
-          <p:cNvSpPr txBox="1"/>
-          <p:nvPr/>
-        </p:nvSpPr>
-        <p:spPr>
-          <a:xfrm>
-            <a:off x="6415430" y="3931919"/>
-            <a:ext cx="4815230" cy="1691640"/>
-          </a:xfrm>
-          <a:prstGeom prst="rect">
-            <a:avLst/>
-          </a:prstGeom>
-          <a:noFill/>
-        </p:spPr>
-        <p:txBody>
-          <a:bodyPr wrap="square">
-            <a:spAutoFit/>
-          </a:bodyPr>
-          <a:lstStyle/>
-          <a:p>
-            <a:pPr>
-              <a:spcAft>
-                <a:spcPts val="200"/>
-              </a:spcAft>
-              <a:defRPr sz="1150" b="1">
-                <a:solidFill>
-                  <a:srgbClr val="A855F7"/>
-                </a:solidFill>
-                <a:latin typeface="Inter"/>
-              </a:defRPr>
-            </a:pPr>
-            <a:r>
-              <a:t>DISTRIBUTED SCAN MESH &amp; PERSISTENCE</a:t>
-            </a:r>
-          </a:p>
-          <a:p>
-            <a:pPr>
-              <a:spcAft>
-                <a:spcPts val="600"/>
-              </a:spcAft>
-              <a:defRPr sz="950" b="1">
-                <a:solidFill>
-                  <a:srgbClr val="64748B"/>
-                </a:solidFill>
-                <a:latin typeface="Inter"/>
-              </a:defRPr>
-            </a:pPr>
-            <a:r>
-              <a:t>Scalable Microservice Architecture</a:t>
-            </a:r>
-          </a:p>
-          <a:p>
-            <a:pPr>
-              <a:defRPr sz="1000">
-                <a:solidFill>
-                  <a:srgbClr val="94A3B8"/>
-                </a:solidFill>
-                <a:latin typeface="Inter"/>
+                <a:latin typeface="Calibri"/>
               </a:defRPr>
             </a:pPr>
             <a:r>
